--- a/presentations/02_دوره_تکمیلی_گلف.pptx
+++ b/presentations/02_دوره_تکمیلی_گلف.pptx
@@ -1,6 +1,6 @@
 
 <file path=ppt/presentation.xml><?xml version="1.0" encoding="utf-8"?>
-<p:presentation xmlns:a="http://schemas.openxmlformats.org/drawingml/2006/main" xmlns:r="http://schemas.openxmlformats.org/officeDocument/2006/relationships" xmlns:p="http://schemas.openxmlformats.org/presentationml/2006/main" saveSubsetFonts="1" autoCompressPictures="0">
+<p:presentation xmlns:a="http://schemas.openxmlformats.org/drawingml/2006/main" xmlns:r="http://schemas.openxmlformats.org/officeDocument/2006/relationships" xmlns:p="http://schemas.openxmlformats.org/presentationml/2006/main" saveSubsetFonts="1" autoCompressPictures="0" embedTrueTypeFonts="1">
   <p:sldMasterIdLst>
     <p:sldMasterId id="2147483648" r:id="rId1"/>
   </p:sldMasterIdLst>
@@ -36,6 +36,13 @@
   </p:sldIdLst>
   <p:sldSz cx="12191695" cy="6858000" type="screen4x3"/>
   <p:notesSz cx="6858000" cy="9144000"/>
+  <p:embeddedFontLst>
+    <p:embeddedFont>
+      <p:font typeface="Vazirmatn" charset="178" pitchFamily="34"/>
+      <p:regular r:id="rId35"/>
+      <p:bold r:id="rId36"/>
+    </p:embeddedFont>
+  </p:embeddedFontLst>
   <p:defaultTextStyle>
     <a:defPPr>
       <a:defRPr lang="en-US"/>
@@ -3327,8 +3334,125 @@
         </p:nvSpPr>
         <p:spPr>
           <a:xfrm>
-            <a:off x="914400" y="4069080"/>
-            <a:ext cx="10362895" cy="2377440"/>
+            <a:off x="640080" y="457200"/>
+            <a:ext cx="4572000" cy="868680"/>
+          </a:xfrm>
+          <a:prstGeom prst="rect">
+            <a:avLst/>
+          </a:prstGeom>
+          <a:noFill/>
+        </p:spPr>
+        <p:txBody>
+          <a:bodyPr wrap="square" anchor="t" lIns="0" rIns="0" tIns="0" bIns="0">
+            <a:spAutoFit/>
+          </a:bodyPr>
+          <a:lstStyle/>
+          <a:p>
+            <a:pPr algn="l" rtl="1">
+              <a:lnSpc>
+                <a:spcPct val="108000"/>
+              </a:lnSpc>
+              <a:spcBef>
+                <a:spcPts val="0"/>
+              </a:spcBef>
+              <a:spcAft>
+                <a:spcPts val="0"/>
+              </a:spcAft>
+            </a:pPr>
+            <a:r>
+              <a:rPr sz="3000" b="1" i="0">
+                <a:solidFill>
+                  <a:srgbClr val="FFFFFF"/>
+                </a:solidFill>
+                <a:latin typeface="Vazirmatn"/>
+                <a:cs typeface="Vazirmatn"/>
+              </a:rPr>
+              <a:t>Puttclub</a:t>
+            </a:r>
+          </a:p>
+          <a:p>
+            <a:pPr algn="l" rtl="1">
+              <a:lnSpc>
+                <a:spcPct val="108000"/>
+              </a:lnSpc>
+              <a:spcBef>
+                <a:spcPts val="0"/>
+              </a:spcBef>
+              <a:spcAft>
+                <a:spcPts val="0"/>
+              </a:spcAft>
+            </a:pPr>
+            <a:r>
+              <a:rPr sz="1250" b="0" i="0">
+                <a:solidFill>
+                  <a:srgbClr val="D7E2D6"/>
+                </a:solidFill>
+                <a:latin typeface="Vazirmatn"/>
+                <a:cs typeface="Vazirmatn"/>
+              </a:rPr>
+              <a:t>آکادمی گلف پات‌کلاب  ·  الهام طالبی</a:t>
+            </a:r>
+          </a:p>
+        </p:txBody>
+      </p:sp>
+      <p:sp>
+        <p:nvSpPr>
+          <p:cNvPr id="8" name="Rounded Rectangle 7"/>
+          <p:cNvSpPr/>
+          <p:nvPr/>
+        </p:nvSpPr>
+        <p:spPr>
+          <a:xfrm>
+            <a:off x="8031175" y="502920"/>
+            <a:ext cx="3520440" cy="841248"/>
+          </a:xfrm>
+          <a:prstGeom prst="roundRect">
+            <a:avLst>
+              <a:gd name="adj" fmla="val 6000"/>
+            </a:avLst>
+          </a:prstGeom>
+          <a:solidFill>
+            <a:srgbClr val="FFFFFF">
+              <a:alpha val="120"/>
+            </a:srgbClr>
+          </a:solidFill>
+          <a:ln>
+            <a:noFill/>
+          </a:ln>
+          <a:effectLst/>
+        </p:spPr>
+        <p:style>
+          <a:lnRef idx="1">
+            <a:schemeClr val="accent1"/>
+          </a:lnRef>
+          <a:fillRef idx="3">
+            <a:schemeClr val="accent1"/>
+          </a:fillRef>
+          <a:effectRef idx="2">
+            <a:schemeClr val="accent1"/>
+          </a:effectRef>
+          <a:fontRef idx="minor">
+            <a:schemeClr val="lt1"/>
+          </a:fontRef>
+        </p:style>
+        <p:txBody>
+          <a:bodyPr rtlCol="0" anchor="ctr"/>
+          <a:lstStyle/>
+          <a:p>
+            <a:pPr algn="ctr"/>
+          </a:p>
+        </p:txBody>
+      </p:sp>
+      <p:sp>
+        <p:nvSpPr>
+          <p:cNvPr id="9" name="TextBox 8"/>
+          <p:cNvSpPr txBox="1"/>
+          <p:nvPr/>
+        </p:nvSpPr>
+        <p:spPr>
+          <a:xfrm>
+            <a:off x="8031175" y="548640"/>
+            <a:ext cx="3520440" cy="749808"/>
           </a:xfrm>
           <a:prstGeom prst="rect">
             <a:avLst/>
@@ -3341,7 +3465,7 @@
           </a:bodyPr>
           <a:lstStyle/>
           <a:p>
-            <a:pPr algn="r" rtl="1">
+            <a:pPr algn="ctr" rtl="1">
               <a:lnSpc>
                 <a:spcPct val="108000"/>
               </a:lnSpc>
@@ -3349,177 +3473,55 @@
                 <a:spcPts val="0"/>
               </a:spcBef>
               <a:spcAft>
-                <a:spcPts val="600"/>
-              </a:spcAft>
-            </a:pPr>
-            <a:r>
-              <a:rPr sz="1700" b="1" i="0">
+                <a:spcPts val="100"/>
+              </a:spcAft>
+            </a:pPr>
+            <a:r>
+              <a:rPr sz="1450" b="1" i="0">
+                <a:solidFill>
+                  <a:srgbClr val="FFFFFF"/>
+                </a:solidFill>
+                <a:latin typeface="Vazirmatn"/>
+                <a:cs typeface="Vazirmatn"/>
+              </a:rPr>
+              <a:t>مدرس: الهام طالبی</a:t>
+            </a:r>
+          </a:p>
+          <a:p>
+            <a:pPr algn="ctr" rtl="1">
+              <a:lnSpc>
+                <a:spcPct val="108000"/>
+              </a:lnSpc>
+              <a:spcBef>
+                <a:spcPts val="0"/>
+              </a:spcBef>
+              <a:spcAft>
+                <a:spcPts val="0"/>
+              </a:spcAft>
+            </a:pPr>
+            <a:r>
+              <a:rPr sz="1100" b="0" i="0">
                 <a:solidFill>
                   <a:srgbClr val="64B5F6"/>
                 </a:solidFill>
-                <a:latin typeface="Tahoma"/>
-                <a:cs typeface="Tahoma"/>
-              </a:rPr>
-              <a:t>آکادمی حرفه‌ای گلف  |  سطح ۲</a:t>
-            </a:r>
-          </a:p>
-          <a:p>
-            <a:pPr algn="r" rtl="1">
-              <a:lnSpc>
-                <a:spcPct val="108000"/>
-              </a:lnSpc>
-              <a:spcBef>
-                <a:spcPts val="0"/>
-              </a:spcBef>
-              <a:spcAft>
-                <a:spcPts val="600"/>
-              </a:spcAft>
-            </a:pPr>
-            <a:r>
-              <a:rPr sz="4600" b="1" i="0">
-                <a:solidFill>
-                  <a:srgbClr val="FFFFFF"/>
-                </a:solidFill>
-                <a:latin typeface="Tahoma"/>
-                <a:cs typeface="Tahoma"/>
-              </a:rPr>
-              <a:t>دوره دوم آموزش گلف — تکمیلی</a:t>
-            </a:r>
-          </a:p>
-          <a:p>
-            <a:pPr algn="r" rtl="1">
-              <a:lnSpc>
-                <a:spcPct val="108000"/>
-              </a:lnSpc>
-              <a:spcBef>
-                <a:spcPts val="0"/>
-              </a:spcBef>
-              <a:spcAft>
-                <a:spcPts val="1400"/>
-              </a:spcAft>
-            </a:pPr>
-            <a:r>
-              <a:rPr sz="2000" b="0" i="0">
-                <a:solidFill>
-                  <a:srgbClr val="D7E2D6"/>
-                </a:solidFill>
-                <a:latin typeface="Tahoma"/>
-                <a:cs typeface="Tahoma"/>
-              </a:rPr>
-              <a:t>تثبیت تکنیک، کنترل ضربه و ورود به بازی هدفمند</a:t>
-            </a:r>
-          </a:p>
-          <a:p>
-            <a:pPr algn="r" rtl="1">
-              <a:lnSpc>
-                <a:spcPct val="108000"/>
-              </a:lnSpc>
-              <a:spcBef>
-                <a:spcPts val="0"/>
-              </a:spcBef>
-              <a:spcAft>
-                <a:spcPts val="300"/>
-              </a:spcAft>
-            </a:pPr>
-            <a:r>
-              <a:rPr sz="1100" b="1" i="0">
-                <a:solidFill>
-                  <a:srgbClr val="64B5F6"/>
-                </a:solidFill>
-                <a:latin typeface="Tahoma"/>
-                <a:cs typeface="Tahoma"/>
-              </a:rPr>
-              <a:t>●  </a:t>
-            </a:r>
-            <a:r>
-              <a:rPr sz="1450" b="0" i="0">
-                <a:solidFill>
-                  <a:srgbClr val="C9D6C8"/>
-                </a:solidFill>
-                <a:latin typeface="Tahoma"/>
-                <a:cs typeface="Tahoma"/>
-              </a:rPr>
-              <a:t>پیش‌نیاز: گذراندن دوره مقدماتی</a:t>
-            </a:r>
-          </a:p>
-          <a:p>
-            <a:pPr algn="r" rtl="1">
-              <a:lnSpc>
-                <a:spcPct val="108000"/>
-              </a:lnSpc>
-              <a:spcBef>
-                <a:spcPts val="0"/>
-              </a:spcBef>
-              <a:spcAft>
-                <a:spcPts val="300"/>
-              </a:spcAft>
-            </a:pPr>
-            <a:r>
-              <a:rPr sz="1100" b="1" i="0">
-                <a:solidFill>
-                  <a:srgbClr val="64B5F6"/>
-                </a:solidFill>
-                <a:latin typeface="Tahoma"/>
-                <a:cs typeface="Tahoma"/>
-              </a:rPr>
-              <a:t>●  </a:t>
-            </a:r>
-            <a:r>
-              <a:rPr sz="1450" b="0" i="0">
-                <a:solidFill>
-                  <a:srgbClr val="C9D6C8"/>
-                </a:solidFill>
-                <a:latin typeface="Tahoma"/>
-                <a:cs typeface="Tahoma"/>
-              </a:rPr>
-              <a:t>هدف: تبدیل تکنیک پایه به مهارت تکرارپذیر</a:t>
-            </a:r>
-          </a:p>
-          <a:p>
-            <a:pPr algn="r" rtl="1">
-              <a:lnSpc>
-                <a:spcPct val="108000"/>
-              </a:lnSpc>
-              <a:spcBef>
-                <a:spcPts val="0"/>
-              </a:spcBef>
-              <a:spcAft>
-                <a:spcPts val="300"/>
-              </a:spcAft>
-            </a:pPr>
-            <a:r>
-              <a:rPr sz="1100" b="1" i="0">
-                <a:solidFill>
-                  <a:srgbClr val="64B5F6"/>
-                </a:solidFill>
-                <a:latin typeface="Tahoma"/>
-                <a:cs typeface="Tahoma"/>
-              </a:rPr>
-              <a:t>●  </a:t>
-            </a:r>
-            <a:r>
-              <a:rPr sz="1450" b="0" i="0">
-                <a:solidFill>
-                  <a:srgbClr val="C9D6C8"/>
-                </a:solidFill>
-                <a:latin typeface="Tahoma"/>
-                <a:cs typeface="Tahoma"/>
-              </a:rPr>
-              <a:t>۲۴ فصل آموزشی  ·  ۱۲ جلسه عملی  ·  آزمون پایان دوره</a:t>
-            </a:r>
-          </a:p>
-        </p:txBody>
-      </p:sp>
-      <p:sp>
-        <p:nvSpPr>
-          <p:cNvPr id="8" name="TextBox 7"/>
+                <a:latin typeface="Vazirmatn"/>
+                <a:cs typeface="Vazirmatn"/>
+              </a:rPr>
+              <a:t>مدرس درجه یک گلف ایران</a:t>
+            </a:r>
+          </a:p>
+        </p:txBody>
+      </p:sp>
+      <p:sp>
+        <p:nvSpPr>
+          <p:cNvPr id="10" name="TextBox 9"/>
           <p:cNvSpPr txBox="1"/>
           <p:nvPr/>
         </p:nvSpPr>
         <p:spPr>
           <a:xfrm>
-            <a:off x="502920" y="6400800"/>
-            <a:ext cx="5486400" cy="320040"/>
+            <a:off x="914400" y="4069080"/>
+            <a:ext cx="10362895" cy="2377440"/>
           </a:xfrm>
           <a:prstGeom prst="rect">
             <a:avLst/>
@@ -3532,7 +3534,7 @@
           </a:bodyPr>
           <a:lstStyle/>
           <a:p>
-            <a:pPr algn="l" rtl="1">
+            <a:pPr algn="r" rtl="1">
               <a:lnSpc>
                 <a:spcPct val="108000"/>
               </a:lnSpc>
@@ -3540,32 +3542,177 @@
                 <a:spcPts val="0"/>
               </a:spcBef>
               <a:spcAft>
-                <a:spcPts val="0"/>
-              </a:spcAft>
-            </a:pPr>
-            <a:r>
-              <a:rPr sz="1000" b="0" i="0">
+                <a:spcPts val="600"/>
+              </a:spcAft>
+            </a:pPr>
+            <a:r>
+              <a:rPr sz="1700" b="1" i="0">
+                <a:solidFill>
+                  <a:srgbClr val="64B5F6"/>
+                </a:solidFill>
+                <a:latin typeface="Vazirmatn"/>
+                <a:cs typeface="Vazirmatn"/>
+              </a:rPr>
+              <a:t>Puttclub  |  آکادمی گلف پات‌کلاب  |  سطح ۲</a:t>
+            </a:r>
+          </a:p>
+          <a:p>
+            <a:pPr algn="r" rtl="1">
+              <a:lnSpc>
+                <a:spcPct val="108000"/>
+              </a:lnSpc>
+              <a:spcBef>
+                <a:spcPts val="0"/>
+              </a:spcBef>
+              <a:spcAft>
+                <a:spcPts val="600"/>
+              </a:spcAft>
+            </a:pPr>
+            <a:r>
+              <a:rPr sz="4600" b="1" i="0">
                 <a:solidFill>
                   <a:srgbClr val="FFFFFF"/>
                 </a:solidFill>
-                <a:latin typeface="Tahoma"/>
-                <a:cs typeface="Tahoma"/>
-              </a:rPr>
-              <a:t>Golf Academy  ·  Intermediate · Level 2</a:t>
-            </a:r>
-          </a:p>
-        </p:txBody>
-      </p:sp>
-      <p:sp>
-        <p:nvSpPr>
-          <p:cNvPr id="9" name="TextBox 8"/>
+                <a:latin typeface="Vazirmatn"/>
+                <a:cs typeface="Vazirmatn"/>
+              </a:rPr>
+              <a:t>دوره دوم آموزش گلف — تکمیلی</a:t>
+            </a:r>
+          </a:p>
+          <a:p>
+            <a:pPr algn="r" rtl="1">
+              <a:lnSpc>
+                <a:spcPct val="108000"/>
+              </a:lnSpc>
+              <a:spcBef>
+                <a:spcPts val="0"/>
+              </a:spcBef>
+              <a:spcAft>
+                <a:spcPts val="1400"/>
+              </a:spcAft>
+            </a:pPr>
+            <a:r>
+              <a:rPr sz="2000" b="0" i="0">
+                <a:solidFill>
+                  <a:srgbClr val="D7E2D6"/>
+                </a:solidFill>
+                <a:latin typeface="Vazirmatn"/>
+                <a:cs typeface="Vazirmatn"/>
+              </a:rPr>
+              <a:t>تثبیت تکنیک، کنترل ضربه و ورود به بازی هدفمند</a:t>
+            </a:r>
+          </a:p>
+          <a:p>
+            <a:pPr algn="r" rtl="1">
+              <a:lnSpc>
+                <a:spcPct val="108000"/>
+              </a:lnSpc>
+              <a:spcBef>
+                <a:spcPts val="0"/>
+              </a:spcBef>
+              <a:spcAft>
+                <a:spcPts val="300"/>
+              </a:spcAft>
+            </a:pPr>
+            <a:r>
+              <a:rPr sz="1100" b="1" i="0">
+                <a:solidFill>
+                  <a:srgbClr val="64B5F6"/>
+                </a:solidFill>
+                <a:latin typeface="Vazirmatn"/>
+                <a:cs typeface="Vazirmatn"/>
+              </a:rPr>
+              <a:t>●  </a:t>
+            </a:r>
+            <a:r>
+              <a:rPr sz="1450" b="0" i="0">
+                <a:solidFill>
+                  <a:srgbClr val="C9D6C8"/>
+                </a:solidFill>
+                <a:latin typeface="Vazirmatn"/>
+                <a:cs typeface="Vazirmatn"/>
+              </a:rPr>
+              <a:t>پیش‌نیاز: گذراندن دوره مقدماتی</a:t>
+            </a:r>
+          </a:p>
+          <a:p>
+            <a:pPr algn="r" rtl="1">
+              <a:lnSpc>
+                <a:spcPct val="108000"/>
+              </a:lnSpc>
+              <a:spcBef>
+                <a:spcPts val="0"/>
+              </a:spcBef>
+              <a:spcAft>
+                <a:spcPts val="300"/>
+              </a:spcAft>
+            </a:pPr>
+            <a:r>
+              <a:rPr sz="1100" b="1" i="0">
+                <a:solidFill>
+                  <a:srgbClr val="64B5F6"/>
+                </a:solidFill>
+                <a:latin typeface="Vazirmatn"/>
+                <a:cs typeface="Vazirmatn"/>
+              </a:rPr>
+              <a:t>●  </a:t>
+            </a:r>
+            <a:r>
+              <a:rPr sz="1450" b="0" i="0">
+                <a:solidFill>
+                  <a:srgbClr val="C9D6C8"/>
+                </a:solidFill>
+                <a:latin typeface="Vazirmatn"/>
+                <a:cs typeface="Vazirmatn"/>
+              </a:rPr>
+              <a:t>هدف: تبدیل تکنیک پایه به مهارت تکرارپذیر</a:t>
+            </a:r>
+          </a:p>
+          <a:p>
+            <a:pPr algn="r" rtl="1">
+              <a:lnSpc>
+                <a:spcPct val="108000"/>
+              </a:lnSpc>
+              <a:spcBef>
+                <a:spcPts val="0"/>
+              </a:spcBef>
+              <a:spcAft>
+                <a:spcPts val="300"/>
+              </a:spcAft>
+            </a:pPr>
+            <a:r>
+              <a:rPr sz="1100" b="1" i="0">
+                <a:solidFill>
+                  <a:srgbClr val="64B5F6"/>
+                </a:solidFill>
+                <a:latin typeface="Vazirmatn"/>
+                <a:cs typeface="Vazirmatn"/>
+              </a:rPr>
+              <a:t>●  </a:t>
+            </a:r>
+            <a:r>
+              <a:rPr sz="1450" b="0" i="0">
+                <a:solidFill>
+                  <a:srgbClr val="C9D6C8"/>
+                </a:solidFill>
+                <a:latin typeface="Vazirmatn"/>
+                <a:cs typeface="Vazirmatn"/>
+              </a:rPr>
+              <a:t>۲۴ فصل آموزشی  ·  ۱۲ جلسه عملی  ·  آزمون پایان دوره</a:t>
+            </a:r>
+          </a:p>
+        </p:txBody>
+      </p:sp>
+      <p:sp>
+        <p:nvSpPr>
+          <p:cNvPr id="11" name="TextBox 10"/>
           <p:cNvSpPr txBox="1"/>
           <p:nvPr/>
         </p:nvSpPr>
         <p:spPr>
           <a:xfrm>
-            <a:off x="10180015" y="6400800"/>
-            <a:ext cx="1463040" cy="320040"/>
+            <a:off x="502920" y="6400800"/>
+            <a:ext cx="6858000" cy="320040"/>
           </a:xfrm>
           <a:prstGeom prst="rect">
             <a:avLst/>
@@ -3594,8 +3741,64 @@
                 <a:solidFill>
                   <a:srgbClr val="64B5F6"/>
                 </a:solidFill>
-                <a:latin typeface="Tahoma"/>
-                <a:cs typeface="Tahoma"/>
+                <a:latin typeface="Vazirmatn"/>
+                <a:cs typeface="Vazirmatn"/>
+              </a:rPr>
+              <a:t>⛳ Puttclub</a:t>
+            </a:r>
+            <a:r>
+              <a:rPr sz="1000" b="0" i="0">
+                <a:solidFill>
+                  <a:srgbClr val="FFFFFF"/>
+                </a:solidFill>
+                <a:latin typeface="Vazirmatn"/>
+                <a:cs typeface="Vazirmatn"/>
+              </a:rPr>
+              <a:t>   ·   Intermediate · Level 2</a:t>
+            </a:r>
+          </a:p>
+        </p:txBody>
+      </p:sp>
+      <p:sp>
+        <p:nvSpPr>
+          <p:cNvPr id="12" name="TextBox 11"/>
+          <p:cNvSpPr txBox="1"/>
+          <p:nvPr/>
+        </p:nvSpPr>
+        <p:spPr>
+          <a:xfrm>
+            <a:off x="10180015" y="6400800"/>
+            <a:ext cx="1463040" cy="320040"/>
+          </a:xfrm>
+          <a:prstGeom prst="rect">
+            <a:avLst/>
+          </a:prstGeom>
+          <a:noFill/>
+        </p:spPr>
+        <p:txBody>
+          <a:bodyPr wrap="square" anchor="ctr" lIns="0" rIns="0" tIns="0" bIns="0">
+            <a:spAutoFit/>
+          </a:bodyPr>
+          <a:lstStyle/>
+          <a:p>
+            <a:pPr algn="l" rtl="1">
+              <a:lnSpc>
+                <a:spcPct val="108000"/>
+              </a:lnSpc>
+              <a:spcBef>
+                <a:spcPts val="0"/>
+              </a:spcBef>
+              <a:spcAft>
+                <a:spcPts val="0"/>
+              </a:spcAft>
+            </a:pPr>
+            <a:r>
+              <a:rPr sz="1100" b="1" i="0">
+                <a:solidFill>
+                  <a:srgbClr val="64B5F6"/>
+                </a:solidFill>
+                <a:latin typeface="Vazirmatn"/>
+                <a:cs typeface="Vazirmatn"/>
               </a:rPr>
               <a:t>1</a:t>
             </a:r>
@@ -3746,8 +3949,8 @@
                 <a:solidFill>
                   <a:srgbClr val="1565C0"/>
                 </a:solidFill>
-                <a:latin typeface="Tahoma"/>
-                <a:cs typeface="Tahoma"/>
+                <a:latin typeface="Vazirmatn"/>
+                <a:cs typeface="Vazirmatn"/>
               </a:rPr>
               <a:t>فصل ۹</a:t>
             </a:r>
@@ -3769,8 +3972,8 @@
                 <a:solidFill>
                   <a:srgbClr val="1F2A24"/>
                 </a:solidFill>
-                <a:latin typeface="Tahoma"/>
-                <a:cs typeface="Tahoma"/>
+                <a:latin typeface="Vazirmatn"/>
+                <a:cs typeface="Vazirmatn"/>
               </a:rPr>
               <a:t>شناخت فاصله و Distance Book</a:t>
             </a:r>
@@ -3859,8 +4062,8 @@
                 <a:solidFill>
                   <a:srgbClr val="1565C0"/>
                 </a:solidFill>
-                <a:latin typeface="Tahoma"/>
-                <a:cs typeface="Tahoma"/>
+                <a:latin typeface="Vazirmatn"/>
+                <a:cs typeface="Vazirmatn"/>
               </a:rPr>
               <a:t>●  </a:t>
             </a:r>
@@ -3869,8 +4072,8 @@
                 <a:solidFill>
                   <a:srgbClr val="1F2A24"/>
                 </a:solidFill>
-                <a:latin typeface="Tahoma"/>
-                <a:cs typeface="Tahoma"/>
+                <a:latin typeface="Vazirmatn"/>
+                <a:cs typeface="Vazirmatn"/>
               </a:rPr>
               <a:t>فاصله هر کلاب فقط یک عدد ثابت نیست (مثلاً PW = ۹۰ متر)</a:t>
             </a:r>
@@ -3892,8 +4095,8 @@
                 <a:solidFill>
                   <a:srgbClr val="1565C0"/>
                 </a:solidFill>
-                <a:latin typeface="Tahoma"/>
-                <a:cs typeface="Tahoma"/>
+                <a:latin typeface="Vazirmatn"/>
+                <a:cs typeface="Vazirmatn"/>
               </a:rPr>
               <a:t>●  </a:t>
             </a:r>
@@ -3902,8 +4105,8 @@
                 <a:solidFill>
                   <a:srgbClr val="1565C0"/>
                 </a:solidFill>
-                <a:latin typeface="Tahoma"/>
-                <a:cs typeface="Tahoma"/>
+                <a:latin typeface="Vazirmatn"/>
+                <a:cs typeface="Vazirmatn"/>
               </a:rPr>
               <a:t>فاکتورهای تأثیرگذار</a:t>
             </a:r>
@@ -3925,8 +4128,8 @@
                 <a:solidFill>
                   <a:srgbClr val="1565C0"/>
                 </a:solidFill>
-                <a:latin typeface="Tahoma"/>
-                <a:cs typeface="Tahoma"/>
+                <a:latin typeface="Vazirmatn"/>
+                <a:cs typeface="Vazirmatn"/>
               </a:rPr>
               <a:t>–  </a:t>
             </a:r>
@@ -3935,8 +4138,8 @@
                 <a:solidFill>
                   <a:srgbClr val="1F2A24"/>
                 </a:solidFill>
-                <a:latin typeface="Tahoma"/>
-                <a:cs typeface="Tahoma"/>
+                <a:latin typeface="Vazirmatn"/>
+                <a:cs typeface="Vazirmatn"/>
               </a:rPr>
               <a:t>باد، دما و ارتفاع از سطح دریا</a:t>
             </a:r>
@@ -3958,8 +4161,8 @@
                 <a:solidFill>
                   <a:srgbClr val="1565C0"/>
                 </a:solidFill>
-                <a:latin typeface="Tahoma"/>
-                <a:cs typeface="Tahoma"/>
+                <a:latin typeface="Vazirmatn"/>
+                <a:cs typeface="Vazirmatn"/>
               </a:rPr>
               <a:t>–  </a:t>
             </a:r>
@@ -3968,8 +4171,8 @@
                 <a:solidFill>
                   <a:srgbClr val="1F2A24"/>
                 </a:solidFill>
-                <a:latin typeface="Tahoma"/>
-                <a:cs typeface="Tahoma"/>
+                <a:latin typeface="Vazirmatn"/>
+                <a:cs typeface="Vazirmatn"/>
               </a:rPr>
               <a:t>Lie (وضعیت توپ) و نوع توپ</a:t>
             </a:r>
@@ -3991,8 +4194,8 @@
                 <a:solidFill>
                   <a:srgbClr val="1565C0"/>
                 </a:solidFill>
-                <a:latin typeface="Tahoma"/>
-                <a:cs typeface="Tahoma"/>
+                <a:latin typeface="Vazirmatn"/>
+                <a:cs typeface="Vazirmatn"/>
               </a:rPr>
               <a:t>–  </a:t>
             </a:r>
@@ -4001,8 +4204,8 @@
                 <a:solidFill>
                   <a:srgbClr val="1F2A24"/>
                 </a:solidFill>
-                <a:latin typeface="Tahoma"/>
-                <a:cs typeface="Tahoma"/>
+                <a:latin typeface="Vazirmatn"/>
+                <a:cs typeface="Vazirmatn"/>
               </a:rPr>
               <a:t>کیفیت Contact و شرایط زمین</a:t>
             </a:r>
@@ -4024,8 +4227,8 @@
                 <a:solidFill>
                   <a:srgbClr val="1565C0"/>
                 </a:solidFill>
-                <a:latin typeface="Tahoma"/>
-                <a:cs typeface="Tahoma"/>
+                <a:latin typeface="Vazirmatn"/>
+                <a:cs typeface="Vazirmatn"/>
               </a:rPr>
               <a:t>●  </a:t>
             </a:r>
@@ -4034,8 +4237,8 @@
                 <a:solidFill>
                   <a:srgbClr val="1565C0"/>
                 </a:solidFill>
-                <a:latin typeface="Tahoma"/>
-                <a:cs typeface="Tahoma"/>
+                <a:latin typeface="Vazirmatn"/>
+                <a:cs typeface="Vazirmatn"/>
               </a:rPr>
               <a:t>راهکار</a:t>
             </a:r>
@@ -4044,8 +4247,8 @@
                 <a:solidFill>
                   <a:srgbClr val="1F2A24"/>
                 </a:solidFill>
-                <a:latin typeface="Tahoma"/>
-                <a:cs typeface="Tahoma"/>
+                <a:latin typeface="Vazirmatn"/>
+                <a:cs typeface="Vazirmatn"/>
               </a:rPr>
               <a:t>  —  یک Yardage / Distance Book شخصی بسازید</a:t>
             </a:r>
@@ -4067,8 +4270,8 @@
                 <a:solidFill>
                   <a:srgbClr val="1565C0"/>
                 </a:solidFill>
-                <a:latin typeface="Tahoma"/>
-                <a:cs typeface="Tahoma"/>
+                <a:latin typeface="Vazirmatn"/>
+                <a:cs typeface="Vazirmatn"/>
               </a:rPr>
               <a:t>●  </a:t>
             </a:r>
@@ -4077,8 +4280,8 @@
                 <a:solidFill>
                   <a:srgbClr val="1F2A24"/>
                 </a:solidFill>
-                <a:latin typeface="Tahoma"/>
-                <a:cs typeface="Tahoma"/>
+                <a:latin typeface="Vazirmatn"/>
+                <a:cs typeface="Vazirmatn"/>
               </a:rPr>
               <a:t>اعداد را بر اساس میانگین ضربات واقعی خود تکمیل کنید</a:t>
             </a:r>
@@ -4213,8 +4416,8 @@
                 <a:solidFill>
                   <a:srgbClr val="1565C0"/>
                 </a:solidFill>
-                <a:latin typeface="Tahoma"/>
-                <a:cs typeface="Tahoma"/>
+                <a:latin typeface="Vazirmatn"/>
+                <a:cs typeface="Vazirmatn"/>
               </a:rPr>
               <a:t>💡 </a:t>
             </a:r>
@@ -4223,8 +4426,8 @@
                 <a:solidFill>
                   <a:srgbClr val="1F2A24"/>
                 </a:solidFill>
-                <a:latin typeface="Tahoma"/>
-                <a:cs typeface="Tahoma"/>
+                <a:latin typeface="Vazirmatn"/>
+                <a:cs typeface="Vazirmatn"/>
               </a:rPr>
               <a:t>بازیکن تکمیلی فاصله هر کلاب را در شرایط مختلف می‌شناسد، نه فقط یک عدد خشک.</a:t>
             </a:r>
@@ -4240,7 +4443,7 @@
         <p:spPr>
           <a:xfrm>
             <a:off x="502920" y="6400800"/>
-            <a:ext cx="5486400" cy="320040"/>
+            <a:ext cx="6858000" cy="320040"/>
           </a:xfrm>
           <a:prstGeom prst="rect">
             <a:avLst/>
@@ -4265,14 +4468,24 @@
               </a:spcAft>
             </a:pPr>
             <a:r>
+              <a:rPr sz="1100" b="1" i="0">
+                <a:solidFill>
+                  <a:srgbClr val="1565C0"/>
+                </a:solidFill>
+                <a:latin typeface="Vazirmatn"/>
+                <a:cs typeface="Vazirmatn"/>
+              </a:rPr>
+              <a:t>⛳ Puttclub</a:t>
+            </a:r>
+            <a:r>
               <a:rPr sz="1000" b="0" i="0">
                 <a:solidFill>
                   <a:srgbClr val="5C6B62"/>
                 </a:solidFill>
-                <a:latin typeface="Tahoma"/>
-                <a:cs typeface="Tahoma"/>
-              </a:rPr>
-              <a:t>Golf Academy  ·  Intermediate · Level 2</a:t>
+                <a:latin typeface="Vazirmatn"/>
+                <a:cs typeface="Vazirmatn"/>
+              </a:rPr>
+              <a:t>   ·   Intermediate · Level 2</a:t>
             </a:r>
           </a:p>
         </p:txBody>
@@ -4315,8 +4528,8 @@
                 <a:solidFill>
                   <a:srgbClr val="1565C0"/>
                 </a:solidFill>
-                <a:latin typeface="Tahoma"/>
-                <a:cs typeface="Tahoma"/>
+                <a:latin typeface="Vazirmatn"/>
+                <a:cs typeface="Vazirmatn"/>
               </a:rPr>
               <a:t>10</a:t>
             </a:r>
@@ -4467,8 +4680,8 @@
                 <a:solidFill>
                   <a:srgbClr val="1565C0"/>
                 </a:solidFill>
-                <a:latin typeface="Tahoma"/>
-                <a:cs typeface="Tahoma"/>
+                <a:latin typeface="Vazirmatn"/>
+                <a:cs typeface="Vazirmatn"/>
               </a:rPr>
               <a:t>فصل ۱۰</a:t>
             </a:r>
@@ -4490,8 +4703,8 @@
                 <a:solidFill>
                   <a:srgbClr val="1F2A24"/>
                 </a:solidFill>
-                <a:latin typeface="Tahoma"/>
-                <a:cs typeface="Tahoma"/>
+                <a:latin typeface="Vazirmatn"/>
+                <a:cs typeface="Vazirmatn"/>
               </a:rPr>
               <a:t>Pitching تکمیلی</a:t>
             </a:r>
@@ -4580,8 +4793,8 @@
                 <a:solidFill>
                   <a:srgbClr val="1565C0"/>
                 </a:solidFill>
-                <a:latin typeface="Tahoma"/>
-                <a:cs typeface="Tahoma"/>
+                <a:latin typeface="Vazirmatn"/>
+                <a:cs typeface="Vazirmatn"/>
               </a:rPr>
               <a:t>●  </a:t>
             </a:r>
@@ -4590,8 +4803,8 @@
                 <a:solidFill>
                   <a:srgbClr val="1565C0"/>
                 </a:solidFill>
-                <a:latin typeface="Tahoma"/>
-                <a:cs typeface="Tahoma"/>
+                <a:latin typeface="Vazirmatn"/>
+                <a:cs typeface="Vazirmatn"/>
               </a:rPr>
               <a:t>سه فاصله تمرینی</a:t>
             </a:r>
@@ -4600,8 +4813,8 @@
                 <a:solidFill>
                   <a:srgbClr val="1F2A24"/>
                 </a:solidFill>
-                <a:latin typeface="Tahoma"/>
-                <a:cs typeface="Tahoma"/>
+                <a:latin typeface="Vazirmatn"/>
+                <a:cs typeface="Vazirmatn"/>
               </a:rPr>
               <a:t>  —  ۲۰، ۴۰ و ۶۰ متر</a:t>
             </a:r>
@@ -4623,8 +4836,8 @@
                 <a:solidFill>
                   <a:srgbClr val="1565C0"/>
                 </a:solidFill>
-                <a:latin typeface="Tahoma"/>
-                <a:cs typeface="Tahoma"/>
+                <a:latin typeface="Vazirmatn"/>
+                <a:cs typeface="Vazirmatn"/>
               </a:rPr>
               <a:t>●  </a:t>
             </a:r>
@@ -4633,8 +4846,8 @@
                 <a:solidFill>
                   <a:srgbClr val="1565C0"/>
                 </a:solidFill>
-                <a:latin typeface="Tahoma"/>
-                <a:cs typeface="Tahoma"/>
+                <a:latin typeface="Vazirmatn"/>
+                <a:cs typeface="Vazirmatn"/>
               </a:rPr>
               <a:t>برای هر فاصله این موارد را کنترل کنید</a:t>
             </a:r>
@@ -4656,8 +4869,8 @@
                 <a:solidFill>
                   <a:srgbClr val="1565C0"/>
                 </a:solidFill>
-                <a:latin typeface="Tahoma"/>
-                <a:cs typeface="Tahoma"/>
+                <a:latin typeface="Vazirmatn"/>
+                <a:cs typeface="Vazirmatn"/>
               </a:rPr>
               <a:t>–  </a:t>
             </a:r>
@@ -4666,8 +4879,8 @@
                 <a:solidFill>
                   <a:srgbClr val="1F2A24"/>
                 </a:solidFill>
-                <a:latin typeface="Tahoma"/>
-                <a:cs typeface="Tahoma"/>
+                <a:latin typeface="Vazirmatn"/>
+                <a:cs typeface="Vazirmatn"/>
               </a:rPr>
               <a:t>Setup، طول Backswing، سرعت و Finish</a:t>
             </a:r>
@@ -4689,8 +4902,8 @@
                 <a:solidFill>
                   <a:srgbClr val="1565C0"/>
                 </a:solidFill>
-                <a:latin typeface="Tahoma"/>
-                <a:cs typeface="Tahoma"/>
+                <a:latin typeface="Vazirmatn"/>
+                <a:cs typeface="Vazirmatn"/>
               </a:rPr>
               <a:t>●  </a:t>
             </a:r>
@@ -4699,8 +4912,8 @@
                 <a:solidFill>
                   <a:srgbClr val="1565C0"/>
                 </a:solidFill>
-                <a:latin typeface="Tahoma"/>
-                <a:cs typeface="Tahoma"/>
+                <a:latin typeface="Vazirmatn"/>
+                <a:cs typeface="Vazirmatn"/>
               </a:rPr>
               <a:t>اصل مهم</a:t>
             </a:r>
@@ -4709,8 +4922,8 @@
                 <a:solidFill>
                   <a:srgbClr val="1F2A24"/>
                 </a:solidFill>
-                <a:latin typeface="Tahoma"/>
-                <a:cs typeface="Tahoma"/>
+                <a:latin typeface="Vazirmatn"/>
+                <a:cs typeface="Vazirmatn"/>
               </a:rPr>
               <a:t>  —  فاصله را فقط با زور بیشتر کنترل نکنید</a:t>
             </a:r>
@@ -4732,8 +4945,8 @@
                 <a:solidFill>
                   <a:srgbClr val="1565C0"/>
                 </a:solidFill>
-                <a:latin typeface="Tahoma"/>
-                <a:cs typeface="Tahoma"/>
+                <a:latin typeface="Vazirmatn"/>
+                <a:cs typeface="Vazirmatn"/>
               </a:rPr>
               <a:t>●  </a:t>
             </a:r>
@@ -4742,8 +4955,8 @@
                 <a:solidFill>
                   <a:srgbClr val="1565C0"/>
                 </a:solidFill>
-                <a:latin typeface="Tahoma"/>
-                <a:cs typeface="Tahoma"/>
+                <a:latin typeface="Vazirmatn"/>
+                <a:cs typeface="Vazirmatn"/>
               </a:rPr>
               <a:t>به‌جای آن سه عامل را مدیریت کنید</a:t>
             </a:r>
@@ -4765,8 +4978,8 @@
                 <a:solidFill>
                   <a:srgbClr val="1565C0"/>
                 </a:solidFill>
-                <a:latin typeface="Tahoma"/>
-                <a:cs typeface="Tahoma"/>
+                <a:latin typeface="Vazirmatn"/>
+                <a:cs typeface="Vazirmatn"/>
               </a:rPr>
               <a:t>–  </a:t>
             </a:r>
@@ -4775,8 +4988,8 @@
                 <a:solidFill>
                   <a:srgbClr val="1F2A24"/>
                 </a:solidFill>
-                <a:latin typeface="Tahoma"/>
-                <a:cs typeface="Tahoma"/>
+                <a:latin typeface="Vazirmatn"/>
+                <a:cs typeface="Vazirmatn"/>
               </a:rPr>
               <a:t>Length (طول Swing) + Speed (سرعت) + Loft</a:t>
             </a:r>
@@ -4911,8 +5124,8 @@
                 <a:solidFill>
                   <a:srgbClr val="1565C0"/>
                 </a:solidFill>
-                <a:latin typeface="Tahoma"/>
-                <a:cs typeface="Tahoma"/>
+                <a:latin typeface="Vazirmatn"/>
+                <a:cs typeface="Vazirmatn"/>
               </a:rPr>
               <a:t>💡 </a:t>
             </a:r>
@@ -4921,8 +5134,8 @@
                 <a:solidFill>
                   <a:srgbClr val="1F2A24"/>
                 </a:solidFill>
-                <a:latin typeface="Tahoma"/>
-                <a:cs typeface="Tahoma"/>
+                <a:latin typeface="Vazirmatn"/>
+                <a:cs typeface="Vazirmatn"/>
               </a:rPr>
               <a:t>Pitch کنترل‌شده یعنی ترکیب درست طول نوسان و سرعت، نه نیروی دست.</a:t>
             </a:r>
@@ -4938,7 +5151,7 @@
         <p:spPr>
           <a:xfrm>
             <a:off x="502920" y="6400800"/>
-            <a:ext cx="5486400" cy="320040"/>
+            <a:ext cx="6858000" cy="320040"/>
           </a:xfrm>
           <a:prstGeom prst="rect">
             <a:avLst/>
@@ -4963,14 +5176,24 @@
               </a:spcAft>
             </a:pPr>
             <a:r>
+              <a:rPr sz="1100" b="1" i="0">
+                <a:solidFill>
+                  <a:srgbClr val="1565C0"/>
+                </a:solidFill>
+                <a:latin typeface="Vazirmatn"/>
+                <a:cs typeface="Vazirmatn"/>
+              </a:rPr>
+              <a:t>⛳ Puttclub</a:t>
+            </a:r>
+            <a:r>
               <a:rPr sz="1000" b="0" i="0">
                 <a:solidFill>
                   <a:srgbClr val="5C6B62"/>
                 </a:solidFill>
-                <a:latin typeface="Tahoma"/>
-                <a:cs typeface="Tahoma"/>
-              </a:rPr>
-              <a:t>Golf Academy  ·  Intermediate · Level 2</a:t>
+                <a:latin typeface="Vazirmatn"/>
+                <a:cs typeface="Vazirmatn"/>
+              </a:rPr>
+              <a:t>   ·   Intermediate · Level 2</a:t>
             </a:r>
           </a:p>
         </p:txBody>
@@ -5013,8 +5236,8 @@
                 <a:solidFill>
                   <a:srgbClr val="1565C0"/>
                 </a:solidFill>
-                <a:latin typeface="Tahoma"/>
-                <a:cs typeface="Tahoma"/>
+                <a:latin typeface="Vazirmatn"/>
+                <a:cs typeface="Vazirmatn"/>
               </a:rPr>
               <a:t>11</a:t>
             </a:r>
@@ -5165,8 +5388,8 @@
                 <a:solidFill>
                   <a:srgbClr val="1565C0"/>
                 </a:solidFill>
-                <a:latin typeface="Tahoma"/>
-                <a:cs typeface="Tahoma"/>
+                <a:latin typeface="Vazirmatn"/>
+                <a:cs typeface="Vazirmatn"/>
               </a:rPr>
               <a:t>فصل ۱۱</a:t>
             </a:r>
@@ -5188,8 +5411,8 @@
                 <a:solidFill>
                   <a:srgbClr val="1F2A24"/>
                 </a:solidFill>
-                <a:latin typeface="Tahoma"/>
-                <a:cs typeface="Tahoma"/>
+                <a:latin typeface="Vazirmatn"/>
+                <a:cs typeface="Vazirmatn"/>
               </a:rPr>
               <a:t>Landing Zone در Pitch</a:t>
             </a:r>
@@ -5278,8 +5501,8 @@
                 <a:solidFill>
                   <a:srgbClr val="1565C0"/>
                 </a:solidFill>
-                <a:latin typeface="Tahoma"/>
-                <a:cs typeface="Tahoma"/>
+                <a:latin typeface="Vazirmatn"/>
+                <a:cs typeface="Vazirmatn"/>
               </a:rPr>
               <a:t>●  </a:t>
             </a:r>
@@ -5288,8 +5511,8 @@
                 <a:solidFill>
                   <a:srgbClr val="1F2A24"/>
                 </a:solidFill>
-                <a:latin typeface="Tahoma"/>
-                <a:cs typeface="Tahoma"/>
+                <a:latin typeface="Vazirmatn"/>
+                <a:cs typeface="Vazirmatn"/>
               </a:rPr>
               <a:t>یکی از مهم‌ترین مهارت‌های Short Game: محل فرود توپ</a:t>
             </a:r>
@@ -5311,8 +5534,8 @@
                 <a:solidFill>
                   <a:srgbClr val="1565C0"/>
                 </a:solidFill>
-                <a:latin typeface="Tahoma"/>
-                <a:cs typeface="Tahoma"/>
+                <a:latin typeface="Vazirmatn"/>
+                <a:cs typeface="Vazirmatn"/>
               </a:rPr>
               <a:t>●  </a:t>
             </a:r>
@@ -5321,8 +5544,8 @@
                 <a:solidFill>
                   <a:srgbClr val="1F2A24"/>
                 </a:solidFill>
-                <a:latin typeface="Tahoma"/>
-                <a:cs typeface="Tahoma"/>
+                <a:latin typeface="Vazirmatn"/>
+                <a:cs typeface="Vazirmatn"/>
               </a:rPr>
               <a:t>قبل از ضربه بدانید توپ کجا فرود می‌آید</a:t>
             </a:r>
@@ -5344,8 +5567,8 @@
                 <a:solidFill>
                   <a:srgbClr val="1565C0"/>
                 </a:solidFill>
-                <a:latin typeface="Tahoma"/>
-                <a:cs typeface="Tahoma"/>
+                <a:latin typeface="Vazirmatn"/>
+                <a:cs typeface="Vazirmatn"/>
               </a:rPr>
               <a:t>●  </a:t>
             </a:r>
@@ -5354,8 +5577,8 @@
                 <a:solidFill>
                   <a:srgbClr val="1565C0"/>
                 </a:solidFill>
-                <a:latin typeface="Tahoma"/>
-                <a:cs typeface="Tahoma"/>
+                <a:latin typeface="Vazirmatn"/>
+                <a:cs typeface="Vazirmatn"/>
               </a:rPr>
               <a:t>معادله پایه</a:t>
             </a:r>
@@ -5364,8 +5587,8 @@
                 <a:solidFill>
                   <a:srgbClr val="1F2A24"/>
                 </a:solidFill>
-                <a:latin typeface="Tahoma"/>
-                <a:cs typeface="Tahoma"/>
+                <a:latin typeface="Vazirmatn"/>
+                <a:cs typeface="Vazirmatn"/>
               </a:rPr>
               <a:t>  —  Carry + Roll = Total Distance</a:t>
             </a:r>
@@ -5387,8 +5610,8 @@
                 <a:solidFill>
                   <a:srgbClr val="1565C0"/>
                 </a:solidFill>
-                <a:latin typeface="Tahoma"/>
-                <a:cs typeface="Tahoma"/>
+                <a:latin typeface="Vazirmatn"/>
+                <a:cs typeface="Vazirmatn"/>
               </a:rPr>
               <a:t>●  </a:t>
             </a:r>
@@ -5397,8 +5620,8 @@
                 <a:solidFill>
                   <a:srgbClr val="1565C0"/>
                 </a:solidFill>
-                <a:latin typeface="Tahoma"/>
-                <a:cs typeface="Tahoma"/>
+                <a:latin typeface="Vazirmatn"/>
+                <a:cs typeface="Vazirmatn"/>
               </a:rPr>
               <a:t>Carry</a:t>
             </a:r>
@@ -5407,8 +5630,8 @@
                 <a:solidFill>
                   <a:srgbClr val="1F2A24"/>
                 </a:solidFill>
-                <a:latin typeface="Tahoma"/>
-                <a:cs typeface="Tahoma"/>
+                <a:latin typeface="Vazirmatn"/>
+                <a:cs typeface="Vazirmatn"/>
               </a:rPr>
               <a:t>  —  مسیر هوایی تا اولین برخورد با زمین</a:t>
             </a:r>
@@ -5430,8 +5653,8 @@
                 <a:solidFill>
                   <a:srgbClr val="1565C0"/>
                 </a:solidFill>
-                <a:latin typeface="Tahoma"/>
-                <a:cs typeface="Tahoma"/>
+                <a:latin typeface="Vazirmatn"/>
+                <a:cs typeface="Vazirmatn"/>
               </a:rPr>
               <a:t>●  </a:t>
             </a:r>
@@ -5440,8 +5663,8 @@
                 <a:solidFill>
                   <a:srgbClr val="1565C0"/>
                 </a:solidFill>
-                <a:latin typeface="Tahoma"/>
-                <a:cs typeface="Tahoma"/>
+                <a:latin typeface="Vazirmatn"/>
+                <a:cs typeface="Vazirmatn"/>
               </a:rPr>
               <a:t>Roll</a:t>
             </a:r>
@@ -5450,8 +5673,8 @@
                 <a:solidFill>
                   <a:srgbClr val="1F2A24"/>
                 </a:solidFill>
-                <a:latin typeface="Tahoma"/>
-                <a:cs typeface="Tahoma"/>
+                <a:latin typeface="Vazirmatn"/>
+                <a:cs typeface="Vazirmatn"/>
               </a:rPr>
               <a:t>  —  مسافت غلتش بعد از برخورد</a:t>
             </a:r>
@@ -5473,8 +5696,8 @@
                 <a:solidFill>
                   <a:srgbClr val="1565C0"/>
                 </a:solidFill>
-                <a:latin typeface="Tahoma"/>
-                <a:cs typeface="Tahoma"/>
+                <a:latin typeface="Vazirmatn"/>
+                <a:cs typeface="Vazirmatn"/>
               </a:rPr>
               <a:t>●  </a:t>
             </a:r>
@@ -5483,8 +5706,8 @@
                 <a:solidFill>
                   <a:srgbClr val="1F2A24"/>
                 </a:solidFill>
-                <a:latin typeface="Tahoma"/>
-                <a:cs typeface="Tahoma"/>
+                <a:latin typeface="Vazirmatn"/>
+                <a:cs typeface="Vazirmatn"/>
               </a:rPr>
               <a:t>اگر Green سریع باشد Roll بیشتر است؛ پس Landing Point تغییر می‌کند</a:t>
             </a:r>
@@ -5619,8 +5842,8 @@
                 <a:solidFill>
                   <a:srgbClr val="1565C0"/>
                 </a:solidFill>
-                <a:latin typeface="Tahoma"/>
-                <a:cs typeface="Tahoma"/>
+                <a:latin typeface="Vazirmatn"/>
+                <a:cs typeface="Vazirmatn"/>
               </a:rPr>
               <a:t>💡 </a:t>
             </a:r>
@@ -5629,8 +5852,8 @@
                 <a:solidFill>
                   <a:srgbClr val="1F2A24"/>
                 </a:solidFill>
-                <a:latin typeface="Tahoma"/>
-                <a:cs typeface="Tahoma"/>
+                <a:latin typeface="Vazirmatn"/>
+                <a:cs typeface="Vazirmatn"/>
               </a:rPr>
               <a:t>اول نقطه فرود را مشخص کنید، سپس کلاب و طول Swing را انتخاب کنید.</a:t>
             </a:r>
@@ -5646,7 +5869,7 @@
         <p:spPr>
           <a:xfrm>
             <a:off x="502920" y="6400800"/>
-            <a:ext cx="5486400" cy="320040"/>
+            <a:ext cx="6858000" cy="320040"/>
           </a:xfrm>
           <a:prstGeom prst="rect">
             <a:avLst/>
@@ -5671,14 +5894,24 @@
               </a:spcAft>
             </a:pPr>
             <a:r>
+              <a:rPr sz="1100" b="1" i="0">
+                <a:solidFill>
+                  <a:srgbClr val="1565C0"/>
+                </a:solidFill>
+                <a:latin typeface="Vazirmatn"/>
+                <a:cs typeface="Vazirmatn"/>
+              </a:rPr>
+              <a:t>⛳ Puttclub</a:t>
+            </a:r>
+            <a:r>
               <a:rPr sz="1000" b="0" i="0">
                 <a:solidFill>
                   <a:srgbClr val="5C6B62"/>
                 </a:solidFill>
-                <a:latin typeface="Tahoma"/>
-                <a:cs typeface="Tahoma"/>
-              </a:rPr>
-              <a:t>Golf Academy  ·  Intermediate · Level 2</a:t>
+                <a:latin typeface="Vazirmatn"/>
+                <a:cs typeface="Vazirmatn"/>
+              </a:rPr>
+              <a:t>   ·   Intermediate · Level 2</a:t>
             </a:r>
           </a:p>
         </p:txBody>
@@ -5721,8 +5954,8 @@
                 <a:solidFill>
                   <a:srgbClr val="1565C0"/>
                 </a:solidFill>
-                <a:latin typeface="Tahoma"/>
-                <a:cs typeface="Tahoma"/>
+                <a:latin typeface="Vazirmatn"/>
+                <a:cs typeface="Vazirmatn"/>
               </a:rPr>
               <a:t>12</a:t>
             </a:r>
@@ -5873,8 +6106,8 @@
                 <a:solidFill>
                   <a:srgbClr val="1565C0"/>
                 </a:solidFill>
-                <a:latin typeface="Tahoma"/>
-                <a:cs typeface="Tahoma"/>
+                <a:latin typeface="Vazirmatn"/>
+                <a:cs typeface="Vazirmatn"/>
               </a:rPr>
               <a:t>فصل ۱۲</a:t>
             </a:r>
@@ -5896,8 +6129,8 @@
                 <a:solidFill>
                   <a:srgbClr val="1F2A24"/>
                 </a:solidFill>
-                <a:latin typeface="Tahoma"/>
-                <a:cs typeface="Tahoma"/>
+                <a:latin typeface="Vazirmatn"/>
+                <a:cs typeface="Vazirmatn"/>
               </a:rPr>
               <a:t>سه نوع Chip</a:t>
             </a:r>
@@ -6076,8 +6309,8 @@
                 <a:solidFill>
                   <a:srgbClr val="1565C0"/>
                 </a:solidFill>
-                <a:latin typeface="Tahoma"/>
-                <a:cs typeface="Tahoma"/>
+                <a:latin typeface="Vazirmatn"/>
+                <a:cs typeface="Vazirmatn"/>
               </a:rPr>
               <a:t>Chip کوتاه</a:t>
             </a:r>
@@ -6099,8 +6332,8 @@
                 <a:solidFill>
                   <a:srgbClr val="5C6B62"/>
                 </a:solidFill>
-                <a:latin typeface="Tahoma"/>
-                <a:cs typeface="Tahoma"/>
+                <a:latin typeface="Vazirmatn"/>
+                <a:cs typeface="Vazirmatn"/>
               </a:rPr>
               <a:t>ارتفاع کم و Roll بیشتر</a:t>
             </a:r>
@@ -6235,8 +6468,8 @@
                 <a:solidFill>
                   <a:srgbClr val="1565C0"/>
                 </a:solidFill>
-                <a:latin typeface="Tahoma"/>
-                <a:cs typeface="Tahoma"/>
+                <a:latin typeface="Vazirmatn"/>
+                <a:cs typeface="Vazirmatn"/>
               </a:rPr>
               <a:t>Chip متوسط</a:t>
             </a:r>
@@ -6258,8 +6491,8 @@
                 <a:solidFill>
                   <a:srgbClr val="5C6B62"/>
                 </a:solidFill>
-                <a:latin typeface="Tahoma"/>
-                <a:cs typeface="Tahoma"/>
+                <a:latin typeface="Vazirmatn"/>
+                <a:cs typeface="Vazirmatn"/>
               </a:rPr>
               <a:t>ارتفاع و Roll متعادل</a:t>
             </a:r>
@@ -6394,8 +6627,8 @@
                 <a:solidFill>
                   <a:srgbClr val="1565C0"/>
                 </a:solidFill>
-                <a:latin typeface="Tahoma"/>
-                <a:cs typeface="Tahoma"/>
+                <a:latin typeface="Vazirmatn"/>
+                <a:cs typeface="Vazirmatn"/>
               </a:rPr>
               <a:t>Chip بلند</a:t>
             </a:r>
@@ -6417,8 +6650,8 @@
                 <a:solidFill>
                   <a:srgbClr val="5C6B62"/>
                 </a:solidFill>
-                <a:latin typeface="Tahoma"/>
-                <a:cs typeface="Tahoma"/>
+                <a:latin typeface="Vazirmatn"/>
+                <a:cs typeface="Vazirmatn"/>
               </a:rPr>
               <a:t>ارتفاع بیشتر و Roll کمتر</a:t>
             </a:r>
@@ -6509,8 +6742,8 @@
                 <a:solidFill>
                   <a:srgbClr val="FFFFFF"/>
                 </a:solidFill>
-                <a:latin typeface="Tahoma"/>
-                <a:cs typeface="Tahoma"/>
+                <a:latin typeface="Vazirmatn"/>
+                <a:cs typeface="Vazirmatn"/>
               </a:rPr>
               <a:t>تمرین سه کلاب: از یک نقطه ثابت با سه کلاب مختلف Chip بزنید تا اثر Loft بر پرواز و Roll را ببینید.</a:t>
             </a:r>
@@ -6526,7 +6759,7 @@
         <p:spPr>
           <a:xfrm>
             <a:off x="502920" y="6400800"/>
-            <a:ext cx="5486400" cy="320040"/>
+            <a:ext cx="6858000" cy="320040"/>
           </a:xfrm>
           <a:prstGeom prst="rect">
             <a:avLst/>
@@ -6551,14 +6784,24 @@
               </a:spcAft>
             </a:pPr>
             <a:r>
+              <a:rPr sz="1100" b="1" i="0">
+                <a:solidFill>
+                  <a:srgbClr val="1565C0"/>
+                </a:solidFill>
+                <a:latin typeface="Vazirmatn"/>
+                <a:cs typeface="Vazirmatn"/>
+              </a:rPr>
+              <a:t>⛳ Puttclub</a:t>
+            </a:r>
+            <a:r>
               <a:rPr sz="1000" b="0" i="0">
                 <a:solidFill>
                   <a:srgbClr val="5C6B62"/>
                 </a:solidFill>
-                <a:latin typeface="Tahoma"/>
-                <a:cs typeface="Tahoma"/>
-              </a:rPr>
-              <a:t>Golf Academy  ·  Intermediate · Level 2</a:t>
+                <a:latin typeface="Vazirmatn"/>
+                <a:cs typeface="Vazirmatn"/>
+              </a:rPr>
+              <a:t>   ·   Intermediate · Level 2</a:t>
             </a:r>
           </a:p>
         </p:txBody>
@@ -6601,8 +6844,8 @@
                 <a:solidFill>
                   <a:srgbClr val="1565C0"/>
                 </a:solidFill>
-                <a:latin typeface="Tahoma"/>
-                <a:cs typeface="Tahoma"/>
+                <a:latin typeface="Vazirmatn"/>
+                <a:cs typeface="Vazirmatn"/>
               </a:rPr>
               <a:t>13</a:t>
             </a:r>
@@ -6779,8 +7022,8 @@
                 <a:solidFill>
                   <a:srgbClr val="FFFFFF"/>
                 </a:solidFill>
-                <a:latin typeface="Tahoma"/>
-                <a:cs typeface="Tahoma"/>
+                <a:latin typeface="Vazirmatn"/>
+                <a:cs typeface="Vazirmatn"/>
               </a:rPr>
               <a:t>کنترل نقطه فرود در ضربه Chip</a:t>
             </a:r>
@@ -6869,8 +7112,8 @@
                 <a:solidFill>
                   <a:srgbClr val="1565C0"/>
                 </a:solidFill>
-                <a:latin typeface="Tahoma"/>
-                <a:cs typeface="Tahoma"/>
+                <a:latin typeface="Vazirmatn"/>
+                <a:cs typeface="Vazirmatn"/>
               </a:rPr>
               <a:t>فصل ۱۳</a:t>
             </a:r>
@@ -6892,8 +7135,8 @@
                 <a:solidFill>
                   <a:srgbClr val="1F2A24"/>
                 </a:solidFill>
-                <a:latin typeface="Tahoma"/>
-                <a:cs typeface="Tahoma"/>
+                <a:latin typeface="Vazirmatn"/>
+                <a:cs typeface="Vazirmatn"/>
               </a:rPr>
               <a:t>انتخاب Landing Point در Chip</a:t>
             </a:r>
@@ -6982,8 +7225,8 @@
                 <a:solidFill>
                   <a:srgbClr val="1565C0"/>
                 </a:solidFill>
-                <a:latin typeface="Tahoma"/>
-                <a:cs typeface="Tahoma"/>
+                <a:latin typeface="Vazirmatn"/>
+                <a:cs typeface="Vazirmatn"/>
               </a:rPr>
               <a:t>●  </a:t>
             </a:r>
@@ -6992,8 +7235,8 @@
                 <a:solidFill>
                   <a:srgbClr val="1F2A24"/>
                 </a:solidFill>
-                <a:latin typeface="Tahoma"/>
-                <a:cs typeface="Tahoma"/>
+                <a:latin typeface="Vazirmatn"/>
+                <a:cs typeface="Vazirmatn"/>
               </a:rPr>
               <a:t>به‌جای تمرکز دائمی روی Hole، Landing Point را مشخص کنید</a:t>
             </a:r>
@@ -7015,8 +7258,8 @@
                 <a:solidFill>
                   <a:srgbClr val="1565C0"/>
                 </a:solidFill>
-                <a:latin typeface="Tahoma"/>
-                <a:cs typeface="Tahoma"/>
+                <a:latin typeface="Vazirmatn"/>
+                <a:cs typeface="Vazirmatn"/>
               </a:rPr>
               <a:t>●  </a:t>
             </a:r>
@@ -7025,8 +7268,8 @@
                 <a:solidFill>
                   <a:srgbClr val="1565C0"/>
                 </a:solidFill>
-                <a:latin typeface="Tahoma"/>
-                <a:cs typeface="Tahoma"/>
+                <a:latin typeface="Vazirmatn"/>
+                <a:cs typeface="Vazirmatn"/>
               </a:rPr>
               <a:t>مسیر ذهنی</a:t>
             </a:r>
@@ -7035,8 +7278,8 @@
                 <a:solidFill>
                   <a:srgbClr val="1F2A24"/>
                 </a:solidFill>
-                <a:latin typeface="Tahoma"/>
-                <a:cs typeface="Tahoma"/>
+                <a:latin typeface="Vazirmatn"/>
+                <a:cs typeface="Vazirmatn"/>
               </a:rPr>
               <a:t>  —  توپ ← Landing Point ← Roll ← Hole</a:t>
             </a:r>
@@ -7058,8 +7301,8 @@
                 <a:solidFill>
                   <a:srgbClr val="1565C0"/>
                 </a:solidFill>
-                <a:latin typeface="Tahoma"/>
-                <a:cs typeface="Tahoma"/>
+                <a:latin typeface="Vazirmatn"/>
+                <a:cs typeface="Vazirmatn"/>
               </a:rPr>
               <a:t>●  </a:t>
             </a:r>
@@ -7068,8 +7311,8 @@
                 <a:solidFill>
                   <a:srgbClr val="1565C0"/>
                 </a:solidFill>
-                <a:latin typeface="Tahoma"/>
-                <a:cs typeface="Tahoma"/>
+                <a:latin typeface="Vazirmatn"/>
+                <a:cs typeface="Vazirmatn"/>
               </a:rPr>
               <a:t>تمرین</a:t>
             </a:r>
@@ -7078,8 +7321,8 @@
                 <a:solidFill>
                   <a:srgbClr val="1F2A24"/>
                 </a:solidFill>
-                <a:latin typeface="Tahoma"/>
-                <a:cs typeface="Tahoma"/>
+                <a:latin typeface="Vazirmatn"/>
+                <a:cs typeface="Vazirmatn"/>
               </a:rPr>
               <a:t>  —  یک محدوده مشخص روی Green را به‌عنوان Landing Zone تعیین کنید</a:t>
             </a:r>
@@ -7101,8 +7344,8 @@
                 <a:solidFill>
                   <a:srgbClr val="1565C0"/>
                 </a:solidFill>
-                <a:latin typeface="Tahoma"/>
-                <a:cs typeface="Tahoma"/>
+                <a:latin typeface="Vazirmatn"/>
+                <a:cs typeface="Vazirmatn"/>
               </a:rPr>
               <a:t>●  </a:t>
             </a:r>
@@ -7111,8 +7354,8 @@
                 <a:solidFill>
                   <a:srgbClr val="1F2A24"/>
                 </a:solidFill>
-                <a:latin typeface="Tahoma"/>
-                <a:cs typeface="Tahoma"/>
+                <a:latin typeface="Vazirmatn"/>
+                <a:cs typeface="Vazirmatn"/>
               </a:rPr>
               <a:t>بازیکن تلاش کند توپ را در همان منطقه فرود بیاورد</a:t>
             </a:r>
@@ -7134,8 +7377,8 @@
                 <a:solidFill>
                   <a:srgbClr val="1565C0"/>
                 </a:solidFill>
-                <a:latin typeface="Tahoma"/>
-                <a:cs typeface="Tahoma"/>
+                <a:latin typeface="Vazirmatn"/>
+                <a:cs typeface="Vazirmatn"/>
               </a:rPr>
               <a:t>●  </a:t>
             </a:r>
@@ -7144,8 +7387,8 @@
                 <a:solidFill>
                   <a:srgbClr val="1F2A24"/>
                 </a:solidFill>
-                <a:latin typeface="Tahoma"/>
-                <a:cs typeface="Tahoma"/>
+                <a:latin typeface="Vazirmatn"/>
+                <a:cs typeface="Vazirmatn"/>
               </a:rPr>
               <a:t>با تکرار، کنترل نقطه فرود تبدیل به عادت می‌شود</a:t>
             </a:r>
@@ -7280,8 +7523,8 @@
                 <a:solidFill>
                   <a:srgbClr val="1565C0"/>
                 </a:solidFill>
-                <a:latin typeface="Tahoma"/>
-                <a:cs typeface="Tahoma"/>
+                <a:latin typeface="Vazirmatn"/>
+                <a:cs typeface="Vazirmatn"/>
               </a:rPr>
               <a:t>نکته مربی:  </a:t>
             </a:r>
@@ -7290,8 +7533,8 @@
                 <a:solidFill>
                   <a:srgbClr val="1F2A24"/>
                 </a:solidFill>
-                <a:latin typeface="Tahoma"/>
-                <a:cs typeface="Tahoma"/>
+                <a:latin typeface="Vazirmatn"/>
+                <a:cs typeface="Vazirmatn"/>
               </a:rPr>
               <a:t>اگر نقطه فرود درست باشد، Roll خودبه‌خود توپ را به هدف نزدیک می‌کند.</a:t>
             </a:r>
@@ -7307,7 +7550,7 @@
         <p:spPr>
           <a:xfrm>
             <a:off x="502920" y="6400800"/>
-            <a:ext cx="5486400" cy="320040"/>
+            <a:ext cx="6858000" cy="320040"/>
           </a:xfrm>
           <a:prstGeom prst="rect">
             <a:avLst/>
@@ -7332,14 +7575,24 @@
               </a:spcAft>
             </a:pPr>
             <a:r>
+              <a:rPr sz="1100" b="1" i="0">
+                <a:solidFill>
+                  <a:srgbClr val="1565C0"/>
+                </a:solidFill>
+                <a:latin typeface="Vazirmatn"/>
+                <a:cs typeface="Vazirmatn"/>
+              </a:rPr>
+              <a:t>⛳ Puttclub</a:t>
+            </a:r>
+            <a:r>
               <a:rPr sz="1000" b="0" i="0">
                 <a:solidFill>
                   <a:srgbClr val="5C6B62"/>
                 </a:solidFill>
-                <a:latin typeface="Tahoma"/>
-                <a:cs typeface="Tahoma"/>
-              </a:rPr>
-              <a:t>Golf Academy  ·  Intermediate · Level 2</a:t>
+                <a:latin typeface="Vazirmatn"/>
+                <a:cs typeface="Vazirmatn"/>
+              </a:rPr>
+              <a:t>   ·   Intermediate · Level 2</a:t>
             </a:r>
           </a:p>
         </p:txBody>
@@ -7382,8 +7635,8 @@
                 <a:solidFill>
                   <a:srgbClr val="1565C0"/>
                 </a:solidFill>
-                <a:latin typeface="Tahoma"/>
-                <a:cs typeface="Tahoma"/>
+                <a:latin typeface="Vazirmatn"/>
+                <a:cs typeface="Vazirmatn"/>
               </a:rPr>
               <a:t>14</a:t>
             </a:r>
@@ -7534,8 +7787,8 @@
                 <a:solidFill>
                   <a:srgbClr val="1565C0"/>
                 </a:solidFill>
-                <a:latin typeface="Tahoma"/>
-                <a:cs typeface="Tahoma"/>
+                <a:latin typeface="Vazirmatn"/>
+                <a:cs typeface="Vazirmatn"/>
               </a:rPr>
               <a:t>فصل ۱۴</a:t>
             </a:r>
@@ -7557,8 +7810,8 @@
                 <a:solidFill>
                   <a:srgbClr val="1F2A24"/>
                 </a:solidFill>
-                <a:latin typeface="Tahoma"/>
-                <a:cs typeface="Tahoma"/>
+                <a:latin typeface="Vazirmatn"/>
+                <a:cs typeface="Vazirmatn"/>
               </a:rPr>
               <a:t>سه مهارت اصلی Putting</a:t>
             </a:r>
@@ -7737,8 +7990,8 @@
                 <a:solidFill>
                   <a:srgbClr val="1565C0"/>
                 </a:solidFill>
-                <a:latin typeface="Tahoma"/>
-                <a:cs typeface="Tahoma"/>
+                <a:latin typeface="Vazirmatn"/>
+                <a:cs typeface="Vazirmatn"/>
               </a:rPr>
               <a:t>Alignment</a:t>
             </a:r>
@@ -7760,8 +8013,8 @@
                 <a:solidFill>
                   <a:srgbClr val="5C6B62"/>
                 </a:solidFill>
-                <a:latin typeface="Tahoma"/>
-                <a:cs typeface="Tahoma"/>
+                <a:latin typeface="Vazirmatn"/>
+                <a:cs typeface="Vazirmatn"/>
               </a:rPr>
               <a:t>خط شروع درست توپ</a:t>
             </a:r>
@@ -7896,8 +8149,8 @@
                 <a:solidFill>
                   <a:srgbClr val="1565C0"/>
                 </a:solidFill>
-                <a:latin typeface="Tahoma"/>
-                <a:cs typeface="Tahoma"/>
+                <a:latin typeface="Vazirmatn"/>
+                <a:cs typeface="Vazirmatn"/>
               </a:rPr>
               <a:t>Speed</a:t>
             </a:r>
@@ -7919,8 +8172,8 @@
                 <a:solidFill>
                   <a:srgbClr val="5C6B62"/>
                 </a:solidFill>
-                <a:latin typeface="Tahoma"/>
-                <a:cs typeface="Tahoma"/>
+                <a:latin typeface="Vazirmatn"/>
+                <a:cs typeface="Vazirmatn"/>
               </a:rPr>
               <a:t>کنترل سرعت</a:t>
             </a:r>
@@ -8055,8 +8308,8 @@
                 <a:solidFill>
                   <a:srgbClr val="1565C0"/>
                 </a:solidFill>
-                <a:latin typeface="Tahoma"/>
-                <a:cs typeface="Tahoma"/>
+                <a:latin typeface="Vazirmatn"/>
+                <a:cs typeface="Vazirmatn"/>
               </a:rPr>
               <a:t>Green Reading</a:t>
             </a:r>
@@ -8078,8 +8331,8 @@
                 <a:solidFill>
                   <a:srgbClr val="5C6B62"/>
                 </a:solidFill>
-                <a:latin typeface="Tahoma"/>
-                <a:cs typeface="Tahoma"/>
+                <a:latin typeface="Vazirmatn"/>
+                <a:cs typeface="Vazirmatn"/>
               </a:rPr>
               <a:t>خواندن شیب و Break</a:t>
             </a:r>
@@ -8095,7 +8348,7 @@
         <p:spPr>
           <a:xfrm>
             <a:off x="502920" y="6400800"/>
-            <a:ext cx="5486400" cy="320040"/>
+            <a:ext cx="6858000" cy="320040"/>
           </a:xfrm>
           <a:prstGeom prst="rect">
             <a:avLst/>
@@ -8120,14 +8373,24 @@
               </a:spcAft>
             </a:pPr>
             <a:r>
+              <a:rPr sz="1100" b="1" i="0">
+                <a:solidFill>
+                  <a:srgbClr val="1565C0"/>
+                </a:solidFill>
+                <a:latin typeface="Vazirmatn"/>
+                <a:cs typeface="Vazirmatn"/>
+              </a:rPr>
+              <a:t>⛳ Puttclub</a:t>
+            </a:r>
+            <a:r>
               <a:rPr sz="1000" b="0" i="0">
                 <a:solidFill>
                   <a:srgbClr val="5C6B62"/>
                 </a:solidFill>
-                <a:latin typeface="Tahoma"/>
-                <a:cs typeface="Tahoma"/>
-              </a:rPr>
-              <a:t>Golf Academy  ·  Intermediate · Level 2</a:t>
+                <a:latin typeface="Vazirmatn"/>
+                <a:cs typeface="Vazirmatn"/>
+              </a:rPr>
+              <a:t>   ·   Intermediate · Level 2</a:t>
             </a:r>
           </a:p>
         </p:txBody>
@@ -8170,8 +8433,8 @@
                 <a:solidFill>
                   <a:srgbClr val="1565C0"/>
                 </a:solidFill>
-                <a:latin typeface="Tahoma"/>
-                <a:cs typeface="Tahoma"/>
+                <a:latin typeface="Vazirmatn"/>
+                <a:cs typeface="Vazirmatn"/>
               </a:rPr>
               <a:t>15</a:t>
             </a:r>
@@ -8322,8 +8585,8 @@
                 <a:solidFill>
                   <a:srgbClr val="1565C0"/>
                 </a:solidFill>
-                <a:latin typeface="Tahoma"/>
-                <a:cs typeface="Tahoma"/>
+                <a:latin typeface="Vazirmatn"/>
+                <a:cs typeface="Vazirmatn"/>
               </a:rPr>
               <a:t>فصل ۱۵</a:t>
             </a:r>
@@ -8345,8 +8608,8 @@
                 <a:solidFill>
                   <a:srgbClr val="1F2A24"/>
                 </a:solidFill>
-                <a:latin typeface="Tahoma"/>
-                <a:cs typeface="Tahoma"/>
+                <a:latin typeface="Vazirmatn"/>
+                <a:cs typeface="Vazirmatn"/>
               </a:rPr>
               <a:t>مراحل Green Reading</a:t>
             </a:r>
@@ -8533,8 +8796,8 @@
                 <a:solidFill>
                   <a:srgbClr val="FFFFFF"/>
                 </a:solidFill>
-                <a:latin typeface="Tahoma"/>
-                <a:cs typeface="Tahoma"/>
+                <a:latin typeface="Vazirmatn"/>
+                <a:cs typeface="Vazirmatn"/>
               </a:rPr>
               <a:t>1</a:t>
             </a:r>
@@ -8579,8 +8842,8 @@
                 <a:solidFill>
                   <a:srgbClr val="1F2A24"/>
                 </a:solidFill>
-                <a:latin typeface="Tahoma"/>
-                <a:cs typeface="Tahoma"/>
+                <a:latin typeface="Vazirmatn"/>
+                <a:cs typeface="Vazirmatn"/>
               </a:rPr>
               <a:t>پشت توپ</a:t>
             </a:r>
@@ -8602,8 +8865,8 @@
                 <a:solidFill>
                   <a:srgbClr val="5C6B62"/>
                 </a:solidFill>
-                <a:latin typeface="Tahoma"/>
-                <a:cs typeface="Tahoma"/>
+                <a:latin typeface="Vazirmatn"/>
+                <a:cs typeface="Vazirmatn"/>
               </a:rPr>
               <a:t>خط کلی را ببین</a:t>
             </a:r>
@@ -8746,8 +9009,8 @@
                 <a:solidFill>
                   <a:srgbClr val="FFFFFF"/>
                 </a:solidFill>
-                <a:latin typeface="Tahoma"/>
-                <a:cs typeface="Tahoma"/>
+                <a:latin typeface="Vazirmatn"/>
+                <a:cs typeface="Vazirmatn"/>
               </a:rPr>
               <a:t>2</a:t>
             </a:r>
@@ -8792,8 +9055,8 @@
                 <a:solidFill>
                   <a:srgbClr val="1F2A24"/>
                 </a:solidFill>
-                <a:latin typeface="Tahoma"/>
-                <a:cs typeface="Tahoma"/>
+                <a:latin typeface="Vazirmatn"/>
+                <a:cs typeface="Vazirmatn"/>
               </a:rPr>
               <a:t>از سمت Hole</a:t>
             </a:r>
@@ -8815,8 +9078,8 @@
                 <a:solidFill>
                   <a:srgbClr val="5C6B62"/>
                 </a:solidFill>
-                <a:latin typeface="Tahoma"/>
-                <a:cs typeface="Tahoma"/>
+                <a:latin typeface="Vazirmatn"/>
+                <a:cs typeface="Vazirmatn"/>
               </a:rPr>
               <a:t>شیب را برعکس ببین</a:t>
             </a:r>
@@ -8959,8 +9222,8 @@
                 <a:solidFill>
                   <a:srgbClr val="FFFFFF"/>
                 </a:solidFill>
-                <a:latin typeface="Tahoma"/>
-                <a:cs typeface="Tahoma"/>
+                <a:latin typeface="Vazirmatn"/>
+                <a:cs typeface="Vazirmatn"/>
               </a:rPr>
               <a:t>3</a:t>
             </a:r>
@@ -9005,8 +9268,8 @@
                 <a:solidFill>
                   <a:srgbClr val="1F2A24"/>
                 </a:solidFill>
-                <a:latin typeface="Tahoma"/>
-                <a:cs typeface="Tahoma"/>
+                <a:latin typeface="Vazirmatn"/>
+                <a:cs typeface="Vazirmatn"/>
               </a:rPr>
               <a:t>تخمین سرعت</a:t>
             </a:r>
@@ -9028,8 +9291,8 @@
                 <a:solidFill>
                   <a:srgbClr val="5C6B62"/>
                 </a:solidFill>
-                <a:latin typeface="Tahoma"/>
-                <a:cs typeface="Tahoma"/>
+                <a:latin typeface="Vazirmatn"/>
+                <a:cs typeface="Vazirmatn"/>
               </a:rPr>
               <a:t>Green تند یا کند؟</a:t>
             </a:r>
@@ -9172,8 +9435,8 @@
                 <a:solidFill>
                   <a:srgbClr val="FFFFFF"/>
                 </a:solidFill>
-                <a:latin typeface="Tahoma"/>
-                <a:cs typeface="Tahoma"/>
+                <a:latin typeface="Vazirmatn"/>
+                <a:cs typeface="Vazirmatn"/>
               </a:rPr>
               <a:t>4</a:t>
             </a:r>
@@ -9218,8 +9481,8 @@
                 <a:solidFill>
                   <a:srgbClr val="1F2A24"/>
                 </a:solidFill>
-                <a:latin typeface="Tahoma"/>
-                <a:cs typeface="Tahoma"/>
+                <a:latin typeface="Vazirmatn"/>
+                <a:cs typeface="Vazirmatn"/>
               </a:rPr>
               <a:t>Break</a:t>
             </a:r>
@@ -9241,8 +9504,8 @@
                 <a:solidFill>
                   <a:srgbClr val="5C6B62"/>
                 </a:solidFill>
-                <a:latin typeface="Tahoma"/>
-                <a:cs typeface="Tahoma"/>
+                <a:latin typeface="Vazirmatn"/>
+                <a:cs typeface="Vazirmatn"/>
               </a:rPr>
               <a:t>مقدار انحنا</a:t>
             </a:r>
@@ -9385,8 +9648,8 @@
                 <a:solidFill>
                   <a:srgbClr val="FFFFFF"/>
                 </a:solidFill>
-                <a:latin typeface="Tahoma"/>
-                <a:cs typeface="Tahoma"/>
+                <a:latin typeface="Vazirmatn"/>
+                <a:cs typeface="Vazirmatn"/>
               </a:rPr>
               <a:t>5</a:t>
             </a:r>
@@ -9431,8 +9694,8 @@
                 <a:solidFill>
                   <a:srgbClr val="1F2A24"/>
                 </a:solidFill>
-                <a:latin typeface="Tahoma"/>
-                <a:cs typeface="Tahoma"/>
+                <a:latin typeface="Vazirmatn"/>
+                <a:cs typeface="Vazirmatn"/>
               </a:rPr>
               <a:t>نقطه شروع</a:t>
             </a:r>
@@ -9454,8 +9717,8 @@
                 <a:solidFill>
                   <a:srgbClr val="5C6B62"/>
                 </a:solidFill>
-                <a:latin typeface="Tahoma"/>
-                <a:cs typeface="Tahoma"/>
+                <a:latin typeface="Vazirmatn"/>
+                <a:cs typeface="Vazirmatn"/>
               </a:rPr>
               <a:t>انتخاب خط</a:t>
             </a:r>
@@ -9590,8 +9853,8 @@
                 <a:solidFill>
                   <a:srgbClr val="1F2A24"/>
                 </a:solidFill>
-                <a:latin typeface="Tahoma"/>
-                <a:cs typeface="Tahoma"/>
+                <a:latin typeface="Vazirmatn"/>
+                <a:cs typeface="Vazirmatn"/>
               </a:rPr>
               <a:t>قبل از Setup، خط و سرعت را مشخص کنید؛ وقتی روی توپ قرار گرفتید فقط اجرا کنید.</a:t>
             </a:r>
@@ -9607,7 +9870,7 @@
         <p:spPr>
           <a:xfrm>
             <a:off x="502920" y="6400800"/>
-            <a:ext cx="5486400" cy="320040"/>
+            <a:ext cx="6858000" cy="320040"/>
           </a:xfrm>
           <a:prstGeom prst="rect">
             <a:avLst/>
@@ -9632,14 +9895,24 @@
               </a:spcAft>
             </a:pPr>
             <a:r>
+              <a:rPr sz="1100" b="1" i="0">
+                <a:solidFill>
+                  <a:srgbClr val="1565C0"/>
+                </a:solidFill>
+                <a:latin typeface="Vazirmatn"/>
+                <a:cs typeface="Vazirmatn"/>
+              </a:rPr>
+              <a:t>⛳ Puttclub</a:t>
+            </a:r>
+            <a:r>
               <a:rPr sz="1000" b="0" i="0">
                 <a:solidFill>
                   <a:srgbClr val="5C6B62"/>
                 </a:solidFill>
-                <a:latin typeface="Tahoma"/>
-                <a:cs typeface="Tahoma"/>
-              </a:rPr>
-              <a:t>Golf Academy  ·  Intermediate · Level 2</a:t>
+                <a:latin typeface="Vazirmatn"/>
+                <a:cs typeface="Vazirmatn"/>
+              </a:rPr>
+              <a:t>   ·   Intermediate · Level 2</a:t>
             </a:r>
           </a:p>
         </p:txBody>
@@ -9682,8 +9955,8 @@
                 <a:solidFill>
                   <a:srgbClr val="1565C0"/>
                 </a:solidFill>
-                <a:latin typeface="Tahoma"/>
-                <a:cs typeface="Tahoma"/>
+                <a:latin typeface="Vazirmatn"/>
+                <a:cs typeface="Vazirmatn"/>
               </a:rPr>
               <a:t>16</a:t>
             </a:r>
@@ -9860,8 +10133,8 @@
                 <a:solidFill>
                   <a:srgbClr val="FFFFFF"/>
                 </a:solidFill>
-                <a:latin typeface="Tahoma"/>
-                <a:cs typeface="Tahoma"/>
+                <a:latin typeface="Vazirmatn"/>
+                <a:cs typeface="Vazirmatn"/>
               </a:rPr>
               <a:t>کنترل سرعت روی Green</a:t>
             </a:r>
@@ -9950,8 +10223,8 @@
                 <a:solidFill>
                   <a:srgbClr val="1565C0"/>
                 </a:solidFill>
-                <a:latin typeface="Tahoma"/>
-                <a:cs typeface="Tahoma"/>
+                <a:latin typeface="Vazirmatn"/>
+                <a:cs typeface="Vazirmatn"/>
               </a:rPr>
               <a:t>فصل ۱۶</a:t>
             </a:r>
@@ -9973,8 +10246,8 @@
                 <a:solidFill>
                   <a:srgbClr val="1F2A24"/>
                 </a:solidFill>
-                <a:latin typeface="Tahoma"/>
-                <a:cs typeface="Tahoma"/>
+                <a:latin typeface="Vazirmatn"/>
+                <a:cs typeface="Vazirmatn"/>
               </a:rPr>
               <a:t>کنترل فاصله در Putting</a:t>
             </a:r>
@@ -10063,8 +10336,8 @@
                 <a:solidFill>
                   <a:srgbClr val="1565C0"/>
                 </a:solidFill>
-                <a:latin typeface="Tahoma"/>
-                <a:cs typeface="Tahoma"/>
+                <a:latin typeface="Vazirmatn"/>
+                <a:cs typeface="Vazirmatn"/>
               </a:rPr>
               <a:t>●  </a:t>
             </a:r>
@@ -10073,8 +10346,8 @@
                 <a:solidFill>
                   <a:srgbClr val="1565C0"/>
                 </a:solidFill>
-                <a:latin typeface="Tahoma"/>
-                <a:cs typeface="Tahoma"/>
+                <a:latin typeface="Vazirmatn"/>
+                <a:cs typeface="Vazirmatn"/>
               </a:rPr>
               <a:t>تمرین بسیار مهم</a:t>
             </a:r>
@@ -10083,8 +10356,8 @@
                 <a:solidFill>
                   <a:srgbClr val="1F2A24"/>
                 </a:solidFill>
-                <a:latin typeface="Tahoma"/>
-                <a:cs typeface="Tahoma"/>
+                <a:latin typeface="Vazirmatn"/>
+                <a:cs typeface="Vazirmatn"/>
               </a:rPr>
               <a:t>  —  Ladder Drill</a:t>
             </a:r>
@@ -10106,8 +10379,8 @@
                 <a:solidFill>
                   <a:srgbClr val="1565C0"/>
                 </a:solidFill>
-                <a:latin typeface="Tahoma"/>
-                <a:cs typeface="Tahoma"/>
+                <a:latin typeface="Vazirmatn"/>
+                <a:cs typeface="Vazirmatn"/>
               </a:rPr>
               <a:t>●  </a:t>
             </a:r>
@@ -10116,8 +10389,8 @@
                 <a:solidFill>
                   <a:srgbClr val="1F2A24"/>
                 </a:solidFill>
-                <a:latin typeface="Tahoma"/>
-                <a:cs typeface="Tahoma"/>
+                <a:latin typeface="Vazirmatn"/>
+                <a:cs typeface="Vazirmatn"/>
               </a:rPr>
               <a:t>توپ‌ها را در فاصله‌های ۳، ۶، ۹ و ۱۲ متری قرار دهید</a:t>
             </a:r>
@@ -10139,8 +10412,8 @@
                 <a:solidFill>
                   <a:srgbClr val="1565C0"/>
                 </a:solidFill>
-                <a:latin typeface="Tahoma"/>
-                <a:cs typeface="Tahoma"/>
+                <a:latin typeface="Vazirmatn"/>
+                <a:cs typeface="Vazirmatn"/>
               </a:rPr>
               <a:t>●  </a:t>
             </a:r>
@@ -10149,8 +10422,8 @@
                 <a:solidFill>
                   <a:srgbClr val="1F2A24"/>
                 </a:solidFill>
-                <a:latin typeface="Tahoma"/>
-                <a:cs typeface="Tahoma"/>
+                <a:latin typeface="Vazirmatn"/>
+                <a:cs typeface="Vazirmatn"/>
               </a:rPr>
               <a:t>هدف این نیست که همه توپ‌ها وارد Hole شوند</a:t>
             </a:r>
@@ -10172,8 +10445,8 @@
                 <a:solidFill>
                   <a:srgbClr val="1565C0"/>
                 </a:solidFill>
-                <a:latin typeface="Tahoma"/>
-                <a:cs typeface="Tahoma"/>
+                <a:latin typeface="Vazirmatn"/>
+                <a:cs typeface="Vazirmatn"/>
               </a:rPr>
               <a:t>●  </a:t>
             </a:r>
@@ -10182,8 +10455,8 @@
                 <a:solidFill>
                   <a:srgbClr val="1565C0"/>
                 </a:solidFill>
-                <a:latin typeface="Tahoma"/>
-                <a:cs typeface="Tahoma"/>
+                <a:latin typeface="Vazirmatn"/>
+                <a:cs typeface="Vazirmatn"/>
               </a:rPr>
               <a:t>هدف</a:t>
             </a:r>
@@ -10192,8 +10465,8 @@
                 <a:solidFill>
                   <a:srgbClr val="1F2A24"/>
                 </a:solidFill>
-                <a:latin typeface="Tahoma"/>
-                <a:cs typeface="Tahoma"/>
+                <a:latin typeface="Vazirmatn"/>
+                <a:cs typeface="Vazirmatn"/>
               </a:rPr>
               <a:t>  —  توپ‌ها در محدوده مشخصی از Hole متوقف شوند</a:t>
             </a:r>
@@ -10215,8 +10488,8 @@
                 <a:solidFill>
                   <a:srgbClr val="1565C0"/>
                 </a:solidFill>
-                <a:latin typeface="Tahoma"/>
-                <a:cs typeface="Tahoma"/>
+                <a:latin typeface="Vazirmatn"/>
+                <a:cs typeface="Vazirmatn"/>
               </a:rPr>
               <a:t>●  </a:t>
             </a:r>
@@ -10225,8 +10498,8 @@
                 <a:solidFill>
                   <a:srgbClr val="1F2A24"/>
                 </a:solidFill>
-                <a:latin typeface="Tahoma"/>
-                <a:cs typeface="Tahoma"/>
+                <a:latin typeface="Vazirmatn"/>
+                <a:cs typeface="Vazirmatn"/>
               </a:rPr>
               <a:t>این تمرین حس فاصله (Distance Control) را بسیار بهتر می‌کند</a:t>
             </a:r>
@@ -10361,8 +10634,8 @@
                 <a:solidFill>
                   <a:srgbClr val="1565C0"/>
                 </a:solidFill>
-                <a:latin typeface="Tahoma"/>
-                <a:cs typeface="Tahoma"/>
+                <a:latin typeface="Vazirmatn"/>
+                <a:cs typeface="Vazirmatn"/>
               </a:rPr>
               <a:t>نکته مربی:  </a:t>
             </a:r>
@@ -10371,8 +10644,8 @@
                 <a:solidFill>
                   <a:srgbClr val="1F2A24"/>
                 </a:solidFill>
-                <a:latin typeface="Tahoma"/>
-                <a:cs typeface="Tahoma"/>
+                <a:latin typeface="Vazirmatn"/>
+                <a:cs typeface="Vazirmatn"/>
               </a:rPr>
               <a:t>توپی که با سرعت درست به Hole برسد، حتی اگر وارد نشود نزدیک متوقف می‌شود.</a:t>
             </a:r>
@@ -10388,7 +10661,7 @@
         <p:spPr>
           <a:xfrm>
             <a:off x="502920" y="6400800"/>
-            <a:ext cx="5486400" cy="320040"/>
+            <a:ext cx="6858000" cy="320040"/>
           </a:xfrm>
           <a:prstGeom prst="rect">
             <a:avLst/>
@@ -10413,14 +10686,24 @@
               </a:spcAft>
             </a:pPr>
             <a:r>
+              <a:rPr sz="1100" b="1" i="0">
+                <a:solidFill>
+                  <a:srgbClr val="1565C0"/>
+                </a:solidFill>
+                <a:latin typeface="Vazirmatn"/>
+                <a:cs typeface="Vazirmatn"/>
+              </a:rPr>
+              <a:t>⛳ Puttclub</a:t>
+            </a:r>
+            <a:r>
               <a:rPr sz="1000" b="0" i="0">
                 <a:solidFill>
                   <a:srgbClr val="5C6B62"/>
                 </a:solidFill>
-                <a:latin typeface="Tahoma"/>
-                <a:cs typeface="Tahoma"/>
-              </a:rPr>
-              <a:t>Golf Academy  ·  Intermediate · Level 2</a:t>
+                <a:latin typeface="Vazirmatn"/>
+                <a:cs typeface="Vazirmatn"/>
+              </a:rPr>
+              <a:t>   ·   Intermediate · Level 2</a:t>
             </a:r>
           </a:p>
         </p:txBody>
@@ -10463,8 +10746,8 @@
                 <a:solidFill>
                   <a:srgbClr val="1565C0"/>
                 </a:solidFill>
-                <a:latin typeface="Tahoma"/>
-                <a:cs typeface="Tahoma"/>
+                <a:latin typeface="Vazirmatn"/>
+                <a:cs typeface="Vazirmatn"/>
               </a:rPr>
               <a:t>17</a:t>
             </a:r>
@@ -10615,8 +10898,8 @@
                 <a:solidFill>
                   <a:srgbClr val="1565C0"/>
                 </a:solidFill>
-                <a:latin typeface="Tahoma"/>
-                <a:cs typeface="Tahoma"/>
+                <a:latin typeface="Vazirmatn"/>
+                <a:cs typeface="Vazirmatn"/>
               </a:rPr>
               <a:t>فصل ۱۷</a:t>
             </a:r>
@@ -10638,8 +10921,8 @@
                 <a:solidFill>
                   <a:srgbClr val="1F2A24"/>
                 </a:solidFill>
-                <a:latin typeface="Tahoma"/>
-                <a:cs typeface="Tahoma"/>
+                <a:latin typeface="Vazirmatn"/>
+                <a:cs typeface="Vazirmatn"/>
               </a:rPr>
               <a:t>Short Putts</a:t>
             </a:r>
@@ -10728,8 +11011,8 @@
                 <a:solidFill>
                   <a:srgbClr val="1565C0"/>
                 </a:solidFill>
-                <a:latin typeface="Tahoma"/>
-                <a:cs typeface="Tahoma"/>
+                <a:latin typeface="Vazirmatn"/>
+                <a:cs typeface="Vazirmatn"/>
               </a:rPr>
               <a:t>●  </a:t>
             </a:r>
@@ -10738,8 +11021,8 @@
                 <a:solidFill>
                   <a:srgbClr val="1F2A24"/>
                 </a:solidFill>
-                <a:latin typeface="Tahoma"/>
-                <a:cs typeface="Tahoma"/>
+                <a:latin typeface="Vazirmatn"/>
+                <a:cs typeface="Vazirmatn"/>
               </a:rPr>
               <a:t>برای Putt‌های کوتاه Alignment اهمیت زیادی دارد</a:t>
             </a:r>
@@ -10761,8 +11044,8 @@
                 <a:solidFill>
                   <a:srgbClr val="1565C0"/>
                 </a:solidFill>
-                <a:latin typeface="Tahoma"/>
-                <a:cs typeface="Tahoma"/>
+                <a:latin typeface="Vazirmatn"/>
+                <a:cs typeface="Vazirmatn"/>
               </a:rPr>
               <a:t>●  </a:t>
             </a:r>
@@ -10771,8 +11054,8 @@
                 <a:solidFill>
                   <a:srgbClr val="1F2A24"/>
                 </a:solidFill>
-                <a:latin typeface="Tahoma"/>
-                <a:cs typeface="Tahoma"/>
+                <a:latin typeface="Vazirmatn"/>
+                <a:cs typeface="Vazirmatn"/>
               </a:rPr>
               <a:t>Face باید در لحظه برخورد کنترل شود</a:t>
             </a:r>
@@ -10794,8 +11077,8 @@
                 <a:solidFill>
                   <a:srgbClr val="1565C0"/>
                 </a:solidFill>
-                <a:latin typeface="Tahoma"/>
-                <a:cs typeface="Tahoma"/>
+                <a:latin typeface="Vazirmatn"/>
+                <a:cs typeface="Vazirmatn"/>
               </a:rPr>
               <a:t>●  </a:t>
             </a:r>
@@ -10804,8 +11087,8 @@
                 <a:solidFill>
                   <a:srgbClr val="1F2A24"/>
                 </a:solidFill>
-                <a:latin typeface="Tahoma"/>
-                <a:cs typeface="Tahoma"/>
+                <a:latin typeface="Vazirmatn"/>
+                <a:cs typeface="Vazirmatn"/>
               </a:rPr>
               <a:t>روتین قبل از ضربه باید ثابت و یکسان باشد</a:t>
             </a:r>
@@ -10827,8 +11110,8 @@
                 <a:solidFill>
                   <a:srgbClr val="1565C0"/>
                 </a:solidFill>
-                <a:latin typeface="Tahoma"/>
-                <a:cs typeface="Tahoma"/>
+                <a:latin typeface="Vazirmatn"/>
+                <a:cs typeface="Vazirmatn"/>
               </a:rPr>
               <a:t>●  </a:t>
             </a:r>
@@ -10837,8 +11120,8 @@
                 <a:solidFill>
                   <a:srgbClr val="1565C0"/>
                 </a:solidFill>
-                <a:latin typeface="Tahoma"/>
-                <a:cs typeface="Tahoma"/>
+                <a:latin typeface="Vazirmatn"/>
+                <a:cs typeface="Vazirmatn"/>
               </a:rPr>
               <a:t>تمرین</a:t>
             </a:r>
@@ -10847,8 +11130,8 @@
                 <a:solidFill>
                   <a:srgbClr val="1F2A24"/>
                 </a:solidFill>
-                <a:latin typeface="Tahoma"/>
-                <a:cs typeface="Tahoma"/>
+                <a:latin typeface="Vazirmatn"/>
+                <a:cs typeface="Vazirmatn"/>
               </a:rPr>
               <a:t>  —  توپ‌ها را در فاصله ۱ متری اطراف Hole بگذارید</a:t>
             </a:r>
@@ -10870,8 +11153,8 @@
                 <a:solidFill>
                   <a:srgbClr val="1565C0"/>
                 </a:solidFill>
-                <a:latin typeface="Tahoma"/>
-                <a:cs typeface="Tahoma"/>
+                <a:latin typeface="Vazirmatn"/>
+                <a:cs typeface="Vazirmatn"/>
               </a:rPr>
               <a:t>●  </a:t>
             </a:r>
@@ -10880,8 +11163,8 @@
                 <a:solidFill>
                   <a:srgbClr val="1F2A24"/>
                 </a:solidFill>
-                <a:latin typeface="Tahoma"/>
-                <a:cs typeface="Tahoma"/>
+                <a:latin typeface="Vazirmatn"/>
+                <a:cs typeface="Vazirmatn"/>
               </a:rPr>
               <a:t>هدف تکرار موفقیت؛ سپس فاصله را به ۲ و ۳ متر افزایش دهید</a:t>
             </a:r>
@@ -11016,8 +11299,8 @@
                 <a:solidFill>
                   <a:srgbClr val="1565C0"/>
                 </a:solidFill>
-                <a:latin typeface="Tahoma"/>
-                <a:cs typeface="Tahoma"/>
+                <a:latin typeface="Vazirmatn"/>
+                <a:cs typeface="Vazirmatn"/>
               </a:rPr>
               <a:t>💡 </a:t>
             </a:r>
@@ -11026,8 +11309,8 @@
                 <a:solidFill>
                   <a:srgbClr val="1F2A24"/>
                 </a:solidFill>
-                <a:latin typeface="Tahoma"/>
-                <a:cs typeface="Tahoma"/>
+                <a:latin typeface="Vazirmatn"/>
+                <a:cs typeface="Vazirmatn"/>
               </a:rPr>
               <a:t>Short Putts بیشتر به روتین ثابت و کنترل Face وابسته است تا قدرت.</a:t>
             </a:r>
@@ -11043,7 +11326,7 @@
         <p:spPr>
           <a:xfrm>
             <a:off x="502920" y="6400800"/>
-            <a:ext cx="5486400" cy="320040"/>
+            <a:ext cx="6858000" cy="320040"/>
           </a:xfrm>
           <a:prstGeom prst="rect">
             <a:avLst/>
@@ -11068,14 +11351,24 @@
               </a:spcAft>
             </a:pPr>
             <a:r>
+              <a:rPr sz="1100" b="1" i="0">
+                <a:solidFill>
+                  <a:srgbClr val="1565C0"/>
+                </a:solidFill>
+                <a:latin typeface="Vazirmatn"/>
+                <a:cs typeface="Vazirmatn"/>
+              </a:rPr>
+              <a:t>⛳ Puttclub</a:t>
+            </a:r>
+            <a:r>
               <a:rPr sz="1000" b="0" i="0">
                 <a:solidFill>
                   <a:srgbClr val="5C6B62"/>
                 </a:solidFill>
-                <a:latin typeface="Tahoma"/>
-                <a:cs typeface="Tahoma"/>
-              </a:rPr>
-              <a:t>Golf Academy  ·  Intermediate · Level 2</a:t>
+                <a:latin typeface="Vazirmatn"/>
+                <a:cs typeface="Vazirmatn"/>
+              </a:rPr>
+              <a:t>   ·   Intermediate · Level 2</a:t>
             </a:r>
           </a:p>
         </p:txBody>
@@ -11118,8 +11411,8 @@
                 <a:solidFill>
                   <a:srgbClr val="1565C0"/>
                 </a:solidFill>
-                <a:latin typeface="Tahoma"/>
-                <a:cs typeface="Tahoma"/>
+                <a:latin typeface="Vazirmatn"/>
+                <a:cs typeface="Vazirmatn"/>
               </a:rPr>
               <a:t>18</a:t>
             </a:r>
@@ -11270,8 +11563,8 @@
                 <a:solidFill>
                   <a:srgbClr val="1565C0"/>
                 </a:solidFill>
-                <a:latin typeface="Tahoma"/>
-                <a:cs typeface="Tahoma"/>
+                <a:latin typeface="Vazirmatn"/>
+                <a:cs typeface="Vazirmatn"/>
               </a:rPr>
               <a:t>فصل ۱۸</a:t>
             </a:r>
@@ -11293,8 +11586,8 @@
                 <a:solidFill>
                   <a:srgbClr val="1F2A24"/>
                 </a:solidFill>
-                <a:latin typeface="Tahoma"/>
-                <a:cs typeface="Tahoma"/>
+                <a:latin typeface="Vazirmatn"/>
+                <a:cs typeface="Vazirmatn"/>
               </a:rPr>
               <a:t>روند تصمیم‌گیری پیش از ضربه</a:t>
             </a:r>
@@ -11481,8 +11774,8 @@
                 <a:solidFill>
                   <a:srgbClr val="FFFFFF"/>
                 </a:solidFill>
-                <a:latin typeface="Tahoma"/>
-                <a:cs typeface="Tahoma"/>
+                <a:latin typeface="Vazirmatn"/>
+                <a:cs typeface="Vazirmatn"/>
               </a:rPr>
               <a:t>1</a:t>
             </a:r>
@@ -11527,8 +11820,8 @@
                 <a:solidFill>
                   <a:srgbClr val="1F2A24"/>
                 </a:solidFill>
-                <a:latin typeface="Tahoma"/>
-                <a:cs typeface="Tahoma"/>
+                <a:latin typeface="Vazirmatn"/>
+                <a:cs typeface="Vazirmatn"/>
               </a:rPr>
               <a:t>فاصله</a:t>
             </a:r>
@@ -11550,8 +11843,8 @@
                 <a:solidFill>
                   <a:srgbClr val="5C6B62"/>
                 </a:solidFill>
-                <a:latin typeface="Tahoma"/>
-                <a:cs typeface="Tahoma"/>
+                <a:latin typeface="Vazirmatn"/>
+                <a:cs typeface="Vazirmatn"/>
               </a:rPr>
               <a:t>Distance</a:t>
             </a:r>
@@ -11694,8 +11987,8 @@
                 <a:solidFill>
                   <a:srgbClr val="FFFFFF"/>
                 </a:solidFill>
-                <a:latin typeface="Tahoma"/>
-                <a:cs typeface="Tahoma"/>
+                <a:latin typeface="Vazirmatn"/>
+                <a:cs typeface="Vazirmatn"/>
               </a:rPr>
               <a:t>2</a:t>
             </a:r>
@@ -11740,8 +12033,8 @@
                 <a:solidFill>
                   <a:srgbClr val="1F2A24"/>
                 </a:solidFill>
-                <a:latin typeface="Tahoma"/>
-                <a:cs typeface="Tahoma"/>
+                <a:latin typeface="Vazirmatn"/>
+                <a:cs typeface="Vazirmatn"/>
               </a:rPr>
               <a:t>Lie</a:t>
             </a:r>
@@ -11763,8 +12056,8 @@
                 <a:solidFill>
                   <a:srgbClr val="5C6B62"/>
                 </a:solidFill>
-                <a:latin typeface="Tahoma"/>
-                <a:cs typeface="Tahoma"/>
+                <a:latin typeface="Vazirmatn"/>
+                <a:cs typeface="Vazirmatn"/>
               </a:rPr>
               <a:t>وضعیت توپ</a:t>
             </a:r>
@@ -11907,8 +12200,8 @@
                 <a:solidFill>
                   <a:srgbClr val="FFFFFF"/>
                 </a:solidFill>
-                <a:latin typeface="Tahoma"/>
-                <a:cs typeface="Tahoma"/>
+                <a:latin typeface="Vazirmatn"/>
+                <a:cs typeface="Vazirmatn"/>
               </a:rPr>
               <a:t>3</a:t>
             </a:r>
@@ -11953,8 +12246,8 @@
                 <a:solidFill>
                   <a:srgbClr val="1F2A24"/>
                 </a:solidFill>
-                <a:latin typeface="Tahoma"/>
-                <a:cs typeface="Tahoma"/>
+                <a:latin typeface="Vazirmatn"/>
+                <a:cs typeface="Vazirmatn"/>
               </a:rPr>
               <a:t>خطرات</a:t>
             </a:r>
@@ -11976,8 +12269,8 @@
                 <a:solidFill>
                   <a:srgbClr val="5C6B62"/>
                 </a:solidFill>
-                <a:latin typeface="Tahoma"/>
-                <a:cs typeface="Tahoma"/>
+                <a:latin typeface="Vazirmatn"/>
+                <a:cs typeface="Vazirmatn"/>
               </a:rPr>
               <a:t>Hazards</a:t>
             </a:r>
@@ -12120,8 +12413,8 @@
                 <a:solidFill>
                   <a:srgbClr val="FFFFFF"/>
                 </a:solidFill>
-                <a:latin typeface="Tahoma"/>
-                <a:cs typeface="Tahoma"/>
+                <a:latin typeface="Vazirmatn"/>
+                <a:cs typeface="Vazirmatn"/>
               </a:rPr>
               <a:t>4</a:t>
             </a:r>
@@ -12166,8 +12459,8 @@
                 <a:solidFill>
                   <a:srgbClr val="1F2A24"/>
                 </a:solidFill>
-                <a:latin typeface="Tahoma"/>
-                <a:cs typeface="Tahoma"/>
+                <a:latin typeface="Vazirmatn"/>
+                <a:cs typeface="Vazirmatn"/>
               </a:rPr>
               <a:t>باد و شیب</a:t>
             </a:r>
@@ -12189,8 +12482,8 @@
                 <a:solidFill>
                   <a:srgbClr val="5C6B62"/>
                 </a:solidFill>
-                <a:latin typeface="Tahoma"/>
-                <a:cs typeface="Tahoma"/>
+                <a:latin typeface="Vazirmatn"/>
+                <a:cs typeface="Vazirmatn"/>
               </a:rPr>
               <a:t>شرایط</a:t>
             </a:r>
@@ -12333,8 +12626,8 @@
                 <a:solidFill>
                   <a:srgbClr val="FFFFFF"/>
                 </a:solidFill>
-                <a:latin typeface="Tahoma"/>
-                <a:cs typeface="Tahoma"/>
+                <a:latin typeface="Vazirmatn"/>
+                <a:cs typeface="Vazirmatn"/>
               </a:rPr>
               <a:t>5</a:t>
             </a:r>
@@ -12379,8 +12672,8 @@
                 <a:solidFill>
                   <a:srgbClr val="1F2A24"/>
                 </a:solidFill>
-                <a:latin typeface="Tahoma"/>
-                <a:cs typeface="Tahoma"/>
+                <a:latin typeface="Vazirmatn"/>
+                <a:cs typeface="Vazirmatn"/>
               </a:rPr>
               <a:t>انتخاب کلاب</a:t>
             </a:r>
@@ -12402,8 +12695,8 @@
                 <a:solidFill>
                   <a:srgbClr val="5C6B62"/>
                 </a:solidFill>
-                <a:latin typeface="Tahoma"/>
-                <a:cs typeface="Tahoma"/>
+                <a:latin typeface="Vazirmatn"/>
+                <a:cs typeface="Vazirmatn"/>
               </a:rPr>
               <a:t>Club</a:t>
             </a:r>
@@ -12546,8 +12839,8 @@
                 <a:solidFill>
                   <a:srgbClr val="FFFFFF"/>
                 </a:solidFill>
-                <a:latin typeface="Tahoma"/>
-                <a:cs typeface="Tahoma"/>
+                <a:latin typeface="Vazirmatn"/>
+                <a:cs typeface="Vazirmatn"/>
               </a:rPr>
               <a:t>6</a:t>
             </a:r>
@@ -12592,8 +12885,8 @@
                 <a:solidFill>
                   <a:srgbClr val="1F2A24"/>
                 </a:solidFill>
-                <a:latin typeface="Tahoma"/>
-                <a:cs typeface="Tahoma"/>
+                <a:latin typeface="Vazirmatn"/>
+                <a:cs typeface="Vazirmatn"/>
               </a:rPr>
               <a:t>Target</a:t>
             </a:r>
@@ -12615,8 +12908,8 @@
                 <a:solidFill>
                   <a:srgbClr val="5C6B62"/>
                 </a:solidFill>
-                <a:latin typeface="Tahoma"/>
-                <a:cs typeface="Tahoma"/>
+                <a:latin typeface="Vazirmatn"/>
+                <a:cs typeface="Vazirmatn"/>
               </a:rPr>
               <a:t>هدف</a:t>
             </a:r>
@@ -12759,8 +13052,8 @@
                 <a:solidFill>
                   <a:srgbClr val="FFFFFF"/>
                 </a:solidFill>
-                <a:latin typeface="Tahoma"/>
-                <a:cs typeface="Tahoma"/>
+                <a:latin typeface="Vazirmatn"/>
+                <a:cs typeface="Vazirmatn"/>
               </a:rPr>
               <a:t>7</a:t>
             </a:r>
@@ -12805,8 +13098,8 @@
                 <a:solidFill>
                   <a:srgbClr val="1F2A24"/>
                 </a:solidFill>
-                <a:latin typeface="Tahoma"/>
-                <a:cs typeface="Tahoma"/>
+                <a:latin typeface="Vazirmatn"/>
+                <a:cs typeface="Vazirmatn"/>
               </a:rPr>
               <a:t>اجرا</a:t>
             </a:r>
@@ -12828,8 +13121,8 @@
                 <a:solidFill>
                   <a:srgbClr val="5C6B62"/>
                 </a:solidFill>
-                <a:latin typeface="Tahoma"/>
-                <a:cs typeface="Tahoma"/>
+                <a:latin typeface="Vazirmatn"/>
+                <a:cs typeface="Vazirmatn"/>
               </a:rPr>
               <a:t>Swing</a:t>
             </a:r>
@@ -12964,8 +13257,8 @@
                 <a:solidFill>
                   <a:srgbClr val="1F2A24"/>
                 </a:solidFill>
-                <a:latin typeface="Tahoma"/>
-                <a:cs typeface="Tahoma"/>
+                <a:latin typeface="Vazirmatn"/>
+                <a:cs typeface="Vazirmatn"/>
               </a:rPr>
               <a:t>این هفت گام را برای هر ضربه طی کنید تا تصمیم‌گیری تبدیل به روتین شود.</a:t>
             </a:r>
@@ -12981,7 +13274,7 @@
         <p:spPr>
           <a:xfrm>
             <a:off x="502920" y="6400800"/>
-            <a:ext cx="5486400" cy="320040"/>
+            <a:ext cx="6858000" cy="320040"/>
           </a:xfrm>
           <a:prstGeom prst="rect">
             <a:avLst/>
@@ -13006,14 +13299,24 @@
               </a:spcAft>
             </a:pPr>
             <a:r>
+              <a:rPr sz="1100" b="1" i="0">
+                <a:solidFill>
+                  <a:srgbClr val="1565C0"/>
+                </a:solidFill>
+                <a:latin typeface="Vazirmatn"/>
+                <a:cs typeface="Vazirmatn"/>
+              </a:rPr>
+              <a:t>⛳ Puttclub</a:t>
+            </a:r>
+            <a:r>
               <a:rPr sz="1000" b="0" i="0">
                 <a:solidFill>
                   <a:srgbClr val="5C6B62"/>
                 </a:solidFill>
-                <a:latin typeface="Tahoma"/>
-                <a:cs typeface="Tahoma"/>
-              </a:rPr>
-              <a:t>Golf Academy  ·  Intermediate · Level 2</a:t>
+                <a:latin typeface="Vazirmatn"/>
+                <a:cs typeface="Vazirmatn"/>
+              </a:rPr>
+              <a:t>   ·   Intermediate · Level 2</a:t>
             </a:r>
           </a:p>
         </p:txBody>
@@ -13056,8 +13359,8 @@
                 <a:solidFill>
                   <a:srgbClr val="1565C0"/>
                 </a:solidFill>
-                <a:latin typeface="Tahoma"/>
-                <a:cs typeface="Tahoma"/>
+                <a:latin typeface="Vazirmatn"/>
+                <a:cs typeface="Vazirmatn"/>
               </a:rPr>
               <a:t>19</a:t>
             </a:r>
@@ -13205,8 +13508,8 @@
             </a:pPr>
             <a:r>
               <a:rPr sz="15000" b="1" i="0">
-                <a:latin typeface="Tahoma"/>
-                <a:cs typeface="Tahoma"/>
+                <a:latin typeface="Vazirmatn"/>
+                <a:cs typeface="Vazirmatn"/>
                 <a:solidFill>
                   <a:srgbClr val="FFFFFF">
                     <a:alpha val="22000"/>
@@ -13256,8 +13559,8 @@
                 <a:solidFill>
                   <a:srgbClr val="FFFFFF"/>
                 </a:solidFill>
-                <a:latin typeface="Tahoma"/>
-                <a:cs typeface="Tahoma"/>
+                <a:latin typeface="Vazirmatn"/>
+                <a:cs typeface="Vazirmatn"/>
               </a:rPr>
               <a:t>اهداف دوره تکمیلی</a:t>
             </a:r>
@@ -13279,8 +13582,8 @@
                 <a:solidFill>
                   <a:srgbClr val="EAF3E8"/>
                 </a:solidFill>
-                <a:latin typeface="Tahoma"/>
-                <a:cs typeface="Tahoma"/>
+                <a:latin typeface="Vazirmatn"/>
+                <a:cs typeface="Vazirmatn"/>
               </a:rPr>
               <a:t>از «یادگیری ضربه» تا «کنترل و تکرارپذیری»</a:t>
             </a:r>
@@ -13325,8 +13628,8 @@
                 <a:solidFill>
                   <a:srgbClr val="64B5F6"/>
                 </a:solidFill>
-                <a:latin typeface="Tahoma"/>
-                <a:cs typeface="Tahoma"/>
+                <a:latin typeface="Vazirmatn"/>
+                <a:cs typeface="Vazirmatn"/>
               </a:rPr>
               <a:t>●  </a:t>
             </a:r>
@@ -13335,8 +13638,8 @@
                 <a:solidFill>
                   <a:srgbClr val="FFFFFF"/>
                 </a:solidFill>
-                <a:latin typeface="Tahoma"/>
-                <a:cs typeface="Tahoma"/>
+                <a:latin typeface="Vazirmatn"/>
+                <a:cs typeface="Vazirmatn"/>
               </a:rPr>
               <a:t>Swing تکرارپذیرتر و شناخت فاصله هر کلاب</a:t>
             </a:r>
@@ -13358,8 +13661,8 @@
                 <a:solidFill>
                   <a:srgbClr val="64B5F6"/>
                 </a:solidFill>
-                <a:latin typeface="Tahoma"/>
-                <a:cs typeface="Tahoma"/>
+                <a:latin typeface="Vazirmatn"/>
+                <a:cs typeface="Vazirmatn"/>
               </a:rPr>
               <a:t>●  </a:t>
             </a:r>
@@ -13368,8 +13671,8 @@
                 <a:solidFill>
                   <a:srgbClr val="FFFFFF"/>
                 </a:solidFill>
-                <a:latin typeface="Tahoma"/>
-                <a:cs typeface="Tahoma"/>
+                <a:latin typeface="Vazirmatn"/>
+                <a:cs typeface="Vazirmatn"/>
               </a:rPr>
               <a:t>کنترل مسیر و ارتفاع توپ تا حدی</a:t>
             </a:r>
@@ -13391,8 +13694,8 @@
                 <a:solidFill>
                   <a:srgbClr val="64B5F6"/>
                 </a:solidFill>
-                <a:latin typeface="Tahoma"/>
-                <a:cs typeface="Tahoma"/>
+                <a:latin typeface="Vazirmatn"/>
+                <a:cs typeface="Vazirmatn"/>
               </a:rPr>
               <a:t>●  </a:t>
             </a:r>
@@ -13401,8 +13704,8 @@
                 <a:solidFill>
                   <a:srgbClr val="FFFFFF"/>
                 </a:solidFill>
-                <a:latin typeface="Tahoma"/>
-                <a:cs typeface="Tahoma"/>
+                <a:latin typeface="Vazirmatn"/>
+                <a:cs typeface="Vazirmatn"/>
               </a:rPr>
               <a:t>ثبات بیشتر در Iron و Wood</a:t>
             </a:r>
@@ -13424,8 +13727,8 @@
                 <a:solidFill>
                   <a:srgbClr val="64B5F6"/>
                 </a:solidFill>
-                <a:latin typeface="Tahoma"/>
-                <a:cs typeface="Tahoma"/>
+                <a:latin typeface="Vazirmatn"/>
+                <a:cs typeface="Vazirmatn"/>
               </a:rPr>
               <a:t>●  </a:t>
             </a:r>
@@ -13434,8 +13737,8 @@
                 <a:solidFill>
                   <a:srgbClr val="FFFFFF"/>
                 </a:solidFill>
-                <a:latin typeface="Tahoma"/>
-                <a:cs typeface="Tahoma"/>
+                <a:latin typeface="Vazirmatn"/>
+                <a:cs typeface="Vazirmatn"/>
               </a:rPr>
               <a:t>تقویت Short Game و خواندن Green</a:t>
             </a:r>
@@ -13457,8 +13760,8 @@
                 <a:solidFill>
                   <a:srgbClr val="64B5F6"/>
                 </a:solidFill>
-                <a:latin typeface="Tahoma"/>
-                <a:cs typeface="Tahoma"/>
+                <a:latin typeface="Vazirmatn"/>
+                <a:cs typeface="Vazirmatn"/>
               </a:rPr>
               <a:t>●  </a:t>
             </a:r>
@@ -13467,8 +13770,8 @@
                 <a:solidFill>
                   <a:srgbClr val="FFFFFF"/>
                 </a:solidFill>
-                <a:latin typeface="Tahoma"/>
-                <a:cs typeface="Tahoma"/>
+                <a:latin typeface="Vazirmatn"/>
+                <a:cs typeface="Vazirmatn"/>
               </a:rPr>
               <a:t>کنترل Putting در سرعت و جهت</a:t>
             </a:r>
@@ -13490,8 +13793,8 @@
                 <a:solidFill>
                   <a:srgbClr val="64B5F6"/>
                 </a:solidFill>
-                <a:latin typeface="Tahoma"/>
-                <a:cs typeface="Tahoma"/>
+                <a:latin typeface="Vazirmatn"/>
+                <a:cs typeface="Vazirmatn"/>
               </a:rPr>
               <a:t>●  </a:t>
             </a:r>
@@ -13500,8 +13803,8 @@
                 <a:solidFill>
                   <a:srgbClr val="FFFFFF"/>
                 </a:solidFill>
-                <a:latin typeface="Tahoma"/>
-                <a:cs typeface="Tahoma"/>
+                <a:latin typeface="Vazirmatn"/>
+                <a:cs typeface="Vazirmatn"/>
               </a:rPr>
               <a:t>تصمیم‌های ساده تاکتیکی و اصلاح خطا</a:t>
             </a:r>
@@ -13517,7 +13820,7 @@
         <p:spPr>
           <a:xfrm>
             <a:off x="502920" y="6400800"/>
-            <a:ext cx="5486400" cy="320040"/>
+            <a:ext cx="6858000" cy="320040"/>
           </a:xfrm>
           <a:prstGeom prst="rect">
             <a:avLst/>
@@ -13542,14 +13845,24 @@
               </a:spcAft>
             </a:pPr>
             <a:r>
+              <a:rPr sz="1100" b="1" i="0">
+                <a:solidFill>
+                  <a:srgbClr val="64B5F6"/>
+                </a:solidFill>
+                <a:latin typeface="Vazirmatn"/>
+                <a:cs typeface="Vazirmatn"/>
+              </a:rPr>
+              <a:t>⛳ Puttclub</a:t>
+            </a:r>
+            <a:r>
               <a:rPr sz="1000" b="0" i="0">
                 <a:solidFill>
                   <a:srgbClr val="FFFFFF"/>
                 </a:solidFill>
-                <a:latin typeface="Tahoma"/>
-                <a:cs typeface="Tahoma"/>
-              </a:rPr>
-              <a:t>Golf Academy  ·  Intermediate · Level 2</a:t>
+                <a:latin typeface="Vazirmatn"/>
+                <a:cs typeface="Vazirmatn"/>
+              </a:rPr>
+              <a:t>   ·   Intermediate · Level 2</a:t>
             </a:r>
           </a:p>
         </p:txBody>
@@ -13592,8 +13905,8 @@
                 <a:solidFill>
                   <a:srgbClr val="64B5F6"/>
                 </a:solidFill>
-                <a:latin typeface="Tahoma"/>
-                <a:cs typeface="Tahoma"/>
+                <a:latin typeface="Vazirmatn"/>
+                <a:cs typeface="Vazirmatn"/>
               </a:rPr>
               <a:t>2</a:t>
             </a:r>
@@ -13744,8 +14057,8 @@
                 <a:solidFill>
                   <a:srgbClr val="1565C0"/>
                 </a:solidFill>
-                <a:latin typeface="Tahoma"/>
-                <a:cs typeface="Tahoma"/>
+                <a:latin typeface="Vazirmatn"/>
+                <a:cs typeface="Vazirmatn"/>
               </a:rPr>
               <a:t>فصل ۱۹</a:t>
             </a:r>
@@ -13767,8 +14080,8 @@
                 <a:solidFill>
                   <a:srgbClr val="1F2A24"/>
                 </a:solidFill>
-                <a:latin typeface="Tahoma"/>
-                <a:cs typeface="Tahoma"/>
+                <a:latin typeface="Vazirmatn"/>
+                <a:cs typeface="Vazirmatn"/>
               </a:rPr>
               <a:t>مدیریت ریسک</a:t>
             </a:r>
@@ -13947,8 +14260,8 @@
                 <a:solidFill>
                   <a:srgbClr val="1565C0"/>
                 </a:solidFill>
-                <a:latin typeface="Tahoma"/>
-                <a:cs typeface="Tahoma"/>
+                <a:latin typeface="Vazirmatn"/>
+                <a:cs typeface="Vazirmatn"/>
               </a:rPr>
               <a:t>انتخاب A</a:t>
             </a:r>
@@ -13970,8 +14283,8 @@
                 <a:solidFill>
                   <a:srgbClr val="5C6B62"/>
                 </a:solidFill>
-                <a:latin typeface="Tahoma"/>
-                <a:cs typeface="Tahoma"/>
+                <a:latin typeface="Vazirmatn"/>
+                <a:cs typeface="Vazirmatn"/>
               </a:rPr>
               <a:t>ضربه مستقیم و پرریسک؛ پاداش بیشتر ولی احتمال خطای بالا</a:t>
             </a:r>
@@ -14106,8 +14419,8 @@
                 <a:solidFill>
                   <a:srgbClr val="1565C0"/>
                 </a:solidFill>
-                <a:latin typeface="Tahoma"/>
-                <a:cs typeface="Tahoma"/>
+                <a:latin typeface="Vazirmatn"/>
+                <a:cs typeface="Vazirmatn"/>
               </a:rPr>
               <a:t>انتخاب B</a:t>
             </a:r>
@@ -14129,8 +14442,8 @@
                 <a:solidFill>
                   <a:srgbClr val="5C6B62"/>
                 </a:solidFill>
-                <a:latin typeface="Tahoma"/>
-                <a:cs typeface="Tahoma"/>
+                <a:latin typeface="Vazirmatn"/>
+                <a:cs typeface="Vazirmatn"/>
               </a:rPr>
               <a:t>هدف کمی دورتر از خطر؛ احتمال موفقیت بیشتر</a:t>
             </a:r>
@@ -14221,8 +14534,8 @@
                 <a:solidFill>
                   <a:srgbClr val="FFFFFF"/>
                 </a:solidFill>
-                <a:latin typeface="Tahoma"/>
-                <a:cs typeface="Tahoma"/>
+                <a:latin typeface="Vazirmatn"/>
+                <a:cs typeface="Vazirmatn"/>
               </a:rPr>
               <a:t>همیشه به دنبال بهترین ضربه نیستیم؛ به دنبال بهترین تصمیم هستیم.</a:t>
             </a:r>
@@ -14238,7 +14551,7 @@
         <p:spPr>
           <a:xfrm>
             <a:off x="502920" y="6400800"/>
-            <a:ext cx="5486400" cy="320040"/>
+            <a:ext cx="6858000" cy="320040"/>
           </a:xfrm>
           <a:prstGeom prst="rect">
             <a:avLst/>
@@ -14263,14 +14576,24 @@
               </a:spcAft>
             </a:pPr>
             <a:r>
+              <a:rPr sz="1100" b="1" i="0">
+                <a:solidFill>
+                  <a:srgbClr val="1565C0"/>
+                </a:solidFill>
+                <a:latin typeface="Vazirmatn"/>
+                <a:cs typeface="Vazirmatn"/>
+              </a:rPr>
+              <a:t>⛳ Puttclub</a:t>
+            </a:r>
+            <a:r>
               <a:rPr sz="1000" b="0" i="0">
                 <a:solidFill>
                   <a:srgbClr val="5C6B62"/>
                 </a:solidFill>
-                <a:latin typeface="Tahoma"/>
-                <a:cs typeface="Tahoma"/>
-              </a:rPr>
-              <a:t>Golf Academy  ·  Intermediate · Level 2</a:t>
+                <a:latin typeface="Vazirmatn"/>
+                <a:cs typeface="Vazirmatn"/>
+              </a:rPr>
+              <a:t>   ·   Intermediate · Level 2</a:t>
             </a:r>
           </a:p>
         </p:txBody>
@@ -14313,8 +14636,8 @@
                 <a:solidFill>
                   <a:srgbClr val="1565C0"/>
                 </a:solidFill>
-                <a:latin typeface="Tahoma"/>
-                <a:cs typeface="Tahoma"/>
+                <a:latin typeface="Vazirmatn"/>
+                <a:cs typeface="Vazirmatn"/>
               </a:rPr>
               <a:t>20</a:t>
             </a:r>
@@ -14465,8 +14788,8 @@
                 <a:solidFill>
                   <a:srgbClr val="1565C0"/>
                 </a:solidFill>
-                <a:latin typeface="Tahoma"/>
-                <a:cs typeface="Tahoma"/>
+                <a:latin typeface="Vazirmatn"/>
+                <a:cs typeface="Vazirmatn"/>
               </a:rPr>
               <a:t>فصل ۲۰</a:t>
             </a:r>
@@ -14488,8 +14811,8 @@
                 <a:solidFill>
                   <a:srgbClr val="1F2A24"/>
                 </a:solidFill>
-                <a:latin typeface="Tahoma"/>
-                <a:cs typeface="Tahoma"/>
+                <a:latin typeface="Vazirmatn"/>
+                <a:cs typeface="Vazirmatn"/>
               </a:rPr>
               <a:t>Pre-Shot Routine</a:t>
             </a:r>
@@ -14676,8 +14999,8 @@
                 <a:solidFill>
                   <a:srgbClr val="FFFFFF"/>
                 </a:solidFill>
-                <a:latin typeface="Tahoma"/>
-                <a:cs typeface="Tahoma"/>
+                <a:latin typeface="Vazirmatn"/>
+                <a:cs typeface="Vazirmatn"/>
               </a:rPr>
               <a:t>1</a:t>
             </a:r>
@@ -14722,8 +15045,8 @@
                 <a:solidFill>
                   <a:srgbClr val="1F2A24"/>
                 </a:solidFill>
-                <a:latin typeface="Tahoma"/>
-                <a:cs typeface="Tahoma"/>
+                <a:latin typeface="Vazirmatn"/>
+                <a:cs typeface="Vazirmatn"/>
               </a:rPr>
               <a:t>پشت توپ</a:t>
             </a:r>
@@ -14745,8 +15068,8 @@
                 <a:solidFill>
                   <a:srgbClr val="5C6B62"/>
                 </a:solidFill>
-                <a:latin typeface="Tahoma"/>
-                <a:cs typeface="Tahoma"/>
+                <a:latin typeface="Vazirmatn"/>
+                <a:cs typeface="Vazirmatn"/>
               </a:rPr>
               <a:t>بایست</a:t>
             </a:r>
@@ -14889,8 +15212,8 @@
                 <a:solidFill>
                   <a:srgbClr val="FFFFFF"/>
                 </a:solidFill>
-                <a:latin typeface="Tahoma"/>
-                <a:cs typeface="Tahoma"/>
+                <a:latin typeface="Vazirmatn"/>
+                <a:cs typeface="Vazirmatn"/>
               </a:rPr>
               <a:t>2</a:t>
             </a:r>
@@ -14935,8 +15258,8 @@
                 <a:solidFill>
                   <a:srgbClr val="1F2A24"/>
                 </a:solidFill>
-                <a:latin typeface="Tahoma"/>
-                <a:cs typeface="Tahoma"/>
+                <a:latin typeface="Vazirmatn"/>
+                <a:cs typeface="Vazirmatn"/>
               </a:rPr>
               <a:t>هدف</a:t>
             </a:r>
@@ -14958,8 +15281,8 @@
                 <a:solidFill>
                   <a:srgbClr val="5C6B62"/>
                 </a:solidFill>
-                <a:latin typeface="Tahoma"/>
-                <a:cs typeface="Tahoma"/>
+                <a:latin typeface="Vazirmatn"/>
+                <a:cs typeface="Vazirmatn"/>
               </a:rPr>
               <a:t>مشخص کن</a:t>
             </a:r>
@@ -15102,8 +15425,8 @@
                 <a:solidFill>
                   <a:srgbClr val="FFFFFF"/>
                 </a:solidFill>
-                <a:latin typeface="Tahoma"/>
-                <a:cs typeface="Tahoma"/>
+                <a:latin typeface="Vazirmatn"/>
+                <a:cs typeface="Vazirmatn"/>
               </a:rPr>
               <a:t>3</a:t>
             </a:r>
@@ -15148,8 +15471,8 @@
                 <a:solidFill>
                   <a:srgbClr val="1F2A24"/>
                 </a:solidFill>
-                <a:latin typeface="Tahoma"/>
-                <a:cs typeface="Tahoma"/>
+                <a:latin typeface="Vazirmatn"/>
+                <a:cs typeface="Vazirmatn"/>
               </a:rPr>
               <a:t>تصویر ذهنی</a:t>
             </a:r>
@@ -15171,8 +15494,8 @@
                 <a:solidFill>
                   <a:srgbClr val="5C6B62"/>
                 </a:solidFill>
-                <a:latin typeface="Tahoma"/>
-                <a:cs typeface="Tahoma"/>
+                <a:latin typeface="Vazirmatn"/>
+                <a:cs typeface="Vazirmatn"/>
               </a:rPr>
               <a:t>ضربه را ببین</a:t>
             </a:r>
@@ -15315,8 +15638,8 @@
                 <a:solidFill>
                   <a:srgbClr val="FFFFFF"/>
                 </a:solidFill>
-                <a:latin typeface="Tahoma"/>
-                <a:cs typeface="Tahoma"/>
+                <a:latin typeface="Vazirmatn"/>
+                <a:cs typeface="Vazirmatn"/>
               </a:rPr>
               <a:t>4</a:t>
             </a:r>
@@ -15361,8 +15684,8 @@
                 <a:solidFill>
                   <a:srgbClr val="1F2A24"/>
                 </a:solidFill>
-                <a:latin typeface="Tahoma"/>
-                <a:cs typeface="Tahoma"/>
+                <a:latin typeface="Vazirmatn"/>
+                <a:cs typeface="Vazirmatn"/>
               </a:rPr>
               <a:t>کلاب</a:t>
             </a:r>
@@ -15384,8 +15707,8 @@
                 <a:solidFill>
                   <a:srgbClr val="5C6B62"/>
                 </a:solidFill>
-                <a:latin typeface="Tahoma"/>
-                <a:cs typeface="Tahoma"/>
+                <a:latin typeface="Vazirmatn"/>
+                <a:cs typeface="Vazirmatn"/>
               </a:rPr>
               <a:t>انتخاب کن</a:t>
             </a:r>
@@ -15528,8 +15851,8 @@
                 <a:solidFill>
                   <a:srgbClr val="FFFFFF"/>
                 </a:solidFill>
-                <a:latin typeface="Tahoma"/>
-                <a:cs typeface="Tahoma"/>
+                <a:latin typeface="Vazirmatn"/>
+                <a:cs typeface="Vazirmatn"/>
               </a:rPr>
               <a:t>5</a:t>
             </a:r>
@@ -15574,8 +15897,8 @@
                 <a:solidFill>
                   <a:srgbClr val="1F2A24"/>
                 </a:solidFill>
-                <a:latin typeface="Tahoma"/>
-                <a:cs typeface="Tahoma"/>
+                <a:latin typeface="Vazirmatn"/>
+                <a:cs typeface="Vazirmatn"/>
               </a:rPr>
               <a:t>Setup</a:t>
             </a:r>
@@ -15597,8 +15920,8 @@
                 <a:solidFill>
                   <a:srgbClr val="5C6B62"/>
                 </a:solidFill>
-                <a:latin typeface="Tahoma"/>
-                <a:cs typeface="Tahoma"/>
+                <a:latin typeface="Vazirmatn"/>
+                <a:cs typeface="Vazirmatn"/>
               </a:rPr>
               <a:t>آماده شو</a:t>
             </a:r>
@@ -15741,8 +16064,8 @@
                 <a:solidFill>
                   <a:srgbClr val="FFFFFF"/>
                 </a:solidFill>
-                <a:latin typeface="Tahoma"/>
-                <a:cs typeface="Tahoma"/>
+                <a:latin typeface="Vazirmatn"/>
+                <a:cs typeface="Vazirmatn"/>
               </a:rPr>
               <a:t>6</a:t>
             </a:r>
@@ -15787,8 +16110,8 @@
                 <a:solidFill>
                   <a:srgbClr val="1F2A24"/>
                 </a:solidFill>
-                <a:latin typeface="Tahoma"/>
-                <a:cs typeface="Tahoma"/>
+                <a:latin typeface="Vazirmatn"/>
+                <a:cs typeface="Vazirmatn"/>
               </a:rPr>
               <a:t>یک نفس</a:t>
             </a:r>
@@ -15810,8 +16133,8 @@
                 <a:solidFill>
                   <a:srgbClr val="5C6B62"/>
                 </a:solidFill>
-                <a:latin typeface="Tahoma"/>
-                <a:cs typeface="Tahoma"/>
+                <a:latin typeface="Vazirmatn"/>
+                <a:cs typeface="Vazirmatn"/>
               </a:rPr>
               <a:t>آرامش</a:t>
             </a:r>
@@ -15954,8 +16277,8 @@
                 <a:solidFill>
                   <a:srgbClr val="FFFFFF"/>
                 </a:solidFill>
-                <a:latin typeface="Tahoma"/>
-                <a:cs typeface="Tahoma"/>
+                <a:latin typeface="Vazirmatn"/>
+                <a:cs typeface="Vazirmatn"/>
               </a:rPr>
               <a:t>7</a:t>
             </a:r>
@@ -16000,8 +16323,8 @@
                 <a:solidFill>
                   <a:srgbClr val="1F2A24"/>
                 </a:solidFill>
-                <a:latin typeface="Tahoma"/>
-                <a:cs typeface="Tahoma"/>
+                <a:latin typeface="Vazirmatn"/>
+                <a:cs typeface="Vazirmatn"/>
               </a:rPr>
               <a:t>Swing</a:t>
             </a:r>
@@ -16023,8 +16346,8 @@
                 <a:solidFill>
                   <a:srgbClr val="5C6B62"/>
                 </a:solidFill>
-                <a:latin typeface="Tahoma"/>
-                <a:cs typeface="Tahoma"/>
+                <a:latin typeface="Vazirmatn"/>
+                <a:cs typeface="Vazirmatn"/>
               </a:rPr>
               <a:t>اجرا کن</a:t>
             </a:r>
@@ -16159,8 +16482,8 @@
                 <a:solidFill>
                   <a:srgbClr val="1F2A24"/>
                 </a:solidFill>
-                <a:latin typeface="Tahoma"/>
-                <a:cs typeface="Tahoma"/>
+                <a:latin typeface="Vazirmatn"/>
+                <a:cs typeface="Vazirmatn"/>
               </a:rPr>
               <a:t>هدف این است که قبل از هر ضربه وارد یک وضعیت ذهنی ثابت و تکرارشونده شوید.</a:t>
             </a:r>
@@ -16176,7 +16499,7 @@
         <p:spPr>
           <a:xfrm>
             <a:off x="502920" y="6400800"/>
-            <a:ext cx="5486400" cy="320040"/>
+            <a:ext cx="6858000" cy="320040"/>
           </a:xfrm>
           <a:prstGeom prst="rect">
             <a:avLst/>
@@ -16201,14 +16524,24 @@
               </a:spcAft>
             </a:pPr>
             <a:r>
+              <a:rPr sz="1100" b="1" i="0">
+                <a:solidFill>
+                  <a:srgbClr val="1565C0"/>
+                </a:solidFill>
+                <a:latin typeface="Vazirmatn"/>
+                <a:cs typeface="Vazirmatn"/>
+              </a:rPr>
+              <a:t>⛳ Puttclub</a:t>
+            </a:r>
+            <a:r>
               <a:rPr sz="1000" b="0" i="0">
                 <a:solidFill>
                   <a:srgbClr val="5C6B62"/>
                 </a:solidFill>
-                <a:latin typeface="Tahoma"/>
-                <a:cs typeface="Tahoma"/>
-              </a:rPr>
-              <a:t>Golf Academy  ·  Intermediate · Level 2</a:t>
+                <a:latin typeface="Vazirmatn"/>
+                <a:cs typeface="Vazirmatn"/>
+              </a:rPr>
+              <a:t>   ·   Intermediate · Level 2</a:t>
             </a:r>
           </a:p>
         </p:txBody>
@@ -16251,8 +16584,8 @@
                 <a:solidFill>
                   <a:srgbClr val="1565C0"/>
                 </a:solidFill>
-                <a:latin typeface="Tahoma"/>
-                <a:cs typeface="Tahoma"/>
+                <a:latin typeface="Vazirmatn"/>
+                <a:cs typeface="Vazirmatn"/>
               </a:rPr>
               <a:t>21</a:t>
             </a:r>
@@ -16403,8 +16736,8 @@
                 <a:solidFill>
                   <a:srgbClr val="1565C0"/>
                 </a:solidFill>
-                <a:latin typeface="Tahoma"/>
-                <a:cs typeface="Tahoma"/>
+                <a:latin typeface="Vazirmatn"/>
+                <a:cs typeface="Vazirmatn"/>
               </a:rPr>
               <a:t>فصل ۲۱</a:t>
             </a:r>
@@ -16426,8 +16759,8 @@
                 <a:solidFill>
                   <a:srgbClr val="1F2A24"/>
                 </a:solidFill>
-                <a:latin typeface="Tahoma"/>
-                <a:cs typeface="Tahoma"/>
+                <a:latin typeface="Vazirmatn"/>
+                <a:cs typeface="Vazirmatn"/>
               </a:rPr>
               <a:t>Post-Shot Routine</a:t>
             </a:r>
@@ -16516,8 +16849,8 @@
                 <a:solidFill>
                   <a:srgbClr val="1565C0"/>
                 </a:solidFill>
-                <a:latin typeface="Tahoma"/>
-                <a:cs typeface="Tahoma"/>
+                <a:latin typeface="Vazirmatn"/>
+                <a:cs typeface="Vazirmatn"/>
               </a:rPr>
               <a:t>●  </a:t>
             </a:r>
@@ -16526,8 +16859,8 @@
                 <a:solidFill>
                   <a:srgbClr val="1565C0"/>
                 </a:solidFill>
-                <a:latin typeface="Tahoma"/>
-                <a:cs typeface="Tahoma"/>
+                <a:latin typeface="Vazirmatn"/>
+                <a:cs typeface="Vazirmatn"/>
               </a:rPr>
               <a:t>اگر ضربه خوب بود</a:t>
             </a:r>
@@ -16536,8 +16869,8 @@
                 <a:solidFill>
                   <a:srgbClr val="1F2A24"/>
                 </a:solidFill>
-                <a:latin typeface="Tahoma"/>
-                <a:cs typeface="Tahoma"/>
+                <a:latin typeface="Vazirmatn"/>
+                <a:cs typeface="Vazirmatn"/>
               </a:rPr>
               <a:t>  —  ثبت کن ← ادامه بده</a:t>
             </a:r>
@@ -16559,8 +16892,8 @@
                 <a:solidFill>
                   <a:srgbClr val="1565C0"/>
                 </a:solidFill>
-                <a:latin typeface="Tahoma"/>
-                <a:cs typeface="Tahoma"/>
+                <a:latin typeface="Vazirmatn"/>
+                <a:cs typeface="Vazirmatn"/>
               </a:rPr>
               <a:t>●  </a:t>
             </a:r>
@@ -16569,8 +16902,8 @@
                 <a:solidFill>
                   <a:srgbClr val="1565C0"/>
                 </a:solidFill>
-                <a:latin typeface="Tahoma"/>
-                <a:cs typeface="Tahoma"/>
+                <a:latin typeface="Vazirmatn"/>
+                <a:cs typeface="Vazirmatn"/>
               </a:rPr>
               <a:t>اگر ضربه بد بود</a:t>
             </a:r>
@@ -16579,8 +16912,8 @@
                 <a:solidFill>
                   <a:srgbClr val="1F2A24"/>
                 </a:solidFill>
-                <a:latin typeface="Tahoma"/>
-                <a:cs typeface="Tahoma"/>
+                <a:latin typeface="Vazirmatn"/>
+                <a:cs typeface="Vazirmatn"/>
               </a:rPr>
               <a:t>  —  اشتباه را شناسایی کن ← یک نکته یاد بگیر ← رها کن</a:t>
             </a:r>
@@ -16602,8 +16935,8 @@
                 <a:solidFill>
                   <a:srgbClr val="1565C0"/>
                 </a:solidFill>
-                <a:latin typeface="Tahoma"/>
-                <a:cs typeface="Tahoma"/>
+                <a:latin typeface="Vazirmatn"/>
+                <a:cs typeface="Vazirmatn"/>
               </a:rPr>
               <a:t>●  </a:t>
             </a:r>
@@ -16612,8 +16945,8 @@
                 <a:solidFill>
                   <a:srgbClr val="1565C0"/>
                 </a:solidFill>
-                <a:latin typeface="Tahoma"/>
-                <a:cs typeface="Tahoma"/>
+                <a:latin typeface="Vazirmatn"/>
+                <a:cs typeface="Vazirmatn"/>
               </a:rPr>
               <a:t>نمونه نادرست</a:t>
             </a:r>
@@ -16622,8 +16955,8 @@
                 <a:solidFill>
                   <a:srgbClr val="1F2A24"/>
                 </a:solidFill>
-                <a:latin typeface="Tahoma"/>
-                <a:cs typeface="Tahoma"/>
+                <a:latin typeface="Vazirmatn"/>
+                <a:cs typeface="Vazirmatn"/>
               </a:rPr>
               <a:t>  —  «چرا همیشه خراب می‌کنم؟»</a:t>
             </a:r>
@@ -16645,8 +16978,8 @@
                 <a:solidFill>
                   <a:srgbClr val="1565C0"/>
                 </a:solidFill>
-                <a:latin typeface="Tahoma"/>
-                <a:cs typeface="Tahoma"/>
+                <a:latin typeface="Vazirmatn"/>
+                <a:cs typeface="Vazirmatn"/>
               </a:rPr>
               <a:t>●  </a:t>
             </a:r>
@@ -16655,8 +16988,8 @@
                 <a:solidFill>
                   <a:srgbClr val="1565C0"/>
                 </a:solidFill>
-                <a:latin typeface="Tahoma"/>
-                <a:cs typeface="Tahoma"/>
+                <a:latin typeface="Vazirmatn"/>
+                <a:cs typeface="Vazirmatn"/>
               </a:rPr>
               <a:t>نمونه درست</a:t>
             </a:r>
@@ -16665,8 +16998,8 @@
                 <a:solidFill>
                   <a:srgbClr val="1F2A24"/>
                 </a:solidFill>
-                <a:latin typeface="Tahoma"/>
-                <a:cs typeface="Tahoma"/>
+                <a:latin typeface="Vazirmatn"/>
+                <a:cs typeface="Vazirmatn"/>
               </a:rPr>
               <a:t>  —  «Face باز بود؛ ضربه بعدی Alignment را دوباره بررسی می‌کنم.»</a:t>
             </a:r>
@@ -16688,8 +17021,8 @@
                 <a:solidFill>
                   <a:srgbClr val="1565C0"/>
                 </a:solidFill>
-                <a:latin typeface="Tahoma"/>
-                <a:cs typeface="Tahoma"/>
+                <a:latin typeface="Vazirmatn"/>
+                <a:cs typeface="Vazirmatn"/>
               </a:rPr>
               <a:t>●  </a:t>
             </a:r>
@@ -16698,8 +17031,8 @@
                 <a:solidFill>
                   <a:srgbClr val="1F2A24"/>
                 </a:solidFill>
-                <a:latin typeface="Tahoma"/>
-                <a:cs typeface="Tahoma"/>
+                <a:latin typeface="Vazirmatn"/>
+                <a:cs typeface="Vazirmatn"/>
               </a:rPr>
               <a:t>روی ضربه قبلی باقی نمانید؛ وارد ضربه بعدی شوید</a:t>
             </a:r>
@@ -16834,8 +17167,8 @@
                 <a:solidFill>
                   <a:srgbClr val="1565C0"/>
                 </a:solidFill>
-                <a:latin typeface="Tahoma"/>
-                <a:cs typeface="Tahoma"/>
+                <a:latin typeface="Vazirmatn"/>
+                <a:cs typeface="Vazirmatn"/>
               </a:rPr>
               <a:t>💡 </a:t>
             </a:r>
@@ -16844,8 +17177,8 @@
                 <a:solidFill>
                   <a:srgbClr val="1F2A24"/>
                 </a:solidFill>
-                <a:latin typeface="Tahoma"/>
-                <a:cs typeface="Tahoma"/>
+                <a:latin typeface="Vazirmatn"/>
+                <a:cs typeface="Vazirmatn"/>
               </a:rPr>
               <a:t>تحلیل کوتاه و مشخص، سپس رها کردن — کلاسیک‌ترین عادت بازیکنان باهوش.</a:t>
             </a:r>
@@ -16861,7 +17194,7 @@
         <p:spPr>
           <a:xfrm>
             <a:off x="502920" y="6400800"/>
-            <a:ext cx="5486400" cy="320040"/>
+            <a:ext cx="6858000" cy="320040"/>
           </a:xfrm>
           <a:prstGeom prst="rect">
             <a:avLst/>
@@ -16886,14 +17219,24 @@
               </a:spcAft>
             </a:pPr>
             <a:r>
+              <a:rPr sz="1100" b="1" i="0">
+                <a:solidFill>
+                  <a:srgbClr val="1565C0"/>
+                </a:solidFill>
+                <a:latin typeface="Vazirmatn"/>
+                <a:cs typeface="Vazirmatn"/>
+              </a:rPr>
+              <a:t>⛳ Puttclub</a:t>
+            </a:r>
+            <a:r>
               <a:rPr sz="1000" b="0" i="0">
                 <a:solidFill>
                   <a:srgbClr val="5C6B62"/>
                 </a:solidFill>
-                <a:latin typeface="Tahoma"/>
-                <a:cs typeface="Tahoma"/>
-              </a:rPr>
-              <a:t>Golf Academy  ·  Intermediate · Level 2</a:t>
+                <a:latin typeface="Vazirmatn"/>
+                <a:cs typeface="Vazirmatn"/>
+              </a:rPr>
+              <a:t>   ·   Intermediate · Level 2</a:t>
             </a:r>
           </a:p>
         </p:txBody>
@@ -16936,8 +17279,8 @@
                 <a:solidFill>
                   <a:srgbClr val="1565C0"/>
                 </a:solidFill>
-                <a:latin typeface="Tahoma"/>
-                <a:cs typeface="Tahoma"/>
+                <a:latin typeface="Vazirmatn"/>
+                <a:cs typeface="Vazirmatn"/>
               </a:rPr>
               <a:t>22</a:t>
             </a:r>
@@ -17088,8 +17431,8 @@
                 <a:solidFill>
                   <a:srgbClr val="1565C0"/>
                 </a:solidFill>
-                <a:latin typeface="Tahoma"/>
-                <a:cs typeface="Tahoma"/>
+                <a:latin typeface="Vazirmatn"/>
+                <a:cs typeface="Vazirmatn"/>
               </a:rPr>
               <a:t>فصل ۲۲</a:t>
             </a:r>
@@ -17111,8 +17454,8 @@
                 <a:solidFill>
                   <a:srgbClr val="1F2A24"/>
                 </a:solidFill>
-                <a:latin typeface="Tahoma"/>
-                <a:cs typeface="Tahoma"/>
+                <a:latin typeface="Vazirmatn"/>
+                <a:cs typeface="Vazirmatn"/>
               </a:rPr>
               <a:t>ثبت اطلاعات در بازی آموزشی</a:t>
             </a:r>
@@ -17199,8 +17542,8 @@
                           <a:solidFill>
                             <a:srgbClr val="FFFFFF"/>
                           </a:solidFill>
-                          <a:latin typeface="Tahoma"/>
-                          <a:cs typeface="Tahoma"/>
+                          <a:latin typeface="Vazirmatn"/>
+                          <a:cs typeface="Vazirmatn"/>
                         </a:rPr>
                         <a:t>مورد ثبت</a:t>
                       </a:r>
@@ -17223,8 +17566,8 @@
                           <a:solidFill>
                             <a:srgbClr val="FFFFFF"/>
                           </a:solidFill>
-                          <a:latin typeface="Tahoma"/>
-                          <a:cs typeface="Tahoma"/>
+                          <a:latin typeface="Vazirmatn"/>
+                          <a:cs typeface="Vazirmatn"/>
                         </a:rPr>
                         <a:t>توضیح</a:t>
                       </a:r>
@@ -17247,8 +17590,8 @@
                           <a:solidFill>
                             <a:srgbClr val="FFFFFF"/>
                           </a:solidFill>
-                          <a:latin typeface="Tahoma"/>
-                          <a:cs typeface="Tahoma"/>
+                          <a:latin typeface="Vazirmatn"/>
+                          <a:cs typeface="Vazirmatn"/>
                         </a:rPr>
                         <a:t>مورد ثبت</a:t>
                       </a:r>
@@ -17271,8 +17614,8 @@
                           <a:solidFill>
                             <a:srgbClr val="FFFFFF"/>
                           </a:solidFill>
-                          <a:latin typeface="Tahoma"/>
-                          <a:cs typeface="Tahoma"/>
+                          <a:latin typeface="Vazirmatn"/>
+                          <a:cs typeface="Vazirmatn"/>
                         </a:rPr>
                         <a:t>توضیح</a:t>
                       </a:r>
@@ -17297,8 +17640,8 @@
                           <a:solidFill>
                             <a:srgbClr val="1565C0"/>
                           </a:solidFill>
-                          <a:latin typeface="Tahoma"/>
-                          <a:cs typeface="Tahoma"/>
+                          <a:latin typeface="Vazirmatn"/>
+                          <a:cs typeface="Vazirmatn"/>
                         </a:rPr>
                         <a:t>کلاب انتخابی</a:t>
                       </a:r>
@@ -17321,8 +17664,8 @@
                           <a:solidFill>
                             <a:srgbClr val="1F2A24"/>
                           </a:solidFill>
-                          <a:latin typeface="Tahoma"/>
-                          <a:cs typeface="Tahoma"/>
+                          <a:latin typeface="Vazirmatn"/>
+                          <a:cs typeface="Vazirmatn"/>
                         </a:rPr>
                         <a:t>کدام کلاب؟</a:t>
                       </a:r>
@@ -17345,8 +17688,8 @@
                           <a:solidFill>
                             <a:srgbClr val="1F2A24"/>
                           </a:solidFill>
-                          <a:latin typeface="Tahoma"/>
-                          <a:cs typeface="Tahoma"/>
+                          <a:latin typeface="Vazirmatn"/>
+                          <a:cs typeface="Vazirmatn"/>
                         </a:rPr>
                         <a:t>تعداد Stroke</a:t>
                       </a:r>
@@ -17369,8 +17712,8 @@
                           <a:solidFill>
                             <a:srgbClr val="1F2A24"/>
                           </a:solidFill>
-                          <a:latin typeface="Tahoma"/>
-                          <a:cs typeface="Tahoma"/>
+                          <a:latin typeface="Vazirmatn"/>
+                          <a:cs typeface="Vazirmatn"/>
                         </a:rPr>
                         <a:t>چند ضربه؟</a:t>
                       </a:r>
@@ -17395,8 +17738,8 @@
                           <a:solidFill>
                             <a:srgbClr val="1565C0"/>
                           </a:solidFill>
-                          <a:latin typeface="Tahoma"/>
-                          <a:cs typeface="Tahoma"/>
+                          <a:latin typeface="Vazirmatn"/>
+                          <a:cs typeface="Vazirmatn"/>
                         </a:rPr>
                         <a:t>هدف</a:t>
                       </a:r>
@@ -17419,8 +17762,8 @@
                           <a:solidFill>
                             <a:srgbClr val="1F2A24"/>
                           </a:solidFill>
-                          <a:latin typeface="Tahoma"/>
-                          <a:cs typeface="Tahoma"/>
+                          <a:latin typeface="Vazirmatn"/>
+                          <a:cs typeface="Vazirmatn"/>
                         </a:rPr>
                         <a:t>Target کجا بود؟</a:t>
                       </a:r>
@@ -17443,8 +17786,8 @@
                           <a:solidFill>
                             <a:srgbClr val="1F2A24"/>
                           </a:solidFill>
-                          <a:latin typeface="Tahoma"/>
-                          <a:cs typeface="Tahoma"/>
+                          <a:latin typeface="Vazirmatn"/>
+                          <a:cs typeface="Vazirmatn"/>
                         </a:rPr>
                         <a:t>اشتباه</a:t>
                       </a:r>
@@ -17467,8 +17810,8 @@
                           <a:solidFill>
                             <a:srgbClr val="1F2A24"/>
                           </a:solidFill>
-                          <a:latin typeface="Tahoma"/>
-                          <a:cs typeface="Tahoma"/>
+                          <a:latin typeface="Vazirmatn"/>
+                          <a:cs typeface="Vazirmatn"/>
                         </a:rPr>
                         <a:t>خطا چه بود؟</a:t>
                       </a:r>
@@ -17493,8 +17836,8 @@
                           <a:solidFill>
                             <a:srgbClr val="1565C0"/>
                           </a:solidFill>
-                          <a:latin typeface="Tahoma"/>
-                          <a:cs typeface="Tahoma"/>
+                          <a:latin typeface="Vazirmatn"/>
+                          <a:cs typeface="Vazirmatn"/>
                         </a:rPr>
                         <a:t>نتیجه ضربه</a:t>
                       </a:r>
@@ -17517,8 +17860,8 @@
                           <a:solidFill>
                             <a:srgbClr val="1F2A24"/>
                           </a:solidFill>
-                          <a:latin typeface="Tahoma"/>
-                          <a:cs typeface="Tahoma"/>
+                          <a:latin typeface="Vazirmatn"/>
+                          <a:cs typeface="Vazirmatn"/>
                         </a:rPr>
                         <a:t>نتیجه واقعی</a:t>
                       </a:r>
@@ -17541,8 +17884,8 @@
                           <a:solidFill>
                             <a:srgbClr val="1F2A24"/>
                           </a:solidFill>
-                          <a:latin typeface="Tahoma"/>
-                          <a:cs typeface="Tahoma"/>
+                          <a:latin typeface="Vazirmatn"/>
+                          <a:cs typeface="Vazirmatn"/>
                         </a:rPr>
                         <a:t>تصمیم</a:t>
                       </a:r>
@@ -17565,8 +17908,8 @@
                           <a:solidFill>
                             <a:srgbClr val="1F2A24"/>
                           </a:solidFill>
-                          <a:latin typeface="Tahoma"/>
-                          <a:cs typeface="Tahoma"/>
+                          <a:latin typeface="Vazirmatn"/>
+                          <a:cs typeface="Vazirmatn"/>
                         </a:rPr>
                         <a:t>درست یا غلط؟</a:t>
                       </a:r>
@@ -17621,8 +17964,8 @@
                 <a:solidFill>
                   <a:srgbClr val="1565C0"/>
                 </a:solidFill>
-                <a:latin typeface="Tahoma"/>
-                <a:cs typeface="Tahoma"/>
+                <a:latin typeface="Vazirmatn"/>
+                <a:cs typeface="Vazirmatn"/>
               </a:rPr>
               <a:t>●  </a:t>
             </a:r>
@@ -17631,8 +17974,8 @@
                 <a:solidFill>
                   <a:srgbClr val="5C6B62"/>
                 </a:solidFill>
-                <a:latin typeface="Tahoma"/>
-                <a:cs typeface="Tahoma"/>
+                <a:latin typeface="Vazirmatn"/>
+                <a:cs typeface="Vazirmatn"/>
               </a:rPr>
               <a:t>ثبت این موارد تمرین را از حالت صرفاً تکنیکی خارج و به بازی واقعی نزدیک می‌کند.</a:t>
             </a:r>
@@ -17648,7 +17991,7 @@
         <p:spPr>
           <a:xfrm>
             <a:off x="502920" y="6400800"/>
-            <a:ext cx="5486400" cy="320040"/>
+            <a:ext cx="6858000" cy="320040"/>
           </a:xfrm>
           <a:prstGeom prst="rect">
             <a:avLst/>
@@ -17673,14 +18016,24 @@
               </a:spcAft>
             </a:pPr>
             <a:r>
+              <a:rPr sz="1100" b="1" i="0">
+                <a:solidFill>
+                  <a:srgbClr val="1565C0"/>
+                </a:solidFill>
+                <a:latin typeface="Vazirmatn"/>
+                <a:cs typeface="Vazirmatn"/>
+              </a:rPr>
+              <a:t>⛳ Puttclub</a:t>
+            </a:r>
+            <a:r>
               <a:rPr sz="1000" b="0" i="0">
                 <a:solidFill>
                   <a:srgbClr val="5C6B62"/>
                 </a:solidFill>
-                <a:latin typeface="Tahoma"/>
-                <a:cs typeface="Tahoma"/>
-              </a:rPr>
-              <a:t>Golf Academy  ·  Intermediate · Level 2</a:t>
+                <a:latin typeface="Vazirmatn"/>
+                <a:cs typeface="Vazirmatn"/>
+              </a:rPr>
+              <a:t>   ·   Intermediate · Level 2</a:t>
             </a:r>
           </a:p>
         </p:txBody>
@@ -17723,8 +18076,8 @@
                 <a:solidFill>
                   <a:srgbClr val="1565C0"/>
                 </a:solidFill>
-                <a:latin typeface="Tahoma"/>
-                <a:cs typeface="Tahoma"/>
+                <a:latin typeface="Vazirmatn"/>
+                <a:cs typeface="Vazirmatn"/>
               </a:rPr>
               <a:t>23</a:t>
             </a:r>
@@ -17901,8 +18254,8 @@
                 <a:solidFill>
                   <a:srgbClr val="FFFFFF"/>
                 </a:solidFill>
-                <a:latin typeface="Tahoma"/>
-                <a:cs typeface="Tahoma"/>
+                <a:latin typeface="Vazirmatn"/>
+                <a:cs typeface="Vazirmatn"/>
               </a:rPr>
               <a:t>ثبت و تحلیل Score بعد از راند</a:t>
             </a:r>
@@ -17991,8 +18344,8 @@
                 <a:solidFill>
                   <a:srgbClr val="1565C0"/>
                 </a:solidFill>
-                <a:latin typeface="Tahoma"/>
-                <a:cs typeface="Tahoma"/>
+                <a:latin typeface="Vazirmatn"/>
+                <a:cs typeface="Vazirmatn"/>
               </a:rPr>
               <a:t>فصل ۲۳</a:t>
             </a:r>
@@ -18014,8 +18367,8 @@
                 <a:solidFill>
                   <a:srgbClr val="1F2A24"/>
                 </a:solidFill>
-                <a:latin typeface="Tahoma"/>
-                <a:cs typeface="Tahoma"/>
+                <a:latin typeface="Vazirmatn"/>
+                <a:cs typeface="Vazirmatn"/>
               </a:rPr>
               <a:t>تحلیل بعد از بازی</a:t>
             </a:r>
@@ -18104,8 +18457,8 @@
                 <a:solidFill>
                   <a:srgbClr val="1565C0"/>
                 </a:solidFill>
-                <a:latin typeface="Tahoma"/>
-                <a:cs typeface="Tahoma"/>
+                <a:latin typeface="Vazirmatn"/>
+                <a:cs typeface="Vazirmatn"/>
               </a:rPr>
               <a:t>●  </a:t>
             </a:r>
@@ -18114,8 +18467,8 @@
                 <a:solidFill>
                   <a:srgbClr val="1F2A24"/>
                 </a:solidFill>
-                <a:latin typeface="Tahoma"/>
-                <a:cs typeface="Tahoma"/>
+                <a:latin typeface="Vazirmatn"/>
+                <a:cs typeface="Vazirmatn"/>
               </a:rPr>
               <a:t>بیشترین خطای من چه بود؟</a:t>
             </a:r>
@@ -18137,8 +18490,8 @@
                 <a:solidFill>
                   <a:srgbClr val="1565C0"/>
                 </a:solidFill>
-                <a:latin typeface="Tahoma"/>
-                <a:cs typeface="Tahoma"/>
+                <a:latin typeface="Vazirmatn"/>
+                <a:cs typeface="Vazirmatn"/>
               </a:rPr>
               <a:t>●  </a:t>
             </a:r>
@@ -18147,8 +18500,8 @@
                 <a:solidFill>
                   <a:srgbClr val="1F2A24"/>
                 </a:solidFill>
-                <a:latin typeface="Tahoma"/>
-                <a:cs typeface="Tahoma"/>
+                <a:latin typeface="Vazirmatn"/>
+                <a:cs typeface="Vazirmatn"/>
               </a:rPr>
               <a:t>کدام کلاب بهترین عملکرد را داشت؟</a:t>
             </a:r>
@@ -18170,8 +18523,8 @@
                 <a:solidFill>
                   <a:srgbClr val="1565C0"/>
                 </a:solidFill>
-                <a:latin typeface="Tahoma"/>
-                <a:cs typeface="Tahoma"/>
+                <a:latin typeface="Vazirmatn"/>
+                <a:cs typeface="Vazirmatn"/>
               </a:rPr>
               <a:t>●  </a:t>
             </a:r>
@@ -18180,8 +18533,8 @@
                 <a:solidFill>
                   <a:srgbClr val="1F2A24"/>
                 </a:solidFill>
-                <a:latin typeface="Tahoma"/>
-                <a:cs typeface="Tahoma"/>
+                <a:latin typeface="Vazirmatn"/>
+                <a:cs typeface="Vazirmatn"/>
               </a:rPr>
               <a:t>بیشترین ضربه را کجا از دست دادم؟</a:t>
             </a:r>
@@ -18203,8 +18556,8 @@
                 <a:solidFill>
                   <a:srgbClr val="1565C0"/>
                 </a:solidFill>
-                <a:latin typeface="Tahoma"/>
-                <a:cs typeface="Tahoma"/>
+                <a:latin typeface="Vazirmatn"/>
+                <a:cs typeface="Vazirmatn"/>
               </a:rPr>
               <a:t>●  </a:t>
             </a:r>
@@ -18213,8 +18566,8 @@
                 <a:solidFill>
                   <a:srgbClr val="1F2A24"/>
                 </a:solidFill>
-                <a:latin typeface="Tahoma"/>
-                <a:cs typeface="Tahoma"/>
+                <a:latin typeface="Vazirmatn"/>
+                <a:cs typeface="Vazirmatn"/>
               </a:rPr>
               <a:t>Short Game و Putting من چگونه بود؟</a:t>
             </a:r>
@@ -18236,8 +18589,8 @@
                 <a:solidFill>
                   <a:srgbClr val="1565C0"/>
                 </a:solidFill>
-                <a:latin typeface="Tahoma"/>
-                <a:cs typeface="Tahoma"/>
+                <a:latin typeface="Vazirmatn"/>
+                <a:cs typeface="Vazirmatn"/>
               </a:rPr>
               <a:t>●  </a:t>
             </a:r>
@@ -18246,8 +18599,8 @@
                 <a:solidFill>
                   <a:srgbClr val="1F2A24"/>
                 </a:solidFill>
-                <a:latin typeface="Tahoma"/>
-                <a:cs typeface="Tahoma"/>
+                <a:latin typeface="Vazirmatn"/>
+                <a:cs typeface="Vazirmatn"/>
               </a:rPr>
               <a:t>آیا تصمیم‌های درستی گرفتم؟</a:t>
             </a:r>
@@ -18269,8 +18622,8 @@
                 <a:solidFill>
                   <a:srgbClr val="1565C0"/>
                 </a:solidFill>
-                <a:latin typeface="Tahoma"/>
-                <a:cs typeface="Tahoma"/>
+                <a:latin typeface="Vazirmatn"/>
+                <a:cs typeface="Vazirmatn"/>
               </a:rPr>
               <a:t>●  </a:t>
             </a:r>
@@ -18279,8 +18632,8 @@
                 <a:solidFill>
                   <a:srgbClr val="1F2A24"/>
                 </a:solidFill>
-                <a:latin typeface="Tahoma"/>
-                <a:cs typeface="Tahoma"/>
+                <a:latin typeface="Vazirmatn"/>
+                <a:cs typeface="Vazirmatn"/>
               </a:rPr>
               <a:t>در کدام قسمت باید بیشتر تمرین کنم؟</a:t>
             </a:r>
@@ -18415,8 +18768,8 @@
                 <a:solidFill>
                   <a:srgbClr val="1565C0"/>
                 </a:solidFill>
-                <a:latin typeface="Tahoma"/>
-                <a:cs typeface="Tahoma"/>
+                <a:latin typeface="Vazirmatn"/>
+                <a:cs typeface="Vazirmatn"/>
               </a:rPr>
               <a:t>نکته مربی:  </a:t>
             </a:r>
@@ -18425,8 +18778,8 @@
                 <a:solidFill>
                   <a:srgbClr val="1F2A24"/>
                 </a:solidFill>
-                <a:latin typeface="Tahoma"/>
-                <a:cs typeface="Tahoma"/>
+                <a:latin typeface="Vazirmatn"/>
+                <a:cs typeface="Vazirmatn"/>
               </a:rPr>
               <a:t>بعد از هر بازی فقط یک یا دو هدف مشخص برای تمرین بعدی انتخاب کنید.</a:t>
             </a:r>
@@ -18442,7 +18795,7 @@
         <p:spPr>
           <a:xfrm>
             <a:off x="502920" y="6400800"/>
-            <a:ext cx="5486400" cy="320040"/>
+            <a:ext cx="6858000" cy="320040"/>
           </a:xfrm>
           <a:prstGeom prst="rect">
             <a:avLst/>
@@ -18467,14 +18820,24 @@
               </a:spcAft>
             </a:pPr>
             <a:r>
+              <a:rPr sz="1100" b="1" i="0">
+                <a:solidFill>
+                  <a:srgbClr val="1565C0"/>
+                </a:solidFill>
+                <a:latin typeface="Vazirmatn"/>
+                <a:cs typeface="Vazirmatn"/>
+              </a:rPr>
+              <a:t>⛳ Puttclub</a:t>
+            </a:r>
+            <a:r>
               <a:rPr sz="1000" b="0" i="0">
                 <a:solidFill>
                   <a:srgbClr val="5C6B62"/>
                 </a:solidFill>
-                <a:latin typeface="Tahoma"/>
-                <a:cs typeface="Tahoma"/>
-              </a:rPr>
-              <a:t>Golf Academy  ·  Intermediate · Level 2</a:t>
+                <a:latin typeface="Vazirmatn"/>
+                <a:cs typeface="Vazirmatn"/>
+              </a:rPr>
+              <a:t>   ·   Intermediate · Level 2</a:t>
             </a:r>
           </a:p>
         </p:txBody>
@@ -18517,8 +18880,8 @@
                 <a:solidFill>
                   <a:srgbClr val="1565C0"/>
                 </a:solidFill>
-                <a:latin typeface="Tahoma"/>
-                <a:cs typeface="Tahoma"/>
+                <a:latin typeface="Vazirmatn"/>
+                <a:cs typeface="Vazirmatn"/>
               </a:rPr>
               <a:t>24</a:t>
             </a:r>
@@ -18669,8 +19032,8 @@
                 <a:solidFill>
                   <a:srgbClr val="1565C0"/>
                 </a:solidFill>
-                <a:latin typeface="Tahoma"/>
-                <a:cs typeface="Tahoma"/>
+                <a:latin typeface="Vazirmatn"/>
+                <a:cs typeface="Vazirmatn"/>
               </a:rPr>
               <a:t>فصل ۲۴</a:t>
             </a:r>
@@ -18692,8 +19055,8 @@
                 <a:solidFill>
                   <a:srgbClr val="1F2A24"/>
                 </a:solidFill>
-                <a:latin typeface="Tahoma"/>
-                <a:cs typeface="Tahoma"/>
+                <a:latin typeface="Vazirmatn"/>
+                <a:cs typeface="Vazirmatn"/>
               </a:rPr>
               <a:t>برنامه عملی ۱۲ جلسه‌ای</a:t>
             </a:r>
@@ -18780,8 +19143,8 @@
                           <a:solidFill>
                             <a:srgbClr val="FFFFFF"/>
                           </a:solidFill>
-                          <a:latin typeface="Tahoma"/>
-                          <a:cs typeface="Tahoma"/>
+                          <a:latin typeface="Vazirmatn"/>
+                          <a:cs typeface="Vazirmatn"/>
                         </a:rPr>
                         <a:t>جلسه</a:t>
                       </a:r>
@@ -18804,8 +19167,8 @@
                           <a:solidFill>
                             <a:srgbClr val="FFFFFF"/>
                           </a:solidFill>
-                          <a:latin typeface="Tahoma"/>
-                          <a:cs typeface="Tahoma"/>
+                          <a:latin typeface="Vazirmatn"/>
+                          <a:cs typeface="Vazirmatn"/>
                         </a:rPr>
                         <a:t>موضوع</a:t>
                       </a:r>
@@ -18828,8 +19191,8 @@
                           <a:solidFill>
                             <a:srgbClr val="FFFFFF"/>
                           </a:solidFill>
-                          <a:latin typeface="Tahoma"/>
-                          <a:cs typeface="Tahoma"/>
+                          <a:latin typeface="Vazirmatn"/>
+                          <a:cs typeface="Vazirmatn"/>
                         </a:rPr>
                         <a:t>جلسه</a:t>
                       </a:r>
@@ -18852,8 +19215,8 @@
                           <a:solidFill>
                             <a:srgbClr val="FFFFFF"/>
                           </a:solidFill>
-                          <a:latin typeface="Tahoma"/>
-                          <a:cs typeface="Tahoma"/>
+                          <a:latin typeface="Vazirmatn"/>
+                          <a:cs typeface="Vazirmatn"/>
                         </a:rPr>
                         <a:t>موضوع</a:t>
                       </a:r>
@@ -18878,8 +19241,8 @@
                           <a:solidFill>
                             <a:srgbClr val="1565C0"/>
                           </a:solidFill>
-                          <a:latin typeface="Tahoma"/>
-                          <a:cs typeface="Tahoma"/>
+                          <a:latin typeface="Vazirmatn"/>
+                          <a:cs typeface="Vazirmatn"/>
                         </a:rPr>
                         <a:t>۱</a:t>
                       </a:r>
@@ -18902,8 +19265,8 @@
                           <a:solidFill>
                             <a:srgbClr val="1F2A24"/>
                           </a:solidFill>
-                          <a:latin typeface="Tahoma"/>
-                          <a:cs typeface="Tahoma"/>
+                          <a:latin typeface="Vazirmatn"/>
+                          <a:cs typeface="Vazirmatn"/>
                         </a:rPr>
                         <a:t>مرور Setup + Grip + Alignment + Balance</a:t>
                       </a:r>
@@ -18926,8 +19289,8 @@
                           <a:solidFill>
                             <a:srgbClr val="1F2A24"/>
                           </a:solidFill>
-                          <a:latin typeface="Tahoma"/>
-                          <a:cs typeface="Tahoma"/>
+                          <a:latin typeface="Vazirmatn"/>
+                          <a:cs typeface="Vazirmatn"/>
                         </a:rPr>
                         <a:t>۷</a:t>
                       </a:r>
@@ -18950,8 +19313,8 @@
                           <a:solidFill>
                             <a:srgbClr val="1F2A24"/>
                           </a:solidFill>
-                          <a:latin typeface="Tahoma"/>
-                          <a:cs typeface="Tahoma"/>
+                          <a:latin typeface="Vazirmatn"/>
+                          <a:cs typeface="Vazirmatn"/>
                         </a:rPr>
                         <a:t>Chipping</a:t>
                       </a:r>
@@ -18976,8 +19339,8 @@
                           <a:solidFill>
                             <a:srgbClr val="1565C0"/>
                           </a:solidFill>
-                          <a:latin typeface="Tahoma"/>
-                          <a:cs typeface="Tahoma"/>
+                          <a:latin typeface="Vazirmatn"/>
+                          <a:cs typeface="Vazirmatn"/>
                         </a:rPr>
                         <a:t>۲</a:t>
                       </a:r>
@@ -19000,8 +19363,8 @@
                           <a:solidFill>
                             <a:srgbClr val="1F2A24"/>
                           </a:solidFill>
-                          <a:latin typeface="Tahoma"/>
-                          <a:cs typeface="Tahoma"/>
+                          <a:latin typeface="Vazirmatn"/>
+                          <a:cs typeface="Vazirmatn"/>
                         </a:rPr>
                         <a:t>Swing و Tempo</a:t>
                       </a:r>
@@ -19024,8 +19387,8 @@
                           <a:solidFill>
                             <a:srgbClr val="1F2A24"/>
                           </a:solidFill>
-                          <a:latin typeface="Tahoma"/>
-                          <a:cs typeface="Tahoma"/>
+                          <a:latin typeface="Vazirmatn"/>
+                          <a:cs typeface="Vazirmatn"/>
                         </a:rPr>
                         <a:t>۸</a:t>
                       </a:r>
@@ -19048,8 +19411,8 @@
                           <a:solidFill>
                             <a:srgbClr val="1F2A24"/>
                           </a:solidFill>
-                          <a:latin typeface="Tahoma"/>
-                          <a:cs typeface="Tahoma"/>
+                          <a:latin typeface="Vazirmatn"/>
+                          <a:cs typeface="Vazirmatn"/>
                         </a:rPr>
                         <a:t>Putting + Green Reading</a:t>
                       </a:r>
@@ -19074,8 +19437,8 @@
                           <a:solidFill>
                             <a:srgbClr val="1565C0"/>
                           </a:solidFill>
-                          <a:latin typeface="Tahoma"/>
-                          <a:cs typeface="Tahoma"/>
+                          <a:latin typeface="Vazirmatn"/>
+                          <a:cs typeface="Vazirmatn"/>
                         </a:rPr>
                         <a:t>۳</a:t>
                       </a:r>
@@ -19098,8 +19461,8 @@
                           <a:solidFill>
                             <a:srgbClr val="1F2A24"/>
                           </a:solidFill>
-                          <a:latin typeface="Tahoma"/>
-                          <a:cs typeface="Tahoma"/>
+                          <a:latin typeface="Vazirmatn"/>
+                          <a:cs typeface="Vazirmatn"/>
                         </a:rPr>
                         <a:t>Iron و Contact</a:t>
                       </a:r>
@@ -19122,8 +19485,8 @@
                           <a:solidFill>
                             <a:srgbClr val="1F2A24"/>
                           </a:solidFill>
-                          <a:latin typeface="Tahoma"/>
-                          <a:cs typeface="Tahoma"/>
+                          <a:latin typeface="Vazirmatn"/>
+                          <a:cs typeface="Vazirmatn"/>
                         </a:rPr>
                         <a:t>۹</a:t>
                       </a:r>
@@ -19146,8 +19509,8 @@
                           <a:solidFill>
                             <a:srgbClr val="1F2A24"/>
                           </a:solidFill>
-                          <a:latin typeface="Tahoma"/>
-                          <a:cs typeface="Tahoma"/>
+                          <a:latin typeface="Vazirmatn"/>
+                          <a:cs typeface="Vazirmatn"/>
                         </a:rPr>
                         <a:t>Course Management + Routine</a:t>
                       </a:r>
@@ -19172,8 +19535,8 @@
                           <a:solidFill>
                             <a:srgbClr val="1565C0"/>
                           </a:solidFill>
-                          <a:latin typeface="Tahoma"/>
-                          <a:cs typeface="Tahoma"/>
+                          <a:latin typeface="Vazirmatn"/>
+                          <a:cs typeface="Vazirmatn"/>
                         </a:rPr>
                         <a:t>۴</a:t>
                       </a:r>
@@ -19196,8 +19559,8 @@
                           <a:solidFill>
                             <a:srgbClr val="1F2A24"/>
                           </a:solidFill>
-                          <a:latin typeface="Tahoma"/>
-                          <a:cs typeface="Tahoma"/>
+                          <a:latin typeface="Vazirmatn"/>
+                          <a:cs typeface="Vazirmatn"/>
                         </a:rPr>
                         <a:t>Iron Distance Control</a:t>
                       </a:r>
@@ -19220,8 +19583,8 @@
                           <a:solidFill>
                             <a:srgbClr val="1F2A24"/>
                           </a:solidFill>
-                          <a:latin typeface="Tahoma"/>
-                          <a:cs typeface="Tahoma"/>
+                          <a:latin typeface="Vazirmatn"/>
+                          <a:cs typeface="Vazirmatn"/>
                         </a:rPr>
                         <a:t>۱۰</a:t>
                       </a:r>
@@ -19244,8 +19607,8 @@
                           <a:solidFill>
                             <a:srgbClr val="1F2A24"/>
                           </a:solidFill>
-                          <a:latin typeface="Tahoma"/>
-                          <a:cs typeface="Tahoma"/>
+                          <a:latin typeface="Vazirmatn"/>
+                          <a:cs typeface="Vazirmatn"/>
                         </a:rPr>
                         <a:t>بازی آموزشی + Score</a:t>
                       </a:r>
@@ -19270,8 +19633,8 @@
                           <a:solidFill>
                             <a:srgbClr val="1565C0"/>
                           </a:solidFill>
-                          <a:latin typeface="Tahoma"/>
-                          <a:cs typeface="Tahoma"/>
+                          <a:latin typeface="Vazirmatn"/>
+                          <a:cs typeface="Vazirmatn"/>
                         </a:rPr>
                         <a:t>۵</a:t>
                       </a:r>
@@ -19294,8 +19657,8 @@
                           <a:solidFill>
                             <a:srgbClr val="1F2A24"/>
                           </a:solidFill>
-                          <a:latin typeface="Tahoma"/>
-                          <a:cs typeface="Tahoma"/>
+                          <a:latin typeface="Vazirmatn"/>
+                          <a:cs typeface="Vazirmatn"/>
                         </a:rPr>
                         <a:t>Wood و Driver</a:t>
                       </a:r>
@@ -19318,8 +19681,8 @@
                           <a:solidFill>
                             <a:srgbClr val="1F2A24"/>
                           </a:solidFill>
-                          <a:latin typeface="Tahoma"/>
-                          <a:cs typeface="Tahoma"/>
+                          <a:latin typeface="Vazirmatn"/>
+                          <a:cs typeface="Vazirmatn"/>
                         </a:rPr>
                         <a:t>۱۱</a:t>
                       </a:r>
@@ -19342,8 +19705,8 @@
                           <a:solidFill>
                             <a:srgbClr val="1F2A24"/>
                           </a:solidFill>
-                          <a:latin typeface="Tahoma"/>
-                          <a:cs typeface="Tahoma"/>
+                          <a:latin typeface="Vazirmatn"/>
+                          <a:cs typeface="Vazirmatn"/>
                         </a:rPr>
                         <a:t>تحلیل عملکرد</a:t>
                       </a:r>
@@ -19368,8 +19731,8 @@
                           <a:solidFill>
                             <a:srgbClr val="1565C0"/>
                           </a:solidFill>
-                          <a:latin typeface="Tahoma"/>
-                          <a:cs typeface="Tahoma"/>
+                          <a:latin typeface="Vazirmatn"/>
+                          <a:cs typeface="Vazirmatn"/>
                         </a:rPr>
                         <a:t>۶</a:t>
                       </a:r>
@@ -19392,8 +19755,8 @@
                           <a:solidFill>
                             <a:srgbClr val="1F2A24"/>
                           </a:solidFill>
-                          <a:latin typeface="Tahoma"/>
-                          <a:cs typeface="Tahoma"/>
+                          <a:latin typeface="Vazirmatn"/>
+                          <a:cs typeface="Vazirmatn"/>
                         </a:rPr>
                         <a:t>Pitching</a:t>
                       </a:r>
@@ -19416,8 +19779,8 @@
                           <a:solidFill>
                             <a:srgbClr val="1F2A24"/>
                           </a:solidFill>
-                          <a:latin typeface="Tahoma"/>
-                          <a:cs typeface="Tahoma"/>
+                          <a:latin typeface="Vazirmatn"/>
+                          <a:cs typeface="Vazirmatn"/>
                         </a:rPr>
                         <a:t>۱۲</a:t>
                       </a:r>
@@ -19440,8 +19803,8 @@
                           <a:solidFill>
                             <a:srgbClr val="1F2A24"/>
                           </a:solidFill>
-                          <a:latin typeface="Tahoma"/>
-                          <a:cs typeface="Tahoma"/>
+                          <a:latin typeface="Vazirmatn"/>
+                          <a:cs typeface="Vazirmatn"/>
                         </a:rPr>
                         <a:t>آزمون نهایی</a:t>
                       </a:r>
@@ -19496,8 +19859,8 @@
                 <a:solidFill>
                   <a:srgbClr val="1565C0"/>
                 </a:solidFill>
-                <a:latin typeface="Tahoma"/>
-                <a:cs typeface="Tahoma"/>
+                <a:latin typeface="Vazirmatn"/>
+                <a:cs typeface="Vazirmatn"/>
               </a:rPr>
               <a:t>●  </a:t>
             </a:r>
@@ -19506,8 +19869,8 @@
                 <a:solidFill>
                   <a:srgbClr val="5C6B62"/>
                 </a:solidFill>
-                <a:latin typeface="Tahoma"/>
-                <a:cs typeface="Tahoma"/>
+                <a:latin typeface="Vazirmatn"/>
+                <a:cs typeface="Vazirmatn"/>
               </a:rPr>
               <a:t>هر جلسه ترکیبی از تکنیک، تمرین هدفمند و سناریوی واقعی است.</a:t>
             </a:r>
@@ -19523,7 +19886,7 @@
         <p:spPr>
           <a:xfrm>
             <a:off x="502920" y="6400800"/>
-            <a:ext cx="5486400" cy="320040"/>
+            <a:ext cx="6858000" cy="320040"/>
           </a:xfrm>
           <a:prstGeom prst="rect">
             <a:avLst/>
@@ -19548,14 +19911,24 @@
               </a:spcAft>
             </a:pPr>
             <a:r>
+              <a:rPr sz="1100" b="1" i="0">
+                <a:solidFill>
+                  <a:srgbClr val="1565C0"/>
+                </a:solidFill>
+                <a:latin typeface="Vazirmatn"/>
+                <a:cs typeface="Vazirmatn"/>
+              </a:rPr>
+              <a:t>⛳ Puttclub</a:t>
+            </a:r>
+            <a:r>
               <a:rPr sz="1000" b="0" i="0">
                 <a:solidFill>
                   <a:srgbClr val="5C6B62"/>
                 </a:solidFill>
-                <a:latin typeface="Tahoma"/>
-                <a:cs typeface="Tahoma"/>
-              </a:rPr>
-              <a:t>Golf Academy  ·  Intermediate · Level 2</a:t>
+                <a:latin typeface="Vazirmatn"/>
+                <a:cs typeface="Vazirmatn"/>
+              </a:rPr>
+              <a:t>   ·   Intermediate · Level 2</a:t>
             </a:r>
           </a:p>
         </p:txBody>
@@ -19598,8 +19971,8 @@
                 <a:solidFill>
                   <a:srgbClr val="1565C0"/>
                 </a:solidFill>
-                <a:latin typeface="Tahoma"/>
-                <a:cs typeface="Tahoma"/>
+                <a:latin typeface="Vazirmatn"/>
+                <a:cs typeface="Vazirmatn"/>
               </a:rPr>
               <a:t>25</a:t>
             </a:r>
@@ -19750,8 +20123,8 @@
                 <a:solidFill>
                   <a:srgbClr val="1565C0"/>
                 </a:solidFill>
-                <a:latin typeface="Tahoma"/>
-                <a:cs typeface="Tahoma"/>
+                <a:latin typeface="Vazirmatn"/>
+                <a:cs typeface="Vazirmatn"/>
               </a:rPr>
               <a:t>آزمون پایان دوره</a:t>
             </a:r>
@@ -19773,8 +20146,8 @@
                 <a:solidFill>
                   <a:srgbClr val="1F2A24"/>
                 </a:solidFill>
-                <a:latin typeface="Tahoma"/>
-                <a:cs typeface="Tahoma"/>
+                <a:latin typeface="Vazirmatn"/>
+                <a:cs typeface="Vazirmatn"/>
               </a:rPr>
               <a:t>آزمون پایان دوره تکمیلی</a:t>
             </a:r>
@@ -19997,8 +20370,8 @@
                 <a:solidFill>
                   <a:srgbClr val="FFFFFF"/>
                 </a:solidFill>
-                <a:latin typeface="Tahoma"/>
-                <a:cs typeface="Tahoma"/>
+                <a:latin typeface="Vazirmatn"/>
+                <a:cs typeface="Vazirmatn"/>
               </a:rPr>
               <a:t>تئوری</a:t>
             </a:r>
@@ -20043,8 +20416,8 @@
                 <a:solidFill>
                   <a:srgbClr val="1565C0"/>
                 </a:solidFill>
-                <a:latin typeface="Tahoma"/>
-                <a:cs typeface="Tahoma"/>
+                <a:latin typeface="Vazirmatn"/>
+                <a:cs typeface="Vazirmatn"/>
               </a:rPr>
               <a:t>☐  </a:t>
             </a:r>
@@ -20053,8 +20426,8 @@
                 <a:solidFill>
                   <a:srgbClr val="1F2A24"/>
                 </a:solidFill>
-                <a:latin typeface="Tahoma"/>
-                <a:cs typeface="Tahoma"/>
+                <a:latin typeface="Vazirmatn"/>
+                <a:cs typeface="Vazirmatn"/>
               </a:rPr>
               <a:t>کلاب مناسب را انتخاب کند</a:t>
             </a:r>
@@ -20076,8 +20449,8 @@
                 <a:solidFill>
                   <a:srgbClr val="1565C0"/>
                 </a:solidFill>
-                <a:latin typeface="Tahoma"/>
-                <a:cs typeface="Tahoma"/>
+                <a:latin typeface="Vazirmatn"/>
+                <a:cs typeface="Vazirmatn"/>
               </a:rPr>
               <a:t>☐  </a:t>
             </a:r>
@@ -20086,8 +20459,8 @@
                 <a:solidFill>
                   <a:srgbClr val="1F2A24"/>
                 </a:solidFill>
-                <a:latin typeface="Tahoma"/>
-                <a:cs typeface="Tahoma"/>
+                <a:latin typeface="Vazirmatn"/>
+                <a:cs typeface="Vazirmatn"/>
               </a:rPr>
               <a:t>مفهوم Carry و Total را بداند</a:t>
             </a:r>
@@ -20109,8 +20482,8 @@
                 <a:solidFill>
                   <a:srgbClr val="1565C0"/>
                 </a:solidFill>
-                <a:latin typeface="Tahoma"/>
-                <a:cs typeface="Tahoma"/>
+                <a:latin typeface="Vazirmatn"/>
+                <a:cs typeface="Vazirmatn"/>
               </a:rPr>
               <a:t>☐  </a:t>
             </a:r>
@@ -20119,8 +20492,8 @@
                 <a:solidFill>
                   <a:srgbClr val="1F2A24"/>
                 </a:solidFill>
-                <a:latin typeface="Tahoma"/>
-                <a:cs typeface="Tahoma"/>
+                <a:latin typeface="Vazirmatn"/>
+                <a:cs typeface="Vazirmatn"/>
               </a:rPr>
               <a:t>Landing Point را توضیح دهد</a:t>
             </a:r>
@@ -20142,8 +20515,8 @@
                 <a:solidFill>
                   <a:srgbClr val="1565C0"/>
                 </a:solidFill>
-                <a:latin typeface="Tahoma"/>
-                <a:cs typeface="Tahoma"/>
+                <a:latin typeface="Vazirmatn"/>
+                <a:cs typeface="Vazirmatn"/>
               </a:rPr>
               <a:t>☐  </a:t>
             </a:r>
@@ -20152,8 +20525,8 @@
                 <a:solidFill>
                   <a:srgbClr val="1F2A24"/>
                 </a:solidFill>
-                <a:latin typeface="Tahoma"/>
-                <a:cs typeface="Tahoma"/>
+                <a:latin typeface="Vazirmatn"/>
+                <a:cs typeface="Vazirmatn"/>
               </a:rPr>
               <a:t>خطر و ریسک را تشخیص دهد</a:t>
             </a:r>
@@ -20175,8 +20548,8 @@
                 <a:solidFill>
                   <a:srgbClr val="1565C0"/>
                 </a:solidFill>
-                <a:latin typeface="Tahoma"/>
-                <a:cs typeface="Tahoma"/>
+                <a:latin typeface="Vazirmatn"/>
+                <a:cs typeface="Vazirmatn"/>
               </a:rPr>
               <a:t>☐  </a:t>
             </a:r>
@@ -20185,8 +20558,8 @@
                 <a:solidFill>
                   <a:srgbClr val="1F2A24"/>
                 </a:solidFill>
-                <a:latin typeface="Tahoma"/>
-                <a:cs typeface="Tahoma"/>
+                <a:latin typeface="Vazirmatn"/>
+                <a:cs typeface="Vazirmatn"/>
               </a:rPr>
               <a:t>Scorecard را صحیح تکمیل کند</a:t>
             </a:r>
@@ -20365,8 +20738,8 @@
                 <a:solidFill>
                   <a:srgbClr val="FFFFFF"/>
                 </a:solidFill>
-                <a:latin typeface="Tahoma"/>
-                <a:cs typeface="Tahoma"/>
+                <a:latin typeface="Vazirmatn"/>
+                <a:cs typeface="Vazirmatn"/>
               </a:rPr>
               <a:t>تکنیک</a:t>
             </a:r>
@@ -20411,8 +20784,8 @@
                 <a:solidFill>
                   <a:srgbClr val="1565C0"/>
                 </a:solidFill>
-                <a:latin typeface="Tahoma"/>
-                <a:cs typeface="Tahoma"/>
+                <a:latin typeface="Vazirmatn"/>
+                <a:cs typeface="Vazirmatn"/>
               </a:rPr>
               <a:t>☐  </a:t>
             </a:r>
@@ -20421,8 +20794,8 @@
                 <a:solidFill>
                   <a:srgbClr val="1F2A24"/>
                 </a:solidFill>
-                <a:latin typeface="Tahoma"/>
-                <a:cs typeface="Tahoma"/>
+                <a:latin typeface="Vazirmatn"/>
+                <a:cs typeface="Vazirmatn"/>
               </a:rPr>
               <a:t>Iron با Contact مناسب</a:t>
             </a:r>
@@ -20444,8 +20817,8 @@
                 <a:solidFill>
                   <a:srgbClr val="1565C0"/>
                 </a:solidFill>
-                <a:latin typeface="Tahoma"/>
-                <a:cs typeface="Tahoma"/>
+                <a:latin typeface="Vazirmatn"/>
+                <a:cs typeface="Vazirmatn"/>
               </a:rPr>
               <a:t>☐  </a:t>
             </a:r>
@@ -20454,8 +20827,8 @@
                 <a:solidFill>
                   <a:srgbClr val="1F2A24"/>
                 </a:solidFill>
-                <a:latin typeface="Tahoma"/>
-                <a:cs typeface="Tahoma"/>
+                <a:latin typeface="Vazirmatn"/>
+                <a:cs typeface="Vazirmatn"/>
               </a:rPr>
               <a:t>Wood/Driver کنترل‌شده</a:t>
             </a:r>
@@ -20477,8 +20850,8 @@
                 <a:solidFill>
                   <a:srgbClr val="1565C0"/>
                 </a:solidFill>
-                <a:latin typeface="Tahoma"/>
-                <a:cs typeface="Tahoma"/>
+                <a:latin typeface="Vazirmatn"/>
+                <a:cs typeface="Vazirmatn"/>
               </a:rPr>
               <a:t>☐  </a:t>
             </a:r>
@@ -20487,8 +20860,8 @@
                 <a:solidFill>
                   <a:srgbClr val="1F2A24"/>
                 </a:solidFill>
-                <a:latin typeface="Tahoma"/>
-                <a:cs typeface="Tahoma"/>
+                <a:latin typeface="Vazirmatn"/>
+                <a:cs typeface="Vazirmatn"/>
               </a:rPr>
               <a:t>Pitch در چند فاصله</a:t>
             </a:r>
@@ -20510,8 +20883,8 @@
                 <a:solidFill>
                   <a:srgbClr val="1565C0"/>
                 </a:solidFill>
-                <a:latin typeface="Tahoma"/>
-                <a:cs typeface="Tahoma"/>
+                <a:latin typeface="Vazirmatn"/>
+                <a:cs typeface="Vazirmatn"/>
               </a:rPr>
               <a:t>☐  </a:t>
             </a:r>
@@ -20520,8 +20893,8 @@
                 <a:solidFill>
                   <a:srgbClr val="1F2A24"/>
                 </a:solidFill>
-                <a:latin typeface="Tahoma"/>
-                <a:cs typeface="Tahoma"/>
+                <a:latin typeface="Vazirmatn"/>
+                <a:cs typeface="Vazirmatn"/>
               </a:rPr>
               <a:t>Chip با کلاب‌های مختلف</a:t>
             </a:r>
@@ -20543,8 +20916,8 @@
                 <a:solidFill>
                   <a:srgbClr val="1565C0"/>
                 </a:solidFill>
-                <a:latin typeface="Tahoma"/>
-                <a:cs typeface="Tahoma"/>
+                <a:latin typeface="Vazirmatn"/>
+                <a:cs typeface="Vazirmatn"/>
               </a:rPr>
               <a:t>☐  </a:t>
             </a:r>
@@ -20553,8 +20926,8 @@
                 <a:solidFill>
                   <a:srgbClr val="1F2A24"/>
                 </a:solidFill>
-                <a:latin typeface="Tahoma"/>
-                <a:cs typeface="Tahoma"/>
+                <a:latin typeface="Vazirmatn"/>
+                <a:cs typeface="Vazirmatn"/>
               </a:rPr>
               <a:t>Putting با کنترل فاصله</a:t>
             </a:r>
@@ -20576,8 +20949,8 @@
                 <a:solidFill>
                   <a:srgbClr val="1565C0"/>
                 </a:solidFill>
-                <a:latin typeface="Tahoma"/>
-                <a:cs typeface="Tahoma"/>
+                <a:latin typeface="Vazirmatn"/>
+                <a:cs typeface="Vazirmatn"/>
               </a:rPr>
               <a:t>☐  </a:t>
             </a:r>
@@ -20586,8 +20959,8 @@
                 <a:solidFill>
                   <a:srgbClr val="1F2A24"/>
                 </a:solidFill>
-                <a:latin typeface="Tahoma"/>
-                <a:cs typeface="Tahoma"/>
+                <a:latin typeface="Vazirmatn"/>
+                <a:cs typeface="Vazirmatn"/>
               </a:rPr>
               <a:t>Break ساده را بخواند</a:t>
             </a:r>
@@ -20766,8 +21139,8 @@
                 <a:solidFill>
                   <a:srgbClr val="FFFFFF"/>
                 </a:solidFill>
-                <a:latin typeface="Tahoma"/>
-                <a:cs typeface="Tahoma"/>
+                <a:latin typeface="Vazirmatn"/>
+                <a:cs typeface="Vazirmatn"/>
               </a:rPr>
               <a:t>بازی</a:t>
             </a:r>
@@ -20812,8 +21185,8 @@
                 <a:solidFill>
                   <a:srgbClr val="1565C0"/>
                 </a:solidFill>
-                <a:latin typeface="Tahoma"/>
-                <a:cs typeface="Tahoma"/>
+                <a:latin typeface="Vazirmatn"/>
+                <a:cs typeface="Vazirmatn"/>
               </a:rPr>
               <a:t>☐  </a:t>
             </a:r>
@@ -20822,8 +21195,8 @@
                 <a:solidFill>
                   <a:srgbClr val="1F2A24"/>
                 </a:solidFill>
-                <a:latin typeface="Tahoma"/>
-                <a:cs typeface="Tahoma"/>
+                <a:latin typeface="Vazirmatn"/>
+                <a:cs typeface="Vazirmatn"/>
               </a:rPr>
               <a:t>Pre-Shot Routine داشته باشد</a:t>
             </a:r>
@@ -20845,8 +21218,8 @@
                 <a:solidFill>
                   <a:srgbClr val="1565C0"/>
                 </a:solidFill>
-                <a:latin typeface="Tahoma"/>
-                <a:cs typeface="Tahoma"/>
+                <a:latin typeface="Vazirmatn"/>
+                <a:cs typeface="Vazirmatn"/>
               </a:rPr>
               <a:t>☐  </a:t>
             </a:r>
@@ -20855,8 +21228,8 @@
                 <a:solidFill>
                   <a:srgbClr val="1F2A24"/>
                 </a:solidFill>
-                <a:latin typeface="Tahoma"/>
-                <a:cs typeface="Tahoma"/>
+                <a:latin typeface="Vazirmatn"/>
+                <a:cs typeface="Vazirmatn"/>
               </a:rPr>
               <a:t>هدف مشخص تعیین کند</a:t>
             </a:r>
@@ -20878,8 +21251,8 @@
                 <a:solidFill>
                   <a:srgbClr val="1565C0"/>
                 </a:solidFill>
-                <a:latin typeface="Tahoma"/>
-                <a:cs typeface="Tahoma"/>
+                <a:latin typeface="Vazirmatn"/>
+                <a:cs typeface="Vazirmatn"/>
               </a:rPr>
               <a:t>☐  </a:t>
             </a:r>
@@ -20888,8 +21261,8 @@
                 <a:solidFill>
                   <a:srgbClr val="1F2A24"/>
                 </a:solidFill>
-                <a:latin typeface="Tahoma"/>
-                <a:cs typeface="Tahoma"/>
+                <a:latin typeface="Vazirmatn"/>
+                <a:cs typeface="Vazirmatn"/>
               </a:rPr>
               <a:t>Score خود را ثبت کند</a:t>
             </a:r>
@@ -20911,8 +21284,8 @@
                 <a:solidFill>
                   <a:srgbClr val="1565C0"/>
                 </a:solidFill>
-                <a:latin typeface="Tahoma"/>
-                <a:cs typeface="Tahoma"/>
+                <a:latin typeface="Vazirmatn"/>
+                <a:cs typeface="Vazirmatn"/>
               </a:rPr>
               <a:t>☐  </a:t>
             </a:r>
@@ -20921,8 +21294,8 @@
                 <a:solidFill>
                   <a:srgbClr val="1F2A24"/>
                 </a:solidFill>
-                <a:latin typeface="Tahoma"/>
-                <a:cs typeface="Tahoma"/>
+                <a:latin typeface="Vazirmatn"/>
+                <a:cs typeface="Vazirmatn"/>
               </a:rPr>
               <a:t>بعد از بازی تحلیل کند</a:t>
             </a:r>
@@ -20967,8 +21340,8 @@
                 <a:solidFill>
                   <a:srgbClr val="1565C0"/>
                 </a:solidFill>
-                <a:latin typeface="Tahoma"/>
-                <a:cs typeface="Tahoma"/>
+                <a:latin typeface="Vazirmatn"/>
+                <a:cs typeface="Vazirmatn"/>
               </a:rPr>
               <a:t>تسلط بر این موارد یعنی آماده‌گذار از مرحله مربی‌محور به تصمیم‌گیری مستقل.</a:t>
             </a:r>
@@ -20984,7 +21357,7 @@
         <p:spPr>
           <a:xfrm>
             <a:off x="502920" y="6400800"/>
-            <a:ext cx="5486400" cy="320040"/>
+            <a:ext cx="6858000" cy="320040"/>
           </a:xfrm>
           <a:prstGeom prst="rect">
             <a:avLst/>
@@ -21009,14 +21382,24 @@
               </a:spcAft>
             </a:pPr>
             <a:r>
+              <a:rPr sz="1100" b="1" i="0">
+                <a:solidFill>
+                  <a:srgbClr val="1565C0"/>
+                </a:solidFill>
+                <a:latin typeface="Vazirmatn"/>
+                <a:cs typeface="Vazirmatn"/>
+              </a:rPr>
+              <a:t>⛳ Puttclub</a:t>
+            </a:r>
+            <a:r>
               <a:rPr sz="1000" b="0" i="0">
                 <a:solidFill>
                   <a:srgbClr val="5C6B62"/>
                 </a:solidFill>
-                <a:latin typeface="Tahoma"/>
-                <a:cs typeface="Tahoma"/>
-              </a:rPr>
-              <a:t>Golf Academy  ·  Intermediate · Level 2</a:t>
+                <a:latin typeface="Vazirmatn"/>
+                <a:cs typeface="Vazirmatn"/>
+              </a:rPr>
+              <a:t>   ·   Intermediate · Level 2</a:t>
             </a:r>
           </a:p>
         </p:txBody>
@@ -21059,8 +21442,8 @@
                 <a:solidFill>
                   <a:srgbClr val="1565C0"/>
                 </a:solidFill>
-                <a:latin typeface="Tahoma"/>
-                <a:cs typeface="Tahoma"/>
+                <a:latin typeface="Vazirmatn"/>
+                <a:cs typeface="Vazirmatn"/>
               </a:rPr>
               <a:t>26</a:t>
             </a:r>
@@ -21255,8 +21638,8 @@
                 <a:solidFill>
                   <a:srgbClr val="64B5F6"/>
                 </a:solidFill>
-                <a:latin typeface="Tahoma"/>
-                <a:cs typeface="Tahoma"/>
+                <a:latin typeface="Vazirmatn"/>
+                <a:cs typeface="Vazirmatn"/>
               </a:rPr>
               <a:t>معیار ورود به سطح بعد  |  از مربی‌محوری به استقلال</a:t>
             </a:r>
@@ -21301,8 +21684,8 @@
                 <a:solidFill>
                   <a:srgbClr val="FFFFFF"/>
                 </a:solidFill>
-                <a:latin typeface="Tahoma"/>
-                <a:cs typeface="Tahoma"/>
+                <a:latin typeface="Vazirmatn"/>
+                <a:cs typeface="Vazirmatn"/>
               </a:rPr>
               <a:t>« از «مربی به من می‌گوید چه کار کنم» به «خودم می‌دانم چه ضربه‌ای، با کدام کلاب و چرا باید بزنم». »</a:t>
             </a:r>
@@ -21324,8 +21707,8 @@
                 <a:solidFill>
                   <a:srgbClr val="C9D6C8"/>
                 </a:solidFill>
-                <a:latin typeface="Tahoma"/>
-                <a:cs typeface="Tahoma"/>
+                <a:latin typeface="Vazirmatn"/>
+                <a:cs typeface="Vazirmatn"/>
               </a:rPr>
               <a:t>این دقیقاً مرز بین بازیکن مبتدی و بازیکنی است که درک واقعی از بازی گلف پیدا کرده است.</a:t>
             </a:r>
@@ -21341,7 +21724,7 @@
         <p:spPr>
           <a:xfrm>
             <a:off x="502920" y="6400800"/>
-            <a:ext cx="5486400" cy="320040"/>
+            <a:ext cx="6858000" cy="320040"/>
           </a:xfrm>
           <a:prstGeom prst="rect">
             <a:avLst/>
@@ -21366,14 +21749,24 @@
               </a:spcAft>
             </a:pPr>
             <a:r>
+              <a:rPr sz="1100" b="1" i="0">
+                <a:solidFill>
+                  <a:srgbClr val="64B5F6"/>
+                </a:solidFill>
+                <a:latin typeface="Vazirmatn"/>
+                <a:cs typeface="Vazirmatn"/>
+              </a:rPr>
+              <a:t>⛳ Puttclub</a:t>
+            </a:r>
+            <a:r>
               <a:rPr sz="1000" b="0" i="0">
                 <a:solidFill>
                   <a:srgbClr val="FFFFFF"/>
                 </a:solidFill>
-                <a:latin typeface="Tahoma"/>
-                <a:cs typeface="Tahoma"/>
-              </a:rPr>
-              <a:t>Golf Academy  ·  Intermediate · Level 2</a:t>
+                <a:latin typeface="Vazirmatn"/>
+                <a:cs typeface="Vazirmatn"/>
+              </a:rPr>
+              <a:t>   ·   Intermediate · Level 2</a:t>
             </a:r>
           </a:p>
         </p:txBody>
@@ -21416,8 +21809,8 @@
                 <a:solidFill>
                   <a:srgbClr val="64B5F6"/>
                 </a:solidFill>
-                <a:latin typeface="Tahoma"/>
-                <a:cs typeface="Tahoma"/>
+                <a:latin typeface="Vazirmatn"/>
+                <a:cs typeface="Vazirmatn"/>
               </a:rPr>
               <a:t>27</a:t>
             </a:r>
@@ -21594,8 +21987,8 @@
                 <a:solidFill>
                   <a:srgbClr val="FFFFFF"/>
                 </a:solidFill>
-                <a:latin typeface="Tahoma"/>
-                <a:cs typeface="Tahoma"/>
+                <a:latin typeface="Vazirmatn"/>
+                <a:cs typeface="Vazirmatn"/>
               </a:rPr>
               <a:t>مسیر چهار سطح آموزشی</a:t>
             </a:r>
@@ -21730,8 +22123,8 @@
                 <a:solidFill>
                   <a:srgbClr val="FFFFFF"/>
                 </a:solidFill>
-                <a:latin typeface="Tahoma"/>
-                <a:cs typeface="Tahoma"/>
+                <a:latin typeface="Vazirmatn"/>
+                <a:cs typeface="Vazirmatn"/>
               </a:rPr>
               <a:t>مقدماتی</a:t>
             </a:r>
@@ -21776,8 +22169,8 @@
                 <a:solidFill>
                   <a:srgbClr val="1F2A24"/>
                 </a:solidFill>
-                <a:latin typeface="Tahoma"/>
-                <a:cs typeface="Tahoma"/>
+                <a:latin typeface="Vazirmatn"/>
+                <a:cs typeface="Vazirmatn"/>
               </a:rPr>
               <a:t>شناخت و تکنیک پایه</a:t>
             </a:r>
@@ -21956,8 +22349,8 @@
                 <a:solidFill>
                   <a:srgbClr val="FFFFFF"/>
                 </a:solidFill>
-                <a:latin typeface="Tahoma"/>
-                <a:cs typeface="Tahoma"/>
+                <a:latin typeface="Vazirmatn"/>
+                <a:cs typeface="Vazirmatn"/>
               </a:rPr>
               <a:t>تکمیلی</a:t>
             </a:r>
@@ -22002,8 +22395,8 @@
                 <a:solidFill>
                   <a:srgbClr val="1F2A24"/>
                 </a:solidFill>
-                <a:latin typeface="Tahoma"/>
-                <a:cs typeface="Tahoma"/>
+                <a:latin typeface="Vazirmatn"/>
+                <a:cs typeface="Vazirmatn"/>
               </a:rPr>
               <a:t>تثبیت و کنترل</a:t>
             </a:r>
@@ -22182,8 +22575,8 @@
                 <a:solidFill>
                   <a:srgbClr val="FFFFFF"/>
                 </a:solidFill>
-                <a:latin typeface="Tahoma"/>
-                <a:cs typeface="Tahoma"/>
+                <a:latin typeface="Vazirmatn"/>
+                <a:cs typeface="Vazirmatn"/>
               </a:rPr>
               <a:t>نیمه‌پیشرفته</a:t>
             </a:r>
@@ -22228,8 +22621,8 @@
                 <a:solidFill>
                   <a:srgbClr val="1F2A24"/>
                 </a:solidFill>
-                <a:latin typeface="Tahoma"/>
-                <a:cs typeface="Tahoma"/>
+                <a:latin typeface="Vazirmatn"/>
+                <a:cs typeface="Vazirmatn"/>
               </a:rPr>
               <a:t>استراتژی و مدیریت زمین</a:t>
             </a:r>
@@ -22408,8 +22801,8 @@
                 <a:solidFill>
                   <a:srgbClr val="FFFFFF"/>
                 </a:solidFill>
-                <a:latin typeface="Tahoma"/>
-                <a:cs typeface="Tahoma"/>
+                <a:latin typeface="Vazirmatn"/>
+                <a:cs typeface="Vazirmatn"/>
               </a:rPr>
               <a:t>پیشرفته</a:t>
             </a:r>
@@ -22454,8 +22847,8 @@
                 <a:solidFill>
                   <a:srgbClr val="1F2A24"/>
                 </a:solidFill>
-                <a:latin typeface="Tahoma"/>
-                <a:cs typeface="Tahoma"/>
+                <a:latin typeface="Vazirmatn"/>
+                <a:cs typeface="Vazirmatn"/>
               </a:rPr>
               <a:t>عملکرد رقابتی و تخصص</a:t>
             </a:r>
@@ -22470,8 +22863,8 @@
         </p:nvSpPr>
         <p:spPr>
           <a:xfrm>
-            <a:off x="1097280" y="4617720"/>
-            <a:ext cx="9997135" cy="1554480"/>
+            <a:off x="1097280" y="4434840"/>
+            <a:ext cx="9997135" cy="1234440"/>
           </a:xfrm>
           <a:prstGeom prst="rect">
             <a:avLst/>
@@ -22492,7 +22885,7 @@
                 <a:spcPts val="0"/>
               </a:spcBef>
               <a:spcAft>
-                <a:spcPts val="800"/>
+                <a:spcPts val="1000"/>
               </a:spcAft>
             </a:pPr>
             <a:r>
@@ -22500,10 +22893,33 @@
                 <a:solidFill>
                   <a:srgbClr val="EAF3E8"/>
                 </a:solidFill>
-                <a:latin typeface="Tahoma"/>
-                <a:cs typeface="Tahoma"/>
+                <a:latin typeface="Vazirmatn"/>
+                <a:cs typeface="Vazirmatn"/>
               </a:rPr>
               <a:t>گام بعدی: کنترل بازی، استراتژی و مدیریت آگاهانه یک راند کامل.</a:t>
+            </a:r>
+          </a:p>
+          <a:p>
+            <a:pPr algn="ctr" rtl="1">
+              <a:lnSpc>
+                <a:spcPct val="108000"/>
+              </a:lnSpc>
+              <a:spcBef>
+                <a:spcPts val="0"/>
+              </a:spcBef>
+              <a:spcAft>
+                <a:spcPts val="0"/>
+              </a:spcAft>
+            </a:pPr>
+            <a:r>
+              <a:rPr sz="1400" b="1" i="0">
+                <a:solidFill>
+                  <a:srgbClr val="64B5F6"/>
+                </a:solidFill>
+                <a:latin typeface="Vazirmatn"/>
+                <a:cs typeface="Vazirmatn"/>
+              </a:rPr>
+              <a:t>⛳ Puttclub  —  آکادمی گلف پات‌کلاب   |   مدرس: الهام طالبی (مدرس درجه یک گلف ایران)</a:t>
             </a:r>
           </a:p>
         </p:txBody>
@@ -22517,7 +22933,7 @@
         <p:spPr>
           <a:xfrm>
             <a:off x="502920" y="6400800"/>
-            <a:ext cx="5486400" cy="320040"/>
+            <a:ext cx="6858000" cy="320040"/>
           </a:xfrm>
           <a:prstGeom prst="rect">
             <a:avLst/>
@@ -22542,14 +22958,24 @@
               </a:spcAft>
             </a:pPr>
             <a:r>
+              <a:rPr sz="1100" b="1" i="0">
+                <a:solidFill>
+                  <a:srgbClr val="64B5F6"/>
+                </a:solidFill>
+                <a:latin typeface="Vazirmatn"/>
+                <a:cs typeface="Vazirmatn"/>
+              </a:rPr>
+              <a:t>⛳ Puttclub</a:t>
+            </a:r>
+            <a:r>
               <a:rPr sz="1000" b="0" i="0">
                 <a:solidFill>
                   <a:srgbClr val="FFFFFF"/>
                 </a:solidFill>
-                <a:latin typeface="Tahoma"/>
-                <a:cs typeface="Tahoma"/>
-              </a:rPr>
-              <a:t>Golf Academy  ·  Intermediate · Level 2</a:t>
+                <a:latin typeface="Vazirmatn"/>
+                <a:cs typeface="Vazirmatn"/>
+              </a:rPr>
+              <a:t>   ·   Intermediate · Level 2</a:t>
             </a:r>
           </a:p>
         </p:txBody>
@@ -22592,8 +23018,8 @@
                 <a:solidFill>
                   <a:srgbClr val="64B5F6"/>
                 </a:solidFill>
-                <a:latin typeface="Tahoma"/>
-                <a:cs typeface="Tahoma"/>
+                <a:latin typeface="Vazirmatn"/>
+                <a:cs typeface="Vazirmatn"/>
               </a:rPr>
               <a:t>28</a:t>
             </a:r>
@@ -22744,8 +23170,8 @@
                 <a:solidFill>
                   <a:srgbClr val="1565C0"/>
                 </a:solidFill>
-                <a:latin typeface="Tahoma"/>
-                <a:cs typeface="Tahoma"/>
+                <a:latin typeface="Vazirmatn"/>
+                <a:cs typeface="Vazirmatn"/>
               </a:rPr>
               <a:t>فصل ۲</a:t>
             </a:r>
@@ -22767,8 +23193,8 @@
                 <a:solidFill>
                   <a:srgbClr val="1F2A24"/>
                 </a:solidFill>
-                <a:latin typeface="Tahoma"/>
-                <a:cs typeface="Tahoma"/>
+                <a:latin typeface="Vazirmatn"/>
+                <a:cs typeface="Vazirmatn"/>
               </a:rPr>
               <a:t>مرور چهار پایه تکنیک</a:t>
             </a:r>
@@ -22947,8 +23373,8 @@
                 <a:solidFill>
                   <a:srgbClr val="1565C0"/>
                 </a:solidFill>
-                <a:latin typeface="Tahoma"/>
-                <a:cs typeface="Tahoma"/>
+                <a:latin typeface="Vazirmatn"/>
+                <a:cs typeface="Vazirmatn"/>
               </a:rPr>
               <a:t>Grip</a:t>
             </a:r>
@@ -22970,8 +23396,8 @@
                 <a:solidFill>
                   <a:srgbClr val="5C6B62"/>
                 </a:solidFill>
-                <a:latin typeface="Tahoma"/>
-                <a:cs typeface="Tahoma"/>
+                <a:latin typeface="Vazirmatn"/>
+                <a:cs typeface="Vazirmatn"/>
               </a:rPr>
               <a:t>آیا فشار دست مناسب است؟</a:t>
             </a:r>
@@ -23106,8 +23532,8 @@
                 <a:solidFill>
                   <a:srgbClr val="1565C0"/>
                 </a:solidFill>
-                <a:latin typeface="Tahoma"/>
-                <a:cs typeface="Tahoma"/>
+                <a:latin typeface="Vazirmatn"/>
+                <a:cs typeface="Vazirmatn"/>
               </a:rPr>
               <a:t>Posture</a:t>
             </a:r>
@@ -23129,8 +23555,8 @@
                 <a:solidFill>
                   <a:srgbClr val="5C6B62"/>
                 </a:solidFill>
-                <a:latin typeface="Tahoma"/>
-                <a:cs typeface="Tahoma"/>
+                <a:latin typeface="Vazirmatn"/>
+                <a:cs typeface="Vazirmatn"/>
               </a:rPr>
               <a:t>آیا بدن در وضعیت طبیعی است؟</a:t>
             </a:r>
@@ -23265,8 +23691,8 @@
                 <a:solidFill>
                   <a:srgbClr val="1565C0"/>
                 </a:solidFill>
-                <a:latin typeface="Tahoma"/>
-                <a:cs typeface="Tahoma"/>
+                <a:latin typeface="Vazirmatn"/>
+                <a:cs typeface="Vazirmatn"/>
               </a:rPr>
               <a:t>Alignment</a:t>
             </a:r>
@@ -23288,8 +23714,8 @@
                 <a:solidFill>
                   <a:srgbClr val="5C6B62"/>
                 </a:solidFill>
-                <a:latin typeface="Tahoma"/>
-                <a:cs typeface="Tahoma"/>
+                <a:latin typeface="Vazirmatn"/>
+                <a:cs typeface="Vazirmatn"/>
               </a:rPr>
               <a:t>آیا Face و بدن نسبت به هدف درست‌اند؟</a:t>
             </a:r>
@@ -23424,8 +23850,8 @@
                 <a:solidFill>
                   <a:srgbClr val="1565C0"/>
                 </a:solidFill>
-                <a:latin typeface="Tahoma"/>
-                <a:cs typeface="Tahoma"/>
+                <a:latin typeface="Vazirmatn"/>
+                <a:cs typeface="Vazirmatn"/>
               </a:rPr>
               <a:t>Balance</a:t>
             </a:r>
@@ -23447,8 +23873,8 @@
                 <a:solidFill>
                   <a:srgbClr val="5C6B62"/>
                 </a:solidFill>
-                <a:latin typeface="Tahoma"/>
-                <a:cs typeface="Tahoma"/>
+                <a:latin typeface="Vazirmatn"/>
+                <a:cs typeface="Vazirmatn"/>
               </a:rPr>
               <a:t>آیا در طول Swing تعادل حفظ می‌شود؟</a:t>
             </a:r>
@@ -23539,8 +23965,8 @@
                 <a:solidFill>
                   <a:srgbClr val="FFFFFF"/>
                 </a:solidFill>
-                <a:latin typeface="Tahoma"/>
-                <a:cs typeface="Tahoma"/>
+                <a:latin typeface="Vazirmatn"/>
+                <a:cs typeface="Vazirmatn"/>
               </a:rPr>
               <a:t>تمرین: بدون توپ ۱۰ بار Setup بگیرید؛ تا Setup تکرارپذیر نشده وارد اصلاحات پیچیده نشوید.</a:t>
             </a:r>
@@ -23556,7 +23982,7 @@
         <p:spPr>
           <a:xfrm>
             <a:off x="502920" y="6400800"/>
-            <a:ext cx="5486400" cy="320040"/>
+            <a:ext cx="6858000" cy="320040"/>
           </a:xfrm>
           <a:prstGeom prst="rect">
             <a:avLst/>
@@ -23581,14 +24007,24 @@
               </a:spcAft>
             </a:pPr>
             <a:r>
+              <a:rPr sz="1100" b="1" i="0">
+                <a:solidFill>
+                  <a:srgbClr val="1565C0"/>
+                </a:solidFill>
+                <a:latin typeface="Vazirmatn"/>
+                <a:cs typeface="Vazirmatn"/>
+              </a:rPr>
+              <a:t>⛳ Puttclub</a:t>
+            </a:r>
+            <a:r>
               <a:rPr sz="1000" b="0" i="0">
                 <a:solidFill>
                   <a:srgbClr val="5C6B62"/>
                 </a:solidFill>
-                <a:latin typeface="Tahoma"/>
-                <a:cs typeface="Tahoma"/>
-              </a:rPr>
-              <a:t>Golf Academy  ·  Intermediate · Level 2</a:t>
+                <a:latin typeface="Vazirmatn"/>
+                <a:cs typeface="Vazirmatn"/>
+              </a:rPr>
+              <a:t>   ·   Intermediate · Level 2</a:t>
             </a:r>
           </a:p>
         </p:txBody>
@@ -23631,8 +24067,8 @@
                 <a:solidFill>
                   <a:srgbClr val="1565C0"/>
                 </a:solidFill>
-                <a:latin typeface="Tahoma"/>
-                <a:cs typeface="Tahoma"/>
+                <a:latin typeface="Vazirmatn"/>
+                <a:cs typeface="Vazirmatn"/>
               </a:rPr>
               <a:t>3</a:t>
             </a:r>
@@ -23783,8 +24219,8 @@
                 <a:solidFill>
                   <a:srgbClr val="1565C0"/>
                 </a:solidFill>
-                <a:latin typeface="Tahoma"/>
-                <a:cs typeface="Tahoma"/>
+                <a:latin typeface="Vazirmatn"/>
+                <a:cs typeface="Vazirmatn"/>
               </a:rPr>
               <a:t>فصل ۳</a:t>
             </a:r>
@@ -23806,8 +24242,8 @@
                 <a:solidFill>
                   <a:srgbClr val="1F2A24"/>
                 </a:solidFill>
-                <a:latin typeface="Tahoma"/>
-                <a:cs typeface="Tahoma"/>
+                <a:latin typeface="Vazirmatn"/>
+                <a:cs typeface="Vazirmatn"/>
               </a:rPr>
               <a:t>کنترل Swing و Tempo</a:t>
             </a:r>
@@ -23896,8 +24332,8 @@
                 <a:solidFill>
                   <a:srgbClr val="1565C0"/>
                 </a:solidFill>
-                <a:latin typeface="Tahoma"/>
-                <a:cs typeface="Tahoma"/>
+                <a:latin typeface="Vazirmatn"/>
+                <a:cs typeface="Vazirmatn"/>
               </a:rPr>
               <a:t>●  </a:t>
             </a:r>
@@ -23906,8 +24342,8 @@
                 <a:solidFill>
                   <a:srgbClr val="1F2A24"/>
                 </a:solidFill>
-                <a:latin typeface="Tahoma"/>
-                <a:cs typeface="Tahoma"/>
+                <a:latin typeface="Vazirmatn"/>
+                <a:cs typeface="Vazirmatn"/>
               </a:rPr>
               <a:t>در دوره مقدماتی Swing را یاد گرفتیم؛ حالا باید آن را کنترل کنیم</a:t>
             </a:r>
@@ -23929,8 +24365,8 @@
                 <a:solidFill>
                   <a:srgbClr val="1565C0"/>
                 </a:solidFill>
-                <a:latin typeface="Tahoma"/>
-                <a:cs typeface="Tahoma"/>
+                <a:latin typeface="Vazirmatn"/>
+                <a:cs typeface="Vazirmatn"/>
               </a:rPr>
               <a:t>●  </a:t>
             </a:r>
@@ -23939,8 +24375,8 @@
                 <a:solidFill>
                   <a:srgbClr val="1565C0"/>
                 </a:solidFill>
-                <a:latin typeface="Tahoma"/>
-                <a:cs typeface="Tahoma"/>
+                <a:latin typeface="Vazirmatn"/>
+                <a:cs typeface="Vazirmatn"/>
               </a:rPr>
               <a:t>چهار عامل مهم</a:t>
             </a:r>
@@ -23949,8 +24385,8 @@
                 <a:solidFill>
                   <a:srgbClr val="1F2A24"/>
                 </a:solidFill>
-                <a:latin typeface="Tahoma"/>
-                <a:cs typeface="Tahoma"/>
+                <a:latin typeface="Vazirmatn"/>
+                <a:cs typeface="Vazirmatn"/>
               </a:rPr>
               <a:t>  —  Tempo + Balance + Sequence + Contact</a:t>
             </a:r>
@@ -23972,8 +24408,8 @@
                 <a:solidFill>
                   <a:srgbClr val="1565C0"/>
                 </a:solidFill>
-                <a:latin typeface="Tahoma"/>
-                <a:cs typeface="Tahoma"/>
+                <a:latin typeface="Vazirmatn"/>
+                <a:cs typeface="Vazirmatn"/>
               </a:rPr>
               <a:t>●  </a:t>
             </a:r>
@@ -23982,8 +24418,8 @@
                 <a:solidFill>
                   <a:srgbClr val="1F2A24"/>
                 </a:solidFill>
-                <a:latin typeface="Tahoma"/>
-                <a:cs typeface="Tahoma"/>
+                <a:latin typeface="Vazirmatn"/>
+                <a:cs typeface="Vazirmatn"/>
               </a:rPr>
               <a:t>Tempo یعنی ریتم کلی و قابل تکرار Swing</a:t>
             </a:r>
@@ -24005,8 +24441,8 @@
                 <a:solidFill>
                   <a:srgbClr val="1565C0"/>
                 </a:solidFill>
-                <a:latin typeface="Tahoma"/>
-                <a:cs typeface="Tahoma"/>
+                <a:latin typeface="Vazirmatn"/>
+                <a:cs typeface="Vazirmatn"/>
               </a:rPr>
               <a:t>●  </a:t>
             </a:r>
@@ -24015,8 +24451,8 @@
                 <a:solidFill>
                   <a:srgbClr val="1565C0"/>
                 </a:solidFill>
-                <a:latin typeface="Tahoma"/>
-                <a:cs typeface="Tahoma"/>
+                <a:latin typeface="Vazirmatn"/>
+                <a:cs typeface="Vazirmatn"/>
               </a:rPr>
               <a:t>اشتباهات رایج</a:t>
             </a:r>
@@ -24038,8 +24474,8 @@
                 <a:solidFill>
                   <a:srgbClr val="1565C0"/>
                 </a:solidFill>
-                <a:latin typeface="Tahoma"/>
-                <a:cs typeface="Tahoma"/>
+                <a:latin typeface="Vazirmatn"/>
+                <a:cs typeface="Vazirmatn"/>
               </a:rPr>
               <a:t>–  </a:t>
             </a:r>
@@ -24048,8 +24484,8 @@
                 <a:solidFill>
                   <a:srgbClr val="1F2A24"/>
                 </a:solidFill>
-                <a:latin typeface="Tahoma"/>
-                <a:cs typeface="Tahoma"/>
+                <a:latin typeface="Vazirmatn"/>
+                <a:cs typeface="Vazirmatn"/>
               </a:rPr>
               <a:t>Backswing بسیار سریع و Downswing ناگهانی</a:t>
             </a:r>
@@ -24071,8 +24507,8 @@
                 <a:solidFill>
                   <a:srgbClr val="1565C0"/>
                 </a:solidFill>
-                <a:latin typeface="Tahoma"/>
-                <a:cs typeface="Tahoma"/>
+                <a:latin typeface="Vazirmatn"/>
+                <a:cs typeface="Vazirmatn"/>
               </a:rPr>
               <a:t>–  </a:t>
             </a:r>
@@ -24081,8 +24517,8 @@
                 <a:solidFill>
                   <a:srgbClr val="1F2A24"/>
                 </a:solidFill>
-                <a:latin typeface="Tahoma"/>
-                <a:cs typeface="Tahoma"/>
+                <a:latin typeface="Vazirmatn"/>
+                <a:cs typeface="Vazirmatn"/>
               </a:rPr>
               <a:t>تلاش برای زدن توپ با حداکثر قدرت</a:t>
             </a:r>
@@ -24104,8 +24540,8 @@
                 <a:solidFill>
                   <a:srgbClr val="1565C0"/>
                 </a:solidFill>
-                <a:latin typeface="Tahoma"/>
-                <a:cs typeface="Tahoma"/>
+                <a:latin typeface="Vazirmatn"/>
+                <a:cs typeface="Vazirmatn"/>
               </a:rPr>
               <a:t>●  </a:t>
             </a:r>
@@ -24114,8 +24550,8 @@
                 <a:solidFill>
                   <a:srgbClr val="1565C0"/>
                 </a:solidFill>
-                <a:latin typeface="Tahoma"/>
-                <a:cs typeface="Tahoma"/>
+                <a:latin typeface="Vazirmatn"/>
+                <a:cs typeface="Vazirmatn"/>
               </a:rPr>
               <a:t>تمرین</a:t>
             </a:r>
@@ -24124,8 +24560,8 @@
                 <a:solidFill>
                   <a:srgbClr val="1F2A24"/>
                 </a:solidFill>
-                <a:latin typeface="Tahoma"/>
-                <a:cs typeface="Tahoma"/>
+                <a:latin typeface="Vazirmatn"/>
+                <a:cs typeface="Vazirmatn"/>
               </a:rPr>
               <a:t>  —  ۵ Swing با سرعت ۵۰٪، ۵ با ۷۰٪، ۵ با سرعت طبیعی</a:t>
             </a:r>
@@ -24260,8 +24696,8 @@
                 <a:solidFill>
                   <a:srgbClr val="1565C0"/>
                 </a:solidFill>
-                <a:latin typeface="Tahoma"/>
-                <a:cs typeface="Tahoma"/>
+                <a:latin typeface="Vazirmatn"/>
+                <a:cs typeface="Vazirmatn"/>
               </a:rPr>
               <a:t>💡 </a:t>
             </a:r>
@@ -24270,8 +24706,8 @@
                 <a:solidFill>
                   <a:srgbClr val="1F2A24"/>
                 </a:solidFill>
-                <a:latin typeface="Tahoma"/>
-                <a:cs typeface="Tahoma"/>
+                <a:latin typeface="Vazirmatn"/>
+                <a:cs typeface="Vazirmatn"/>
               </a:rPr>
               <a:t>هدف یافتن ریتمی آرام است که بازیکن بتواند آن را بارها تکرار کند.</a:t>
             </a:r>
@@ -24287,7 +24723,7 @@
         <p:spPr>
           <a:xfrm>
             <a:off x="502920" y="6400800"/>
-            <a:ext cx="5486400" cy="320040"/>
+            <a:ext cx="6858000" cy="320040"/>
           </a:xfrm>
           <a:prstGeom prst="rect">
             <a:avLst/>
@@ -24312,14 +24748,24 @@
               </a:spcAft>
             </a:pPr>
             <a:r>
+              <a:rPr sz="1100" b="1" i="0">
+                <a:solidFill>
+                  <a:srgbClr val="1565C0"/>
+                </a:solidFill>
+                <a:latin typeface="Vazirmatn"/>
+                <a:cs typeface="Vazirmatn"/>
+              </a:rPr>
+              <a:t>⛳ Puttclub</a:t>
+            </a:r>
+            <a:r>
               <a:rPr sz="1000" b="0" i="0">
                 <a:solidFill>
                   <a:srgbClr val="5C6B62"/>
                 </a:solidFill>
-                <a:latin typeface="Tahoma"/>
-                <a:cs typeface="Tahoma"/>
-              </a:rPr>
-              <a:t>Golf Academy  ·  Intermediate · Level 2</a:t>
+                <a:latin typeface="Vazirmatn"/>
+                <a:cs typeface="Vazirmatn"/>
+              </a:rPr>
+              <a:t>   ·   Intermediate · Level 2</a:t>
             </a:r>
           </a:p>
         </p:txBody>
@@ -24362,8 +24808,8 @@
                 <a:solidFill>
                   <a:srgbClr val="1565C0"/>
                 </a:solidFill>
-                <a:latin typeface="Tahoma"/>
-                <a:cs typeface="Tahoma"/>
+                <a:latin typeface="Vazirmatn"/>
+                <a:cs typeface="Vazirmatn"/>
               </a:rPr>
               <a:t>4</a:t>
             </a:r>
@@ -24514,8 +24960,8 @@
                 <a:solidFill>
                   <a:srgbClr val="1565C0"/>
                 </a:solidFill>
-                <a:latin typeface="Tahoma"/>
-                <a:cs typeface="Tahoma"/>
+                <a:latin typeface="Vazirmatn"/>
+                <a:cs typeface="Vazirmatn"/>
               </a:rPr>
               <a:t>فصل ۴</a:t>
             </a:r>
@@ -24537,8 +24983,8 @@
                 <a:solidFill>
                   <a:srgbClr val="1F2A24"/>
                 </a:solidFill>
-                <a:latin typeface="Tahoma"/>
-                <a:cs typeface="Tahoma"/>
+                <a:latin typeface="Vazirmatn"/>
+                <a:cs typeface="Vazirmatn"/>
               </a:rPr>
               <a:t>ترتیب انتقال نیرو (Sequence)</a:t>
             </a:r>
@@ -24725,8 +25171,8 @@
                 <a:solidFill>
                   <a:srgbClr val="FFFFFF"/>
                 </a:solidFill>
-                <a:latin typeface="Tahoma"/>
-                <a:cs typeface="Tahoma"/>
+                <a:latin typeface="Vazirmatn"/>
+                <a:cs typeface="Vazirmatn"/>
               </a:rPr>
               <a:t>1</a:t>
             </a:r>
@@ -24771,8 +25217,8 @@
                 <a:solidFill>
                   <a:srgbClr val="1F2A24"/>
                 </a:solidFill>
-                <a:latin typeface="Tahoma"/>
-                <a:cs typeface="Tahoma"/>
+                <a:latin typeface="Vazirmatn"/>
+                <a:cs typeface="Vazirmatn"/>
               </a:rPr>
               <a:t>Lower Body</a:t>
             </a:r>
@@ -24794,8 +25240,8 @@
                 <a:solidFill>
                   <a:srgbClr val="5C6B62"/>
                 </a:solidFill>
-                <a:latin typeface="Tahoma"/>
-                <a:cs typeface="Tahoma"/>
+                <a:latin typeface="Vazirmatn"/>
+                <a:cs typeface="Vazirmatn"/>
               </a:rPr>
               <a:t>پایین‌تنه</a:t>
             </a:r>
@@ -24938,8 +25384,8 @@
                 <a:solidFill>
                   <a:srgbClr val="FFFFFF"/>
                 </a:solidFill>
-                <a:latin typeface="Tahoma"/>
-                <a:cs typeface="Tahoma"/>
+                <a:latin typeface="Vazirmatn"/>
+                <a:cs typeface="Vazirmatn"/>
               </a:rPr>
               <a:t>2</a:t>
             </a:r>
@@ -24984,8 +25430,8 @@
                 <a:solidFill>
                   <a:srgbClr val="1F2A24"/>
                 </a:solidFill>
-                <a:latin typeface="Tahoma"/>
-                <a:cs typeface="Tahoma"/>
+                <a:latin typeface="Vazirmatn"/>
+                <a:cs typeface="Vazirmatn"/>
               </a:rPr>
               <a:t>Hips</a:t>
             </a:r>
@@ -25007,8 +25453,8 @@
                 <a:solidFill>
                   <a:srgbClr val="5C6B62"/>
                 </a:solidFill>
-                <a:latin typeface="Tahoma"/>
-                <a:cs typeface="Tahoma"/>
+                <a:latin typeface="Vazirmatn"/>
+                <a:cs typeface="Vazirmatn"/>
               </a:rPr>
               <a:t>لگن</a:t>
             </a:r>
@@ -25151,8 +25597,8 @@
                 <a:solidFill>
                   <a:srgbClr val="FFFFFF"/>
                 </a:solidFill>
-                <a:latin typeface="Tahoma"/>
-                <a:cs typeface="Tahoma"/>
+                <a:latin typeface="Vazirmatn"/>
+                <a:cs typeface="Vazirmatn"/>
               </a:rPr>
               <a:t>3</a:t>
             </a:r>
@@ -25197,8 +25643,8 @@
                 <a:solidFill>
                   <a:srgbClr val="1F2A24"/>
                 </a:solidFill>
-                <a:latin typeface="Tahoma"/>
-                <a:cs typeface="Tahoma"/>
+                <a:latin typeface="Vazirmatn"/>
+                <a:cs typeface="Vazirmatn"/>
               </a:rPr>
               <a:t>Torso</a:t>
             </a:r>
@@ -25220,8 +25666,8 @@
                 <a:solidFill>
                   <a:srgbClr val="5C6B62"/>
                 </a:solidFill>
-                <a:latin typeface="Tahoma"/>
-                <a:cs typeface="Tahoma"/>
+                <a:latin typeface="Vazirmatn"/>
+                <a:cs typeface="Vazirmatn"/>
               </a:rPr>
               <a:t>تنه</a:t>
             </a:r>
@@ -25364,8 +25810,8 @@
                 <a:solidFill>
                   <a:srgbClr val="FFFFFF"/>
                 </a:solidFill>
-                <a:latin typeface="Tahoma"/>
-                <a:cs typeface="Tahoma"/>
+                <a:latin typeface="Vazirmatn"/>
+                <a:cs typeface="Vazirmatn"/>
               </a:rPr>
               <a:t>4</a:t>
             </a:r>
@@ -25410,8 +25856,8 @@
                 <a:solidFill>
                   <a:srgbClr val="1F2A24"/>
                 </a:solidFill>
-                <a:latin typeface="Tahoma"/>
-                <a:cs typeface="Tahoma"/>
+                <a:latin typeface="Vazirmatn"/>
+                <a:cs typeface="Vazirmatn"/>
               </a:rPr>
               <a:t>Arms</a:t>
             </a:r>
@@ -25433,8 +25879,8 @@
                 <a:solidFill>
                   <a:srgbClr val="5C6B62"/>
                 </a:solidFill>
-                <a:latin typeface="Tahoma"/>
-                <a:cs typeface="Tahoma"/>
+                <a:latin typeface="Vazirmatn"/>
+                <a:cs typeface="Vazirmatn"/>
               </a:rPr>
               <a:t>دست‌ها</a:t>
             </a:r>
@@ -25577,8 +26023,8 @@
                 <a:solidFill>
                   <a:srgbClr val="FFFFFF"/>
                 </a:solidFill>
-                <a:latin typeface="Tahoma"/>
-                <a:cs typeface="Tahoma"/>
+                <a:latin typeface="Vazirmatn"/>
+                <a:cs typeface="Vazirmatn"/>
               </a:rPr>
               <a:t>5</a:t>
             </a:r>
@@ -25623,8 +26069,8 @@
                 <a:solidFill>
                   <a:srgbClr val="1F2A24"/>
                 </a:solidFill>
-                <a:latin typeface="Tahoma"/>
-                <a:cs typeface="Tahoma"/>
+                <a:latin typeface="Vazirmatn"/>
+                <a:cs typeface="Vazirmatn"/>
               </a:rPr>
               <a:t>Club</a:t>
             </a:r>
@@ -25646,8 +26092,8 @@
                 <a:solidFill>
                   <a:srgbClr val="5C6B62"/>
                 </a:solidFill>
-                <a:latin typeface="Tahoma"/>
-                <a:cs typeface="Tahoma"/>
+                <a:latin typeface="Vazirmatn"/>
+                <a:cs typeface="Vazirmatn"/>
               </a:rPr>
               <a:t>کلاب</a:t>
             </a:r>
@@ -25782,8 +26228,8 @@
                 <a:solidFill>
                   <a:srgbClr val="1F2A24"/>
                 </a:solidFill>
-                <a:latin typeface="Tahoma"/>
-                <a:cs typeface="Tahoma"/>
+                <a:latin typeface="Vazirmatn"/>
+                <a:cs typeface="Vazirmatn"/>
               </a:rPr>
               <a:t>بدن نباید کاملاً هم‌زمان و بی‌ترتیب حرکت کند؛ حرکت را از زمین و پایین‌تنه شروع کنید.</a:t>
             </a:r>
@@ -25799,7 +26245,7 @@
         <p:spPr>
           <a:xfrm>
             <a:off x="502920" y="6400800"/>
-            <a:ext cx="5486400" cy="320040"/>
+            <a:ext cx="6858000" cy="320040"/>
           </a:xfrm>
           <a:prstGeom prst="rect">
             <a:avLst/>
@@ -25824,14 +26270,24 @@
               </a:spcAft>
             </a:pPr>
             <a:r>
+              <a:rPr sz="1100" b="1" i="0">
+                <a:solidFill>
+                  <a:srgbClr val="1565C0"/>
+                </a:solidFill>
+                <a:latin typeface="Vazirmatn"/>
+                <a:cs typeface="Vazirmatn"/>
+              </a:rPr>
+              <a:t>⛳ Puttclub</a:t>
+            </a:r>
+            <a:r>
               <a:rPr sz="1000" b="0" i="0">
                 <a:solidFill>
                   <a:srgbClr val="5C6B62"/>
                 </a:solidFill>
-                <a:latin typeface="Tahoma"/>
-                <a:cs typeface="Tahoma"/>
-              </a:rPr>
-              <a:t>Golf Academy  ·  Intermediate · Level 2</a:t>
+                <a:latin typeface="Vazirmatn"/>
+                <a:cs typeface="Vazirmatn"/>
+              </a:rPr>
+              <a:t>   ·   Intermediate · Level 2</a:t>
             </a:r>
           </a:p>
         </p:txBody>
@@ -25874,8 +26330,8 @@
                 <a:solidFill>
                   <a:srgbClr val="1565C0"/>
                 </a:solidFill>
-                <a:latin typeface="Tahoma"/>
-                <a:cs typeface="Tahoma"/>
+                <a:latin typeface="Vazirmatn"/>
+                <a:cs typeface="Vazirmatn"/>
               </a:rPr>
               <a:t>5</a:t>
             </a:r>
@@ -26026,8 +26482,8 @@
                 <a:solidFill>
                   <a:srgbClr val="1565C0"/>
                 </a:solidFill>
-                <a:latin typeface="Tahoma"/>
-                <a:cs typeface="Tahoma"/>
+                <a:latin typeface="Vazirmatn"/>
+                <a:cs typeface="Vazirmatn"/>
               </a:rPr>
               <a:t>فصل ۵</a:t>
             </a:r>
@@ -26049,8 +26505,8 @@
                 <a:solidFill>
                   <a:srgbClr val="1F2A24"/>
                 </a:solidFill>
-                <a:latin typeface="Tahoma"/>
-                <a:cs typeface="Tahoma"/>
+                <a:latin typeface="Vazirmatn"/>
+                <a:cs typeface="Vazirmatn"/>
               </a:rPr>
               <a:t>Iron Play تکمیلی — جدول شخصی فاصله</a:t>
             </a:r>
@@ -26137,8 +26593,8 @@
                           <a:solidFill>
                             <a:srgbClr val="FFFFFF"/>
                           </a:solidFill>
-                          <a:latin typeface="Tahoma"/>
-                          <a:cs typeface="Tahoma"/>
+                          <a:latin typeface="Vazirmatn"/>
+                          <a:cs typeface="Vazirmatn"/>
                         </a:rPr>
                         <a:t>Club</a:t>
                       </a:r>
@@ -26161,8 +26617,8 @@
                           <a:solidFill>
                             <a:srgbClr val="FFFFFF"/>
                           </a:solidFill>
-                          <a:latin typeface="Tahoma"/>
-                          <a:cs typeface="Tahoma"/>
+                          <a:latin typeface="Vazirmatn"/>
+                          <a:cs typeface="Vazirmatn"/>
                         </a:rPr>
                         <a:t>Carry (هوا)</a:t>
                       </a:r>
@@ -26185,8 +26641,8 @@
                           <a:solidFill>
                             <a:srgbClr val="FFFFFF"/>
                           </a:solidFill>
-                          <a:latin typeface="Tahoma"/>
-                          <a:cs typeface="Tahoma"/>
+                          <a:latin typeface="Vazirmatn"/>
+                          <a:cs typeface="Vazirmatn"/>
                         </a:rPr>
                         <a:t>Total (نهایی)</a:t>
                       </a:r>
@@ -26209,8 +26665,8 @@
                           <a:solidFill>
                             <a:srgbClr val="FFFFFF"/>
                           </a:solidFill>
-                          <a:latin typeface="Tahoma"/>
-                          <a:cs typeface="Tahoma"/>
+                          <a:latin typeface="Vazirmatn"/>
+                          <a:cs typeface="Vazirmatn"/>
                         </a:rPr>
                         <a:t>هدف</a:t>
                       </a:r>
@@ -26235,8 +26691,8 @@
                           <a:solidFill>
                             <a:srgbClr val="1565C0"/>
                           </a:solidFill>
-                          <a:latin typeface="Tahoma"/>
-                          <a:cs typeface="Tahoma"/>
+                          <a:latin typeface="Vazirmatn"/>
+                          <a:cs typeface="Vazirmatn"/>
                         </a:rPr>
                         <a:t>7 Iron</a:t>
                       </a:r>
@@ -26259,8 +26715,8 @@
                           <a:solidFill>
                             <a:srgbClr val="1F2A24"/>
                           </a:solidFill>
-                          <a:latin typeface="Tahoma"/>
-                          <a:cs typeface="Tahoma"/>
+                          <a:latin typeface="Vazirmatn"/>
+                          <a:cs typeface="Vazirmatn"/>
                         </a:rPr>
                         <a:t>ثبت بازیکن</a:t>
                       </a:r>
@@ -26283,8 +26739,8 @@
                           <a:solidFill>
                             <a:srgbClr val="1F2A24"/>
                           </a:solidFill>
-                          <a:latin typeface="Tahoma"/>
-                          <a:cs typeface="Tahoma"/>
+                          <a:latin typeface="Vazirmatn"/>
+                          <a:cs typeface="Vazirmatn"/>
                         </a:rPr>
                         <a:t>ثبت بازیکن</a:t>
                       </a:r>
@@ -26307,8 +26763,8 @@
                           <a:solidFill>
                             <a:srgbClr val="1F2A24"/>
                           </a:solidFill>
-                          <a:latin typeface="Tahoma"/>
-                          <a:cs typeface="Tahoma"/>
+                          <a:latin typeface="Vazirmatn"/>
+                          <a:cs typeface="Vazirmatn"/>
                         </a:rPr>
                         <a:t>کنترل</a:t>
                       </a:r>
@@ -26333,8 +26789,8 @@
                           <a:solidFill>
                             <a:srgbClr val="1565C0"/>
                           </a:solidFill>
-                          <a:latin typeface="Tahoma"/>
-                          <a:cs typeface="Tahoma"/>
+                          <a:latin typeface="Vazirmatn"/>
+                          <a:cs typeface="Vazirmatn"/>
                         </a:rPr>
                         <a:t>8 Iron</a:t>
                       </a:r>
@@ -26357,8 +26813,8 @@
                           <a:solidFill>
                             <a:srgbClr val="1F2A24"/>
                           </a:solidFill>
-                          <a:latin typeface="Tahoma"/>
-                          <a:cs typeface="Tahoma"/>
+                          <a:latin typeface="Vazirmatn"/>
+                          <a:cs typeface="Vazirmatn"/>
                         </a:rPr>
                         <a:t>ثبت بازیکن</a:t>
                       </a:r>
@@ -26381,8 +26837,8 @@
                           <a:solidFill>
                             <a:srgbClr val="1F2A24"/>
                           </a:solidFill>
-                          <a:latin typeface="Tahoma"/>
-                          <a:cs typeface="Tahoma"/>
+                          <a:latin typeface="Vazirmatn"/>
+                          <a:cs typeface="Vazirmatn"/>
                         </a:rPr>
                         <a:t>ثبت بازیکن</a:t>
                       </a:r>
@@ -26405,8 +26861,8 @@
                           <a:solidFill>
                             <a:srgbClr val="1F2A24"/>
                           </a:solidFill>
-                          <a:latin typeface="Tahoma"/>
-                          <a:cs typeface="Tahoma"/>
+                          <a:latin typeface="Vazirmatn"/>
+                          <a:cs typeface="Vazirmatn"/>
                         </a:rPr>
                         <a:t>کنترل</a:t>
                       </a:r>
@@ -26431,8 +26887,8 @@
                           <a:solidFill>
                             <a:srgbClr val="1565C0"/>
                           </a:solidFill>
-                          <a:latin typeface="Tahoma"/>
-                          <a:cs typeface="Tahoma"/>
+                          <a:latin typeface="Vazirmatn"/>
+                          <a:cs typeface="Vazirmatn"/>
                         </a:rPr>
                         <a:t>9 Iron</a:t>
                       </a:r>
@@ -26455,8 +26911,8 @@
                           <a:solidFill>
                             <a:srgbClr val="1F2A24"/>
                           </a:solidFill>
-                          <a:latin typeface="Tahoma"/>
-                          <a:cs typeface="Tahoma"/>
+                          <a:latin typeface="Vazirmatn"/>
+                          <a:cs typeface="Vazirmatn"/>
                         </a:rPr>
                         <a:t>ثبت بازیکن</a:t>
                       </a:r>
@@ -26479,8 +26935,8 @@
                           <a:solidFill>
                             <a:srgbClr val="1F2A24"/>
                           </a:solidFill>
-                          <a:latin typeface="Tahoma"/>
-                          <a:cs typeface="Tahoma"/>
+                          <a:latin typeface="Vazirmatn"/>
+                          <a:cs typeface="Vazirmatn"/>
                         </a:rPr>
                         <a:t>ثبت بازیکن</a:t>
                       </a:r>
@@ -26503,8 +26959,8 @@
                           <a:solidFill>
                             <a:srgbClr val="1F2A24"/>
                           </a:solidFill>
-                          <a:latin typeface="Tahoma"/>
-                          <a:cs typeface="Tahoma"/>
+                          <a:latin typeface="Vazirmatn"/>
+                          <a:cs typeface="Vazirmatn"/>
                         </a:rPr>
                         <a:t>کنترل</a:t>
                       </a:r>
@@ -26529,8 +26985,8 @@
                           <a:solidFill>
                             <a:srgbClr val="1565C0"/>
                           </a:solidFill>
-                          <a:latin typeface="Tahoma"/>
-                          <a:cs typeface="Tahoma"/>
+                          <a:latin typeface="Vazirmatn"/>
+                          <a:cs typeface="Vazirmatn"/>
                         </a:rPr>
                         <a:t>PW</a:t>
                       </a:r>
@@ -26553,8 +27009,8 @@
                           <a:solidFill>
                             <a:srgbClr val="1F2A24"/>
                           </a:solidFill>
-                          <a:latin typeface="Tahoma"/>
-                          <a:cs typeface="Tahoma"/>
+                          <a:latin typeface="Vazirmatn"/>
+                          <a:cs typeface="Vazirmatn"/>
                         </a:rPr>
                         <a:t>ثبت بازیکن</a:t>
                       </a:r>
@@ -26577,8 +27033,8 @@
                           <a:solidFill>
                             <a:srgbClr val="1F2A24"/>
                           </a:solidFill>
-                          <a:latin typeface="Tahoma"/>
-                          <a:cs typeface="Tahoma"/>
+                          <a:latin typeface="Vazirmatn"/>
+                          <a:cs typeface="Vazirmatn"/>
                         </a:rPr>
                         <a:t>ثبت بازیکن</a:t>
                       </a:r>
@@ -26601,8 +27057,8 @@
                           <a:solidFill>
                             <a:srgbClr val="1F2A24"/>
                           </a:solidFill>
-                          <a:latin typeface="Tahoma"/>
-                          <a:cs typeface="Tahoma"/>
+                          <a:latin typeface="Vazirmatn"/>
+                          <a:cs typeface="Vazirmatn"/>
                         </a:rPr>
                         <a:t>Approach</a:t>
                       </a:r>
@@ -26657,8 +27113,8 @@
                 <a:solidFill>
                   <a:srgbClr val="1565C0"/>
                 </a:solidFill>
-                <a:latin typeface="Tahoma"/>
-                <a:cs typeface="Tahoma"/>
+                <a:latin typeface="Vazirmatn"/>
+                <a:cs typeface="Vazirmatn"/>
               </a:rPr>
               <a:t>●  </a:t>
             </a:r>
@@ -26667,8 +27123,8 @@
                 <a:solidFill>
                   <a:srgbClr val="5C6B62"/>
                 </a:solidFill>
-                <a:latin typeface="Tahoma"/>
-                <a:cs typeface="Tahoma"/>
+                <a:latin typeface="Vazirmatn"/>
+                <a:cs typeface="Vazirmatn"/>
               </a:rPr>
               <a:t>برای هر Iron حداقل ۱۰ ضربه بزنید و میانگین Carry را ثبت کنید؛ هدف «فاصله قابل اعتماد» است نه بهترین ضربه.</a:t>
             </a:r>
@@ -26684,7 +27140,7 @@
         <p:spPr>
           <a:xfrm>
             <a:off x="502920" y="6400800"/>
-            <a:ext cx="5486400" cy="320040"/>
+            <a:ext cx="6858000" cy="320040"/>
           </a:xfrm>
           <a:prstGeom prst="rect">
             <a:avLst/>
@@ -26709,14 +27165,24 @@
               </a:spcAft>
             </a:pPr>
             <a:r>
+              <a:rPr sz="1100" b="1" i="0">
+                <a:solidFill>
+                  <a:srgbClr val="1565C0"/>
+                </a:solidFill>
+                <a:latin typeface="Vazirmatn"/>
+                <a:cs typeface="Vazirmatn"/>
+              </a:rPr>
+              <a:t>⛳ Puttclub</a:t>
+            </a:r>
+            <a:r>
               <a:rPr sz="1000" b="0" i="0">
                 <a:solidFill>
                   <a:srgbClr val="5C6B62"/>
                 </a:solidFill>
-                <a:latin typeface="Tahoma"/>
-                <a:cs typeface="Tahoma"/>
-              </a:rPr>
-              <a:t>Golf Academy  ·  Intermediate · Level 2</a:t>
+                <a:latin typeface="Vazirmatn"/>
+                <a:cs typeface="Vazirmatn"/>
+              </a:rPr>
+              <a:t>   ·   Intermediate · Level 2</a:t>
             </a:r>
           </a:p>
         </p:txBody>
@@ -26759,8 +27225,8 @@
                 <a:solidFill>
                   <a:srgbClr val="1565C0"/>
                 </a:solidFill>
-                <a:latin typeface="Tahoma"/>
-                <a:cs typeface="Tahoma"/>
+                <a:latin typeface="Vazirmatn"/>
+                <a:cs typeface="Vazirmatn"/>
               </a:rPr>
               <a:t>6</a:t>
             </a:r>
@@ -26937,8 +27403,8 @@
                 <a:solidFill>
                   <a:srgbClr val="FFFFFF"/>
                 </a:solidFill>
-                <a:latin typeface="Tahoma"/>
-                <a:cs typeface="Tahoma"/>
+                <a:latin typeface="Vazirmatn"/>
+                <a:cs typeface="Vazirmatn"/>
               </a:rPr>
               <a:t>تمرین کنترل نقطه تماس</a:t>
             </a:r>
@@ -27027,8 +27493,8 @@
                 <a:solidFill>
                   <a:srgbClr val="1565C0"/>
                 </a:solidFill>
-                <a:latin typeface="Tahoma"/>
-                <a:cs typeface="Tahoma"/>
+                <a:latin typeface="Vazirmatn"/>
+                <a:cs typeface="Vazirmatn"/>
               </a:rPr>
               <a:t>فصل ۶</a:t>
             </a:r>
@@ -27050,8 +27516,8 @@
                 <a:solidFill>
                   <a:srgbClr val="1F2A24"/>
                 </a:solidFill>
-                <a:latin typeface="Tahoma"/>
-                <a:cs typeface="Tahoma"/>
+                <a:latin typeface="Vazirmatn"/>
+                <a:cs typeface="Vazirmatn"/>
               </a:rPr>
               <a:t>کنترل Contact و Divot</a:t>
             </a:r>
@@ -27140,8 +27606,8 @@
                 <a:solidFill>
                   <a:srgbClr val="1565C0"/>
                 </a:solidFill>
-                <a:latin typeface="Tahoma"/>
-                <a:cs typeface="Tahoma"/>
+                <a:latin typeface="Vazirmatn"/>
+                <a:cs typeface="Vazirmatn"/>
               </a:rPr>
               <a:t>●  </a:t>
             </a:r>
@@ -27150,8 +27616,8 @@
                 <a:solidFill>
                   <a:srgbClr val="1565C0"/>
                 </a:solidFill>
-                <a:latin typeface="Tahoma"/>
-                <a:cs typeface="Tahoma"/>
+                <a:latin typeface="Vazirmatn"/>
+                <a:cs typeface="Vazirmatn"/>
               </a:rPr>
               <a:t>در بسیاری از ضربات Iron ترتیب مطلوب</a:t>
             </a:r>
@@ -27160,8 +27626,8 @@
                 <a:solidFill>
                   <a:srgbClr val="1F2A24"/>
                 </a:solidFill>
-                <a:latin typeface="Tahoma"/>
-                <a:cs typeface="Tahoma"/>
+                <a:latin typeface="Vazirmatn"/>
+                <a:cs typeface="Vazirmatn"/>
               </a:rPr>
               <a:t>  —  توپ ← زمین</a:t>
             </a:r>
@@ -27183,8 +27649,8 @@
                 <a:solidFill>
                   <a:srgbClr val="1565C0"/>
                 </a:solidFill>
-                <a:latin typeface="Tahoma"/>
-                <a:cs typeface="Tahoma"/>
+                <a:latin typeface="Vazirmatn"/>
+                <a:cs typeface="Vazirmatn"/>
               </a:rPr>
               <a:t>●  </a:t>
             </a:r>
@@ -27193,8 +27659,8 @@
                 <a:solidFill>
                   <a:srgbClr val="1F2A24"/>
                 </a:solidFill>
-                <a:latin typeface="Tahoma"/>
-                <a:cs typeface="Tahoma"/>
+                <a:latin typeface="Vazirmatn"/>
+                <a:cs typeface="Vazirmatn"/>
               </a:rPr>
               <a:t>Divot باید بعد از نقطه تماس با توپ شروع شود</a:t>
             </a:r>
@@ -27216,8 +27682,8 @@
                 <a:solidFill>
                   <a:srgbClr val="1565C0"/>
                 </a:solidFill>
-                <a:latin typeface="Tahoma"/>
-                <a:cs typeface="Tahoma"/>
+                <a:latin typeface="Vazirmatn"/>
+                <a:cs typeface="Vazirmatn"/>
               </a:rPr>
               <a:t>●  </a:t>
             </a:r>
@@ -27226,8 +27692,8 @@
                 <a:solidFill>
                   <a:srgbClr val="1565C0"/>
                 </a:solidFill>
-                <a:latin typeface="Tahoma"/>
-                <a:cs typeface="Tahoma"/>
+                <a:latin typeface="Vazirmatn"/>
+                <a:cs typeface="Vazirmatn"/>
               </a:rPr>
               <a:t>تمرین خط روی زمین</a:t>
             </a:r>
@@ -27236,8 +27702,8 @@
                 <a:solidFill>
                   <a:srgbClr val="1F2A24"/>
                 </a:solidFill>
-                <a:latin typeface="Tahoma"/>
-                <a:cs typeface="Tahoma"/>
+                <a:latin typeface="Vazirmatn"/>
+                <a:cs typeface="Vazirmatn"/>
               </a:rPr>
               <a:t>  —  یک خط روی چمن ایجاد کنید</a:t>
             </a:r>
@@ -27259,8 +27725,8 @@
                 <a:solidFill>
                   <a:srgbClr val="1565C0"/>
                 </a:solidFill>
-                <a:latin typeface="Tahoma"/>
-                <a:cs typeface="Tahoma"/>
+                <a:latin typeface="Vazirmatn"/>
+                <a:cs typeface="Vazirmatn"/>
               </a:rPr>
               <a:t>●  </a:t>
             </a:r>
@@ -27269,8 +27735,8 @@
                 <a:solidFill>
                   <a:srgbClr val="1F2A24"/>
                 </a:solidFill>
-                <a:latin typeface="Tahoma"/>
-                <a:cs typeface="Tahoma"/>
+                <a:latin typeface="Vazirmatn"/>
+                <a:cs typeface="Vazirmatn"/>
               </a:rPr>
               <a:t>ابتدا بدون توپ؛ نقطه پایین Swing باید بعد از خط باشد</a:t>
             </a:r>
@@ -27292,8 +27758,8 @@
                 <a:solidFill>
                   <a:srgbClr val="1565C0"/>
                 </a:solidFill>
-                <a:latin typeface="Tahoma"/>
-                <a:cs typeface="Tahoma"/>
+                <a:latin typeface="Vazirmatn"/>
+                <a:cs typeface="Vazirmatn"/>
               </a:rPr>
               <a:t>●  </a:t>
             </a:r>
@@ -27302,8 +27768,8 @@
                 <a:solidFill>
                   <a:srgbClr val="1F2A24"/>
                 </a:solidFill>
-                <a:latin typeface="Tahoma"/>
-                <a:cs typeface="Tahoma"/>
+                <a:latin typeface="Vazirmatn"/>
+                <a:cs typeface="Vazirmatn"/>
               </a:rPr>
               <a:t>سپس توپ را جلوی خط قرار دهید و تمرین را ادامه دهید</a:t>
             </a:r>
@@ -27325,8 +27791,8 @@
                 <a:solidFill>
                   <a:srgbClr val="1565C0"/>
                 </a:solidFill>
-                <a:latin typeface="Tahoma"/>
-                <a:cs typeface="Tahoma"/>
+                <a:latin typeface="Vazirmatn"/>
+                <a:cs typeface="Vazirmatn"/>
               </a:rPr>
               <a:t>●  </a:t>
             </a:r>
@@ -27335,8 +27801,8 @@
                 <a:solidFill>
                   <a:srgbClr val="1F2A24"/>
                 </a:solidFill>
-                <a:latin typeface="Tahoma"/>
-                <a:cs typeface="Tahoma"/>
+                <a:latin typeface="Vazirmatn"/>
+                <a:cs typeface="Vazirmatn"/>
               </a:rPr>
               <a:t>این تمرین موقعیت تماس Ball-First را تثبیت می‌کند</a:t>
             </a:r>
@@ -27471,8 +27937,8 @@
                 <a:solidFill>
                   <a:srgbClr val="1565C0"/>
                 </a:solidFill>
-                <a:latin typeface="Tahoma"/>
-                <a:cs typeface="Tahoma"/>
+                <a:latin typeface="Vazirmatn"/>
+                <a:cs typeface="Vazirmatn"/>
               </a:rPr>
               <a:t>نکته مربی:  </a:t>
             </a:r>
@@ -27481,8 +27947,8 @@
                 <a:solidFill>
                   <a:srgbClr val="1F2A24"/>
                 </a:solidFill>
-                <a:latin typeface="Tahoma"/>
-                <a:cs typeface="Tahoma"/>
+                <a:latin typeface="Vazirmatn"/>
+                <a:cs typeface="Vazirmatn"/>
               </a:rPr>
               <a:t>اگر Divit پشت خط ایجاد شود، یعنی کلاب زودتر از توپ به زمین می‌رسد.</a:t>
             </a:r>
@@ -27498,7 +27964,7 @@
         <p:spPr>
           <a:xfrm>
             <a:off x="502920" y="6400800"/>
-            <a:ext cx="5486400" cy="320040"/>
+            <a:ext cx="6858000" cy="320040"/>
           </a:xfrm>
           <a:prstGeom prst="rect">
             <a:avLst/>
@@ -27523,14 +27989,24 @@
               </a:spcAft>
             </a:pPr>
             <a:r>
+              <a:rPr sz="1100" b="1" i="0">
+                <a:solidFill>
+                  <a:srgbClr val="1565C0"/>
+                </a:solidFill>
+                <a:latin typeface="Vazirmatn"/>
+                <a:cs typeface="Vazirmatn"/>
+              </a:rPr>
+              <a:t>⛳ Puttclub</a:t>
+            </a:r>
+            <a:r>
               <a:rPr sz="1000" b="0" i="0">
                 <a:solidFill>
                   <a:srgbClr val="5C6B62"/>
                 </a:solidFill>
-                <a:latin typeface="Tahoma"/>
-                <a:cs typeface="Tahoma"/>
-              </a:rPr>
-              <a:t>Golf Academy  ·  Intermediate · Level 2</a:t>
+                <a:latin typeface="Vazirmatn"/>
+                <a:cs typeface="Vazirmatn"/>
+              </a:rPr>
+              <a:t>   ·   Intermediate · Level 2</a:t>
             </a:r>
           </a:p>
         </p:txBody>
@@ -27573,8 +28049,8 @@
                 <a:solidFill>
                   <a:srgbClr val="1565C0"/>
                 </a:solidFill>
-                <a:latin typeface="Tahoma"/>
-                <a:cs typeface="Tahoma"/>
+                <a:latin typeface="Vazirmatn"/>
+                <a:cs typeface="Vazirmatn"/>
               </a:rPr>
               <a:t>7</a:t>
             </a:r>
@@ -27725,8 +28201,8 @@
                 <a:solidFill>
                   <a:srgbClr val="1565C0"/>
                 </a:solidFill>
-                <a:latin typeface="Tahoma"/>
-                <a:cs typeface="Tahoma"/>
+                <a:latin typeface="Vazirmatn"/>
+                <a:cs typeface="Vazirmatn"/>
               </a:rPr>
               <a:t>فصل ۷</a:t>
             </a:r>
@@ -27748,8 +28224,8 @@
                 <a:solidFill>
                   <a:srgbClr val="1F2A24"/>
                 </a:solidFill>
-                <a:latin typeface="Tahoma"/>
-                <a:cs typeface="Tahoma"/>
+                <a:latin typeface="Vazirmatn"/>
+                <a:cs typeface="Vazirmatn"/>
               </a:rPr>
               <a:t>تشخیص مسیر کلی توپ</a:t>
             </a:r>
@@ -27928,8 +28404,8 @@
                 <a:solidFill>
                   <a:srgbClr val="1565C0"/>
                 </a:solidFill>
-                <a:latin typeface="Tahoma"/>
-                <a:cs typeface="Tahoma"/>
+                <a:latin typeface="Vazirmatn"/>
+                <a:cs typeface="Vazirmatn"/>
               </a:rPr>
               <a:t>Straight</a:t>
             </a:r>
@@ -27951,8 +28427,8 @@
                 <a:solidFill>
                   <a:srgbClr val="5C6B62"/>
                 </a:solidFill>
-                <a:latin typeface="Tahoma"/>
-                <a:cs typeface="Tahoma"/>
+                <a:latin typeface="Vazirmatn"/>
+                <a:cs typeface="Vazirmatn"/>
               </a:rPr>
               <a:t>توپ تقریباً مستقیم حرکت می‌کند</a:t>
             </a:r>
@@ -28087,8 +28563,8 @@
                 <a:solidFill>
                   <a:srgbClr val="1565C0"/>
                 </a:solidFill>
-                <a:latin typeface="Tahoma"/>
-                <a:cs typeface="Tahoma"/>
+                <a:latin typeface="Vazirmatn"/>
+                <a:cs typeface="Vazirmatn"/>
               </a:rPr>
               <a:t>Fade</a:t>
             </a:r>
@@ -28110,8 +28586,8 @@
                 <a:solidFill>
                   <a:srgbClr val="5C6B62"/>
                 </a:solidFill>
-                <a:latin typeface="Tahoma"/>
-                <a:cs typeface="Tahoma"/>
+                <a:latin typeface="Vazirmatn"/>
+                <a:cs typeface="Vazirmatn"/>
               </a:rPr>
               <a:t>برای راست‌دست کمی به سمت راست منحنی می‌شود</a:t>
             </a:r>
@@ -28246,8 +28722,8 @@
                 <a:solidFill>
                   <a:srgbClr val="1565C0"/>
                 </a:solidFill>
-                <a:latin typeface="Tahoma"/>
-                <a:cs typeface="Tahoma"/>
+                <a:latin typeface="Vazirmatn"/>
+                <a:cs typeface="Vazirmatn"/>
               </a:rPr>
               <a:t>Draw</a:t>
             </a:r>
@@ -28269,8 +28745,8 @@
                 <a:solidFill>
                   <a:srgbClr val="5C6B62"/>
                 </a:solidFill>
-                <a:latin typeface="Tahoma"/>
-                <a:cs typeface="Tahoma"/>
+                <a:latin typeface="Vazirmatn"/>
+                <a:cs typeface="Vazirmatn"/>
               </a:rPr>
               <a:t>برای راست‌دست کمی به سمت چپ منحنی می‌شود</a:t>
             </a:r>
@@ -28361,8 +28837,8 @@
                 <a:solidFill>
                   <a:srgbClr val="FFFFFF"/>
                 </a:solidFill>
-                <a:latin typeface="Tahoma"/>
-                <a:cs typeface="Tahoma"/>
+                <a:latin typeface="Vazirmatn"/>
+                <a:cs typeface="Vazirmatn"/>
               </a:rPr>
               <a:t>در این مرحله هدف ساخت عمدی Draw/Fade نیست؛ ابتدا پرواز طبیعی توپ خود را بشناسید.</a:t>
             </a:r>
@@ -28378,7 +28854,7 @@
         <p:spPr>
           <a:xfrm>
             <a:off x="502920" y="6400800"/>
-            <a:ext cx="5486400" cy="320040"/>
+            <a:ext cx="6858000" cy="320040"/>
           </a:xfrm>
           <a:prstGeom prst="rect">
             <a:avLst/>
@@ -28403,14 +28879,24 @@
               </a:spcAft>
             </a:pPr>
             <a:r>
+              <a:rPr sz="1100" b="1" i="0">
+                <a:solidFill>
+                  <a:srgbClr val="1565C0"/>
+                </a:solidFill>
+                <a:latin typeface="Vazirmatn"/>
+                <a:cs typeface="Vazirmatn"/>
+              </a:rPr>
+              <a:t>⛳ Puttclub</a:t>
+            </a:r>
+            <a:r>
               <a:rPr sz="1000" b="0" i="0">
                 <a:solidFill>
                   <a:srgbClr val="5C6B62"/>
                 </a:solidFill>
-                <a:latin typeface="Tahoma"/>
-                <a:cs typeface="Tahoma"/>
-              </a:rPr>
-              <a:t>Golf Academy  ·  Intermediate · Level 2</a:t>
+                <a:latin typeface="Vazirmatn"/>
+                <a:cs typeface="Vazirmatn"/>
+              </a:rPr>
+              <a:t>   ·   Intermediate · Level 2</a:t>
             </a:r>
           </a:p>
         </p:txBody>
@@ -28453,8 +28939,8 @@
                 <a:solidFill>
                   <a:srgbClr val="1565C0"/>
                 </a:solidFill>
-                <a:latin typeface="Tahoma"/>
-                <a:cs typeface="Tahoma"/>
+                <a:latin typeface="Vazirmatn"/>
+                <a:cs typeface="Vazirmatn"/>
               </a:rPr>
               <a:t>8</a:t>
             </a:r>
@@ -28631,8 +29117,8 @@
                 <a:solidFill>
                   <a:srgbClr val="FFFFFF"/>
                 </a:solidFill>
-                <a:latin typeface="Tahoma"/>
-                <a:cs typeface="Tahoma"/>
+                <a:latin typeface="Vazirmatn"/>
+                <a:cs typeface="Vazirmatn"/>
               </a:rPr>
               <a:t>کنترل Driver به‌جای حداکثر قدرت</a:t>
             </a:r>
@@ -28721,8 +29207,8 @@
                 <a:solidFill>
                   <a:srgbClr val="1565C0"/>
                 </a:solidFill>
-                <a:latin typeface="Tahoma"/>
-                <a:cs typeface="Tahoma"/>
+                <a:latin typeface="Vazirmatn"/>
+                <a:cs typeface="Vazirmatn"/>
               </a:rPr>
               <a:t>فصل ۸</a:t>
             </a:r>
@@ -28744,8 +29230,8 @@
                 <a:solidFill>
                   <a:srgbClr val="1F2A24"/>
                 </a:solidFill>
-                <a:latin typeface="Tahoma"/>
-                <a:cs typeface="Tahoma"/>
+                <a:latin typeface="Vazirmatn"/>
+                <a:cs typeface="Vazirmatn"/>
               </a:rPr>
               <a:t>Wood و Driver</a:t>
             </a:r>
@@ -28834,8 +29320,8 @@
                 <a:solidFill>
                   <a:srgbClr val="1565C0"/>
                 </a:solidFill>
-                <a:latin typeface="Tahoma"/>
-                <a:cs typeface="Tahoma"/>
+                <a:latin typeface="Vazirmatn"/>
+                <a:cs typeface="Vazirmatn"/>
               </a:rPr>
               <a:t>●  </a:t>
             </a:r>
@@ -28844,8 +29330,8 @@
                 <a:solidFill>
                   <a:srgbClr val="1565C0"/>
                 </a:solidFill>
-                <a:latin typeface="Tahoma"/>
-                <a:cs typeface="Tahoma"/>
+                <a:latin typeface="Vazirmatn"/>
+                <a:cs typeface="Vazirmatn"/>
               </a:rPr>
               <a:t>سه موضوع قابل‌کنترل</a:t>
             </a:r>
@@ -28854,8 +29340,8 @@
                 <a:solidFill>
                   <a:srgbClr val="1F2A24"/>
                 </a:solidFill>
-                <a:latin typeface="Tahoma"/>
-                <a:cs typeface="Tahoma"/>
+                <a:latin typeface="Vazirmatn"/>
+                <a:cs typeface="Vazirmatn"/>
               </a:rPr>
               <a:t>  —  Contact، Direction، Launch</a:t>
             </a:r>
@@ -28877,8 +29363,8 @@
                 <a:solidFill>
                   <a:srgbClr val="1565C0"/>
                 </a:solidFill>
-                <a:latin typeface="Tahoma"/>
-                <a:cs typeface="Tahoma"/>
+                <a:latin typeface="Vazirmatn"/>
+                <a:cs typeface="Vazirmatn"/>
               </a:rPr>
               <a:t>●  </a:t>
             </a:r>
@@ -28887,8 +29373,8 @@
                 <a:solidFill>
                   <a:srgbClr val="1565C0"/>
                 </a:solidFill>
-                <a:latin typeface="Tahoma"/>
-                <a:cs typeface="Tahoma"/>
+                <a:latin typeface="Vazirmatn"/>
+                <a:cs typeface="Vazirmatn"/>
               </a:rPr>
               <a:t>Contact</a:t>
             </a:r>
@@ -28897,8 +29383,8 @@
                 <a:solidFill>
                   <a:srgbClr val="1F2A24"/>
                 </a:solidFill>
-                <a:latin typeface="Tahoma"/>
-                <a:cs typeface="Tahoma"/>
+                <a:latin typeface="Vazirmatn"/>
+                <a:cs typeface="Vazirmatn"/>
               </a:rPr>
               <a:t>  —  توپ روی کجای Face برخورد می‌کند؟</a:t>
             </a:r>
@@ -28920,8 +29406,8 @@
                 <a:solidFill>
                   <a:srgbClr val="1565C0"/>
                 </a:solidFill>
-                <a:latin typeface="Tahoma"/>
-                <a:cs typeface="Tahoma"/>
+                <a:latin typeface="Vazirmatn"/>
+                <a:cs typeface="Vazirmatn"/>
               </a:rPr>
               <a:t>●  </a:t>
             </a:r>
@@ -28930,8 +29416,8 @@
                 <a:solidFill>
                   <a:srgbClr val="1565C0"/>
                 </a:solidFill>
-                <a:latin typeface="Tahoma"/>
-                <a:cs typeface="Tahoma"/>
+                <a:latin typeface="Vazirmatn"/>
+                <a:cs typeface="Vazirmatn"/>
               </a:rPr>
               <a:t>Direction</a:t>
             </a:r>
@@ -28940,8 +29426,8 @@
                 <a:solidFill>
                   <a:srgbClr val="1F2A24"/>
                 </a:solidFill>
-                <a:latin typeface="Tahoma"/>
-                <a:cs typeface="Tahoma"/>
+                <a:latin typeface="Vazirmatn"/>
+                <a:cs typeface="Vazirmatn"/>
               </a:rPr>
               <a:t>  —  توپ به کدام سمت شروع می‌شود؟</a:t>
             </a:r>
@@ -28963,8 +29449,8 @@
                 <a:solidFill>
                   <a:srgbClr val="1565C0"/>
                 </a:solidFill>
-                <a:latin typeface="Tahoma"/>
-                <a:cs typeface="Tahoma"/>
+                <a:latin typeface="Vazirmatn"/>
+                <a:cs typeface="Vazirmatn"/>
               </a:rPr>
               <a:t>●  </a:t>
             </a:r>
@@ -28973,8 +29459,8 @@
                 <a:solidFill>
                   <a:srgbClr val="1565C0"/>
                 </a:solidFill>
-                <a:latin typeface="Tahoma"/>
-                <a:cs typeface="Tahoma"/>
+                <a:latin typeface="Vazirmatn"/>
+                <a:cs typeface="Vazirmatn"/>
               </a:rPr>
               <a:t>Launch</a:t>
             </a:r>
@@ -28983,8 +29469,8 @@
                 <a:solidFill>
                   <a:srgbClr val="1F2A24"/>
                 </a:solidFill>
-                <a:latin typeface="Tahoma"/>
-                <a:cs typeface="Tahoma"/>
+                <a:latin typeface="Vazirmatn"/>
+                <a:cs typeface="Vazirmatn"/>
               </a:rPr>
               <a:t>  —  توپ با چه ارتفاعی حرکت می‌کند؟</a:t>
             </a:r>
@@ -29006,8 +29492,8 @@
                 <a:solidFill>
                   <a:srgbClr val="1565C0"/>
                 </a:solidFill>
-                <a:latin typeface="Tahoma"/>
-                <a:cs typeface="Tahoma"/>
+                <a:latin typeface="Vazirmatn"/>
+                <a:cs typeface="Vazirmatn"/>
               </a:rPr>
               <a:t>●  </a:t>
             </a:r>
@@ -29016,8 +29502,8 @@
                 <a:solidFill>
                   <a:srgbClr val="1565C0"/>
                 </a:solidFill>
-                <a:latin typeface="Tahoma"/>
-                <a:cs typeface="Tahoma"/>
+                <a:latin typeface="Vazirmatn"/>
+                <a:cs typeface="Vazirmatn"/>
               </a:rPr>
               <a:t>تمرین</a:t>
             </a:r>
@@ -29026,8 +29512,8 @@
                 <a:solidFill>
                   <a:srgbClr val="1F2A24"/>
                 </a:solidFill>
-                <a:latin typeface="Tahoma"/>
-                <a:cs typeface="Tahoma"/>
+                <a:latin typeface="Vazirmatn"/>
+                <a:cs typeface="Vazirmatn"/>
               </a:rPr>
               <a:t>  —  ۱۰ توپ بزنید و برای هرکدام ثبت کنید:</a:t>
             </a:r>
@@ -29049,8 +29535,8 @@
                 <a:solidFill>
                   <a:srgbClr val="1565C0"/>
                 </a:solidFill>
-                <a:latin typeface="Tahoma"/>
-                <a:cs typeface="Tahoma"/>
+                <a:latin typeface="Vazirmatn"/>
+                <a:cs typeface="Vazirmatn"/>
               </a:rPr>
               <a:t>–  </a:t>
             </a:r>
@@ -29059,8 +29545,8 @@
                 <a:solidFill>
                   <a:srgbClr val="1F2A24"/>
                 </a:solidFill>
-                <a:latin typeface="Tahoma"/>
-                <a:cs typeface="Tahoma"/>
+                <a:latin typeface="Vazirmatn"/>
+                <a:cs typeface="Vazirmatn"/>
               </a:rPr>
               <a:t>جهت شروع، نقطه برخورد، Carry، Total و خطای اصلی</a:t>
             </a:r>
@@ -29195,8 +29681,8 @@
                 <a:solidFill>
                   <a:srgbClr val="1565C0"/>
                 </a:solidFill>
-                <a:latin typeface="Tahoma"/>
-                <a:cs typeface="Tahoma"/>
+                <a:latin typeface="Vazirmatn"/>
+                <a:cs typeface="Vazirmatn"/>
               </a:rPr>
               <a:t>نکته مربی:  </a:t>
             </a:r>
@@ -29205,8 +29691,8 @@
                 <a:solidFill>
                   <a:srgbClr val="1F2A24"/>
                 </a:solidFill>
-                <a:latin typeface="Tahoma"/>
-                <a:cs typeface="Tahoma"/>
+                <a:latin typeface="Vazirmatn"/>
+                <a:cs typeface="Vazirmatn"/>
               </a:rPr>
               <a:t>به‌جای «امروز خوب نزدم» بگویید: «بیشتر خطاها راست بود و Contact خارج از مرکز بود.»</a:t>
             </a:r>
@@ -29222,7 +29708,7 @@
         <p:spPr>
           <a:xfrm>
             <a:off x="502920" y="6400800"/>
-            <a:ext cx="5486400" cy="320040"/>
+            <a:ext cx="6858000" cy="320040"/>
           </a:xfrm>
           <a:prstGeom prst="rect">
             <a:avLst/>
@@ -29247,14 +29733,24 @@
               </a:spcAft>
             </a:pPr>
             <a:r>
+              <a:rPr sz="1100" b="1" i="0">
+                <a:solidFill>
+                  <a:srgbClr val="1565C0"/>
+                </a:solidFill>
+                <a:latin typeface="Vazirmatn"/>
+                <a:cs typeface="Vazirmatn"/>
+              </a:rPr>
+              <a:t>⛳ Puttclub</a:t>
+            </a:r>
+            <a:r>
               <a:rPr sz="1000" b="0" i="0">
                 <a:solidFill>
                   <a:srgbClr val="5C6B62"/>
                 </a:solidFill>
-                <a:latin typeface="Tahoma"/>
-                <a:cs typeface="Tahoma"/>
-              </a:rPr>
-              <a:t>Golf Academy  ·  Intermediate · Level 2</a:t>
+                <a:latin typeface="Vazirmatn"/>
+                <a:cs typeface="Vazirmatn"/>
+              </a:rPr>
+              <a:t>   ·   Intermediate · Level 2</a:t>
             </a:r>
           </a:p>
         </p:txBody>
@@ -29297,8 +29793,8 @@
                 <a:solidFill>
                   <a:srgbClr val="1565C0"/>
                 </a:solidFill>
-                <a:latin typeface="Tahoma"/>
-                <a:cs typeface="Tahoma"/>
+                <a:latin typeface="Vazirmatn"/>
+                <a:cs typeface="Vazirmatn"/>
               </a:rPr>
               <a:t>9</a:t>
             </a:r>
